--- a/deliverables/air-canada-foundry-hosted-agents-decision.pptx
+++ b/deliverables/air-canada-foundry-hosted-agents-decision.pptx
@@ -31,9 +31,14 @@
     <p:sldId id="279" r:id="rId25"/>
     <p:sldId id="280" r:id="rId26"/>
     <p:sldId id="281" r:id="rId27"/>
+    <p:sldId id="282" r:id="rId28"/>
+    <p:sldId id="283" r:id="rId29"/>
+    <p:sldId id="284" r:id="rId30"/>
+    <p:sldId id="285" r:id="rId31"/>
+    <p:sldId id="286" r:id="rId32"/>
   </p:sldIdLst>
   <p:notesMasterIdLst>
-    <p:notesMasterId r:id="rId28"/>
+    <p:notesMasterId r:id="rId33"/>
   </p:notesMasterIdLst>
   <p:sldSz cx="12192000" cy="6858000"/>
   <p:notesSz cx="6858000" cy="12192000"/>
@@ -615,7 +620,7 @@
           <a:p>
             <a:r>
               <a:rPr lang="en-US" dirty="0"/>
-              <a:t>Source: research.md (Lines 298, 508-513, 566-567)</a:t>
+              <a:t>Source: research.md (Lines 420-437, 386-388, 559)</a:t>
             </a:r>
             <a:endParaRPr lang="en-US" dirty="0"/>
           </a:p>
@@ -703,7 +708,7 @@
           <a:p>
             <a:r>
               <a:rPr lang="en-US" dirty="0"/>
-              <a:t>Source: research.md (Lines 518-533)</a:t>
+              <a:t>Source: research.md (Lines 424-430)</a:t>
             </a:r>
             <a:endParaRPr lang="en-US" dirty="0"/>
           </a:p>
@@ -791,7 +796,7 @@
           <a:p>
             <a:r>
               <a:rPr lang="en-US" dirty="0"/>
-              <a:t>Source: research.md (Lines 300-306, 568, 576)</a:t>
+              <a:t>Source: research.md (Lines 313-320, 373-400, 556-557)</a:t>
             </a:r>
             <a:endParaRPr lang="en-US" dirty="0"/>
           </a:p>
@@ -879,7 +884,7 @@
           <a:p>
             <a:r>
               <a:rPr lang="en-US" dirty="0"/>
-              <a:t>Source: research.md (Lines 572-611)</a:t>
+              <a:t>Source: research.md (Lines 388, 570, 576-579, 620)</a:t>
             </a:r>
             <a:endParaRPr lang="en-US" dirty="0"/>
           </a:p>
@@ -967,7 +972,7 @@
           <a:p>
             <a:r>
               <a:rPr lang="en-US" dirty="0"/>
-              <a:t>Source: research.md (Lines 489-506)</a:t>
+              <a:t>Source: assets/release-evidence/source/results.json; eval/run_hosted_evaluation.py; eval/evaluation_gate.py</a:t>
             </a:r>
             <a:endParaRPr lang="en-US" dirty="0"/>
           </a:p>
@@ -1055,7 +1060,7 @@
           <a:p>
             <a:r>
               <a:rPr lang="en-US" dirty="0"/>
-              <a:t>Source: research.md (Lines 489-506)</a:t>
+              <a:t>Source: .github/workflows/deploy-and-evaluate.yml; scripts/record-production-version.sh; Actions 34178081808</a:t>
             </a:r>
             <a:endParaRPr lang="en-US" dirty="0"/>
           </a:p>
@@ -1143,7 +1148,7 @@
           <a:p>
             <a:r>
               <a:rPr lang="en-US" dirty="0"/>
-              <a:t>Source: research.md (Lines 489-506)</a:t>
+              <a:t>Source: research.md (Lines 300-306, 568, 576)</a:t>
             </a:r>
             <a:endParaRPr lang="en-US" dirty="0"/>
           </a:p>
@@ -1231,7 +1236,7 @@
           <a:p>
             <a:r>
               <a:rPr lang="en-US" dirty="0"/>
-              <a:t>Source: research.md (Lines 554-570)</a:t>
+              <a:t>Source: research.md (Lines 572-611)</a:t>
             </a:r>
             <a:endParaRPr lang="en-US" dirty="0"/>
           </a:p>
@@ -1319,7 +1324,7 @@
           <a:p>
             <a:r>
               <a:rPr lang="en-US" dirty="0"/>
-              <a:t>Source: research.md (Lines 554-570)</a:t>
+              <a:t>Source: research.md (Lines 489-506)</a:t>
             </a:r>
             <a:endParaRPr lang="en-US" dirty="0"/>
           </a:p>
@@ -1407,7 +1412,7 @@
           <a:p>
             <a:r>
               <a:rPr lang="en-US" dirty="0"/>
-              <a:t>Source: research.md (Lines 578-579, 570)</a:t>
+              <a:t>Source: research.md (Lines 489-506)</a:t>
             </a:r>
             <a:endParaRPr lang="en-US" dirty="0"/>
           </a:p>
@@ -1495,7 +1500,9 @@
           <a:p>
             <a:r>
               <a:rPr lang="en-US" dirty="0"/>
-              <a:t>Source: research.md (Lines 535-537, 5, 420, 27-32)</a:t>
+              <a:t>Seven release jobs succeeded; recovery skipped. Staging 6; production 33 to 34. Both production gates used normal reviewer approval. PoC environment, not enterprise production certification.
+Source: https://github.com/devopsabcs-engineering/foundry-hosted-agents/actions/runs/34178081808
+Evidence: assets/release-evidence/source; SHA-256 manifest: assets/release-evidence/manifest.json. Images render downloaded artifacts, not native portal UI.</a:t>
             </a:r>
             <a:endParaRPr lang="en-US" dirty="0"/>
           </a:p>
@@ -1583,7 +1590,7 @@
           <a:p>
             <a:r>
               <a:rPr lang="en-US" dirty="0"/>
-              <a:t>Source: research.md (Lines 510-513, 298)</a:t>
+              <a:t>Source: research.md (Lines 489-506)</a:t>
             </a:r>
             <a:endParaRPr lang="en-US" dirty="0"/>
           </a:p>
@@ -1671,7 +1678,7 @@
           <a:p>
             <a:r>
               <a:rPr lang="en-US" dirty="0"/>
-              <a:t>Source: research.md (Lines 609-610, 577)</a:t>
+              <a:t>Source: research.md (Lines 554-570)</a:t>
             </a:r>
             <a:endParaRPr lang="en-US" dirty="0"/>
           </a:p>
@@ -1759,7 +1766,7 @@
           <a:p>
             <a:r>
               <a:rPr lang="en-US" dirty="0"/>
-              <a:t>Source: research.md (Lines 300-307)</a:t>
+              <a:t>Source: research.md (Lines 554-570)</a:t>
             </a:r>
             <a:endParaRPr lang="en-US" dirty="0"/>
           </a:p>
@@ -1847,7 +1854,7 @@
           <a:p>
             <a:r>
               <a:rPr lang="en-US" dirty="0"/>
-              <a:t>Source: research.md (Lines 313-320)</a:t>
+              <a:t>Source: research.md (Lines 578-579, 570)</a:t>
             </a:r>
             <a:endParaRPr lang="en-US" dirty="0"/>
           </a:p>
@@ -1935,7 +1942,7 @@
           <a:p>
             <a:r>
               <a:rPr lang="en-US" dirty="0"/>
-              <a:t>Source: research.md (Lines 5, 296, 356-369, 554-570)</a:t>
+              <a:t>Source: research.md (Lines 510-513, 298)</a:t>
             </a:r>
             <a:endParaRPr lang="en-US" dirty="0"/>
           </a:p>
@@ -2023,7 +2030,7 @@
           <a:p>
             <a:r>
               <a:rPr lang="en-US" dirty="0"/>
-              <a:t>Source: research.md (Lines 615-618)</a:t>
+              <a:t>Source: research.md (Lines 609-610, 577)</a:t>
             </a:r>
             <a:endParaRPr lang="en-US" dirty="0"/>
           </a:p>
@@ -2111,7 +2118,7 @@
           <a:p>
             <a:r>
               <a:rPr lang="en-US" dirty="0"/>
-              <a:t>Source: research.md (Lines 619-624)</a:t>
+              <a:t>Source: research.md (Lines 300-307)</a:t>
             </a:r>
             <a:endParaRPr lang="en-US" dirty="0"/>
           </a:p>
@@ -2135,6 +2142,270 @@
             <a:fld id="{F7021451-1387-4CA6-816F-3879F97B5CBC}" type="slidenum">
               <a:rPr lang="en-US"/>
               <a:t>26</a:t>
+            </a:fld>
+            <a:endParaRPr lang="en-US"/>
+          </a:p>
+        </p:txBody>
+      </p:sp>
+    </p:spTree>
+    <p:extLst>
+      <p:ext uri="{BB962C8B-B14F-4D97-AF65-F5344CB8AC3E}">
+        <p14:creationId xmlns:p14="http://schemas.microsoft.com/office/powerpoint/2010/main" val="1024086991"/>
+      </p:ext>
+    </p:extLst>
+  </p:cSld>
+  <p:clrMapOvr>
+    <a:masterClrMapping/>
+  </p:clrMapOvr>
+</p:notes>
+</file>
+
+<file path=ppt/notesSlides/notesSlide27.xml><?xml version="1.0" encoding="utf-8"?>
+<p:notes xmlns:a="http://schemas.openxmlformats.org/drawingml/2006/main" xmlns:r="http://schemas.openxmlformats.org/officeDocument/2006/relationships" xmlns:p="http://schemas.openxmlformats.org/presentationml/2006/main">
+  <p:cSld>
+    <p:spTree>
+      <p:nvGrpSpPr>
+        <p:cNvPr id="1" name=""/>
+        <p:cNvGrpSpPr/>
+        <p:nvPr/>
+      </p:nvGrpSpPr>
+      <p:grpSpPr>
+        <a:xfrm>
+          <a:off x="0" y="0"/>
+          <a:ext cx="0" cy="0"/>
+          <a:chOff x="0" y="0"/>
+          <a:chExt cx="0" cy="0"/>
+        </a:xfrm>
+      </p:grpSpPr>
+      <p:sp>
+        <p:nvSpPr>
+          <p:cNvPr id="2" name="Slide Image Placeholder 1"/>
+          <p:cNvSpPr>
+            <a:spLocks noGrp="1" noRot="1" noChangeAspect="1"/>
+          </p:cNvSpPr>
+          <p:nvPr>
+            <p:ph type="sldImg"/>
+          </p:nvPr>
+        </p:nvSpPr>
+        <p:spPr/>
+      </p:sp>
+      <p:sp>
+        <p:nvSpPr>
+          <p:cNvPr id="3" name="Notes Placeholder 2"/>
+          <p:cNvSpPr>
+            <a:spLocks noGrp="1"/>
+          </p:cNvSpPr>
+          <p:nvPr>
+            <p:ph type="body" idx="1"/>
+          </p:nvPr>
+        </p:nvSpPr>
+        <p:spPr/>
+        <p:txBody>
+          <a:bodyPr/>
+          <a:lstStyle/>
+          <a:p>
+            <a:r>
+              <a:rPr lang="en-US" dirty="0"/>
+              <a:t>Source: research.md (Lines 313-320)</a:t>
+            </a:r>
+            <a:endParaRPr lang="en-US" dirty="0"/>
+          </a:p>
+        </p:txBody>
+      </p:sp>
+      <p:sp>
+        <p:nvSpPr>
+          <p:cNvPr id="4" name="Slide Number Placeholder 3"/>
+          <p:cNvSpPr>
+            <a:spLocks noGrp="1"/>
+          </p:cNvSpPr>
+          <p:nvPr>
+            <p:ph type="sldNum" sz="quarter" idx="10"/>
+          </p:nvPr>
+        </p:nvSpPr>
+        <p:spPr/>
+        <p:txBody>
+          <a:bodyPr/>
+          <a:lstStyle/>
+          <a:p>
+            <a:fld id="{F7021451-1387-4CA6-816F-3879F97B5CBC}" type="slidenum">
+              <a:rPr lang="en-US"/>
+              <a:t>27</a:t>
+            </a:fld>
+            <a:endParaRPr lang="en-US"/>
+          </a:p>
+        </p:txBody>
+      </p:sp>
+    </p:spTree>
+    <p:extLst>
+      <p:ext uri="{BB962C8B-B14F-4D97-AF65-F5344CB8AC3E}">
+        <p14:creationId xmlns:p14="http://schemas.microsoft.com/office/powerpoint/2010/main" val="1024086991"/>
+      </p:ext>
+    </p:extLst>
+  </p:cSld>
+  <p:clrMapOvr>
+    <a:masterClrMapping/>
+  </p:clrMapOvr>
+</p:notes>
+</file>
+
+<file path=ppt/notesSlides/notesSlide28.xml><?xml version="1.0" encoding="utf-8"?>
+<p:notes xmlns:a="http://schemas.openxmlformats.org/drawingml/2006/main" xmlns:r="http://schemas.openxmlformats.org/officeDocument/2006/relationships" xmlns:p="http://schemas.openxmlformats.org/presentationml/2006/main">
+  <p:cSld>
+    <p:spTree>
+      <p:nvGrpSpPr>
+        <p:cNvPr id="1" name=""/>
+        <p:cNvGrpSpPr/>
+        <p:nvPr/>
+      </p:nvGrpSpPr>
+      <p:grpSpPr>
+        <a:xfrm>
+          <a:off x="0" y="0"/>
+          <a:ext cx="0" cy="0"/>
+          <a:chOff x="0" y="0"/>
+          <a:chExt cx="0" cy="0"/>
+        </a:xfrm>
+      </p:grpSpPr>
+      <p:sp>
+        <p:nvSpPr>
+          <p:cNvPr id="2" name="Slide Image Placeholder 1"/>
+          <p:cNvSpPr>
+            <a:spLocks noGrp="1" noRot="1" noChangeAspect="1"/>
+          </p:cNvSpPr>
+          <p:nvPr>
+            <p:ph type="sldImg"/>
+          </p:nvPr>
+        </p:nvSpPr>
+        <p:spPr/>
+      </p:sp>
+      <p:sp>
+        <p:nvSpPr>
+          <p:cNvPr id="3" name="Notes Placeholder 2"/>
+          <p:cNvSpPr>
+            <a:spLocks noGrp="1"/>
+          </p:cNvSpPr>
+          <p:nvPr>
+            <p:ph type="body" idx="1"/>
+          </p:nvPr>
+        </p:nvSpPr>
+        <p:spPr/>
+        <p:txBody>
+          <a:bodyPr/>
+          <a:lstStyle/>
+          <a:p>
+            <a:r>
+              <a:rPr lang="en-US" dirty="0"/>
+              <a:t>Source: research.md (Lines 5, 296, 356-369, 554-570)</a:t>
+            </a:r>
+            <a:endParaRPr lang="en-US" dirty="0"/>
+          </a:p>
+        </p:txBody>
+      </p:sp>
+      <p:sp>
+        <p:nvSpPr>
+          <p:cNvPr id="4" name="Slide Number Placeholder 3"/>
+          <p:cNvSpPr>
+            <a:spLocks noGrp="1"/>
+          </p:cNvSpPr>
+          <p:nvPr>
+            <p:ph type="sldNum" sz="quarter" idx="10"/>
+          </p:nvPr>
+        </p:nvSpPr>
+        <p:spPr/>
+        <p:txBody>
+          <a:bodyPr/>
+          <a:lstStyle/>
+          <a:p>
+            <a:fld id="{F7021451-1387-4CA6-816F-3879F97B5CBC}" type="slidenum">
+              <a:rPr lang="en-US"/>
+              <a:t>28</a:t>
+            </a:fld>
+            <a:endParaRPr lang="en-US"/>
+          </a:p>
+        </p:txBody>
+      </p:sp>
+    </p:spTree>
+    <p:extLst>
+      <p:ext uri="{BB962C8B-B14F-4D97-AF65-F5344CB8AC3E}">
+        <p14:creationId xmlns:p14="http://schemas.microsoft.com/office/powerpoint/2010/main" val="1024086991"/>
+      </p:ext>
+    </p:extLst>
+  </p:cSld>
+  <p:clrMapOvr>
+    <a:masterClrMapping/>
+  </p:clrMapOvr>
+</p:notes>
+</file>
+
+<file path=ppt/notesSlides/notesSlide29.xml><?xml version="1.0" encoding="utf-8"?>
+<p:notes xmlns:a="http://schemas.openxmlformats.org/drawingml/2006/main" xmlns:r="http://schemas.openxmlformats.org/officeDocument/2006/relationships" xmlns:p="http://schemas.openxmlformats.org/presentationml/2006/main">
+  <p:cSld>
+    <p:spTree>
+      <p:nvGrpSpPr>
+        <p:cNvPr id="1" name=""/>
+        <p:cNvGrpSpPr/>
+        <p:nvPr/>
+      </p:nvGrpSpPr>
+      <p:grpSpPr>
+        <a:xfrm>
+          <a:off x="0" y="0"/>
+          <a:ext cx="0" cy="0"/>
+          <a:chOff x="0" y="0"/>
+          <a:chExt cx="0" cy="0"/>
+        </a:xfrm>
+      </p:grpSpPr>
+      <p:sp>
+        <p:nvSpPr>
+          <p:cNvPr id="2" name="Slide Image Placeholder 1"/>
+          <p:cNvSpPr>
+            <a:spLocks noGrp="1" noRot="1" noChangeAspect="1"/>
+          </p:cNvSpPr>
+          <p:nvPr>
+            <p:ph type="sldImg"/>
+          </p:nvPr>
+        </p:nvSpPr>
+        <p:spPr/>
+      </p:sp>
+      <p:sp>
+        <p:nvSpPr>
+          <p:cNvPr id="3" name="Notes Placeholder 2"/>
+          <p:cNvSpPr>
+            <a:spLocks noGrp="1"/>
+          </p:cNvSpPr>
+          <p:nvPr>
+            <p:ph type="body" idx="1"/>
+          </p:nvPr>
+        </p:nvSpPr>
+        <p:spPr/>
+        <p:txBody>
+          <a:bodyPr/>
+          <a:lstStyle/>
+          <a:p>
+            <a:r>
+              <a:rPr lang="en-US" dirty="0"/>
+              <a:t>Source: research.md (Lines 615-618)</a:t>
+            </a:r>
+            <a:endParaRPr lang="en-US" dirty="0"/>
+          </a:p>
+        </p:txBody>
+      </p:sp>
+      <p:sp>
+        <p:nvSpPr>
+          <p:cNvPr id="4" name="Slide Number Placeholder 3"/>
+          <p:cNvSpPr>
+            <a:spLocks noGrp="1"/>
+          </p:cNvSpPr>
+          <p:nvPr>
+            <p:ph type="sldNum" sz="quarter" idx="10"/>
+          </p:nvPr>
+        </p:nvSpPr>
+        <p:spPr/>
+        <p:txBody>
+          <a:bodyPr/>
+          <a:lstStyle/>
+          <a:p>
+            <a:fld id="{F7021451-1387-4CA6-816F-3879F97B5CBC}" type="slidenum">
+              <a:rPr lang="en-US"/>
+              <a:t>29</a:t>
             </a:fld>
             <a:endParaRPr lang="en-US"/>
           </a:p>
@@ -2199,7 +2470,9 @@
           <a:p>
             <a:r>
               <a:rPr lang="en-US" dirty="0"/>
-              <a:t>Source: research.md (Lines 538-539, 572-583)</a:t>
+              <a:t>Eight captures; seven reports judged on coherence, groundedness, task adherence. All 21 passed at unchanged 100% thresholds. inject-001: deterministic safety refusal with no tools, not a judge pass. Zero policy failures. Incomplete output is retried, not rescored.
+Source: https://github.com/devopsabcs-engineering/foundry-hosted-agents/actions/runs/34178081808
+Evidence: assets/release-evidence/source; SHA-256 manifest: assets/release-evidence/manifest.json. Images render downloaded artifacts, not native portal UI.</a:t>
             </a:r>
             <a:endParaRPr lang="en-US" dirty="0"/>
           </a:p>
@@ -2223,6 +2496,182 @@
             <a:fld id="{F7021451-1387-4CA6-816F-3879F97B5CBC}" type="slidenum">
               <a:rPr lang="en-US"/>
               <a:t>3</a:t>
+            </a:fld>
+            <a:endParaRPr lang="en-US"/>
+          </a:p>
+        </p:txBody>
+      </p:sp>
+    </p:spTree>
+    <p:extLst>
+      <p:ext uri="{BB962C8B-B14F-4D97-AF65-F5344CB8AC3E}">
+        <p14:creationId xmlns:p14="http://schemas.microsoft.com/office/powerpoint/2010/main" val="1024086991"/>
+      </p:ext>
+    </p:extLst>
+  </p:cSld>
+  <p:clrMapOvr>
+    <a:masterClrMapping/>
+  </p:clrMapOvr>
+</p:notes>
+</file>
+
+<file path=ppt/notesSlides/notesSlide30.xml><?xml version="1.0" encoding="utf-8"?>
+<p:notes xmlns:a="http://schemas.openxmlformats.org/drawingml/2006/main" xmlns:r="http://schemas.openxmlformats.org/officeDocument/2006/relationships" xmlns:p="http://schemas.openxmlformats.org/presentationml/2006/main">
+  <p:cSld>
+    <p:spTree>
+      <p:nvGrpSpPr>
+        <p:cNvPr id="1" name=""/>
+        <p:cNvGrpSpPr/>
+        <p:nvPr/>
+      </p:nvGrpSpPr>
+      <p:grpSpPr>
+        <a:xfrm>
+          <a:off x="0" y="0"/>
+          <a:ext cx="0" cy="0"/>
+          <a:chOff x="0" y="0"/>
+          <a:chExt cx="0" cy="0"/>
+        </a:xfrm>
+      </p:grpSpPr>
+      <p:sp>
+        <p:nvSpPr>
+          <p:cNvPr id="2" name="Slide Image Placeholder 1"/>
+          <p:cNvSpPr>
+            <a:spLocks noGrp="1" noRot="1" noChangeAspect="1"/>
+          </p:cNvSpPr>
+          <p:nvPr>
+            <p:ph type="sldImg"/>
+          </p:nvPr>
+        </p:nvSpPr>
+        <p:spPr/>
+      </p:sp>
+      <p:sp>
+        <p:nvSpPr>
+          <p:cNvPr id="3" name="Notes Placeholder 2"/>
+          <p:cNvSpPr>
+            <a:spLocks noGrp="1"/>
+          </p:cNvSpPr>
+          <p:nvPr>
+            <p:ph type="body" idx="1"/>
+          </p:nvPr>
+        </p:nvSpPr>
+        <p:spPr/>
+        <p:txBody>
+          <a:bodyPr/>
+          <a:lstStyle/>
+          <a:p>
+            <a:r>
+              <a:rPr lang="en-US" dirty="0"/>
+              <a:t>Source: research.md (Lines 619-624); release 34178081808</a:t>
+            </a:r>
+            <a:endParaRPr lang="en-US" dirty="0"/>
+          </a:p>
+        </p:txBody>
+      </p:sp>
+      <p:sp>
+        <p:nvSpPr>
+          <p:cNvPr id="4" name="Slide Number Placeholder 3"/>
+          <p:cNvSpPr>
+            <a:spLocks noGrp="1"/>
+          </p:cNvSpPr>
+          <p:nvPr>
+            <p:ph type="sldNum" sz="quarter" idx="10"/>
+          </p:nvPr>
+        </p:nvSpPr>
+        <p:spPr/>
+        <p:txBody>
+          <a:bodyPr/>
+          <a:lstStyle/>
+          <a:p>
+            <a:fld id="{F7021451-1387-4CA6-816F-3879F97B5CBC}" type="slidenum">
+              <a:rPr lang="en-US"/>
+              <a:t>30</a:t>
+            </a:fld>
+            <a:endParaRPr lang="en-US"/>
+          </a:p>
+        </p:txBody>
+      </p:sp>
+    </p:spTree>
+    <p:extLst>
+      <p:ext uri="{BB962C8B-B14F-4D97-AF65-F5344CB8AC3E}">
+        <p14:creationId xmlns:p14="http://schemas.microsoft.com/office/powerpoint/2010/main" val="1024086991"/>
+      </p:ext>
+    </p:extLst>
+  </p:cSld>
+  <p:clrMapOvr>
+    <a:masterClrMapping/>
+  </p:clrMapOvr>
+</p:notes>
+</file>
+
+<file path=ppt/notesSlides/notesSlide31.xml><?xml version="1.0" encoding="utf-8"?>
+<p:notes xmlns:a="http://schemas.openxmlformats.org/drawingml/2006/main" xmlns:r="http://schemas.openxmlformats.org/officeDocument/2006/relationships" xmlns:p="http://schemas.openxmlformats.org/presentationml/2006/main">
+  <p:cSld>
+    <p:spTree>
+      <p:nvGrpSpPr>
+        <p:cNvPr id="1" name=""/>
+        <p:cNvGrpSpPr/>
+        <p:nvPr/>
+      </p:nvGrpSpPr>
+      <p:grpSpPr>
+        <a:xfrm>
+          <a:off x="0" y="0"/>
+          <a:ext cx="0" cy="0"/>
+          <a:chOff x="0" y="0"/>
+          <a:chExt cx="0" cy="0"/>
+        </a:xfrm>
+      </p:grpSpPr>
+      <p:sp>
+        <p:nvSpPr>
+          <p:cNvPr id="2" name="Slide Image Placeholder 1"/>
+          <p:cNvSpPr>
+            <a:spLocks noGrp="1" noRot="1" noChangeAspect="1"/>
+          </p:cNvSpPr>
+          <p:nvPr>
+            <p:ph type="sldImg"/>
+          </p:nvPr>
+        </p:nvSpPr>
+        <p:spPr/>
+      </p:sp>
+      <p:sp>
+        <p:nvSpPr>
+          <p:cNvPr id="3" name="Notes Placeholder 2"/>
+          <p:cNvSpPr>
+            <a:spLocks noGrp="1"/>
+          </p:cNvSpPr>
+          <p:nvPr>
+            <p:ph type="body" idx="1"/>
+          </p:nvPr>
+        </p:nvSpPr>
+        <p:spPr/>
+        <p:txBody>
+          <a:bodyPr/>
+          <a:lstStyle/>
+          <a:p>
+            <a:r>
+              <a:rPr lang="en-US" dirty="0"/>
+              <a:t>Source: research.md (Lines 619-624); release 34178081808</a:t>
+            </a:r>
+            <a:endParaRPr lang="en-US" dirty="0"/>
+          </a:p>
+        </p:txBody>
+      </p:sp>
+      <p:sp>
+        <p:nvSpPr>
+          <p:cNvPr id="4" name="Slide Number Placeholder 3"/>
+          <p:cNvSpPr>
+            <a:spLocks noGrp="1"/>
+          </p:cNvSpPr>
+          <p:nvPr>
+            <p:ph type="sldNum" sz="quarter" idx="10"/>
+          </p:nvPr>
+        </p:nvSpPr>
+        <p:spPr/>
+        <p:txBody>
+          <a:bodyPr/>
+          <a:lstStyle/>
+          <a:p>
+            <a:fld id="{F7021451-1387-4CA6-816F-3879F97B5CBC}" type="slidenum">
+              <a:rPr lang="en-US"/>
+              <a:t>31</a:t>
             </a:fld>
             <a:endParaRPr lang="en-US"/>
           </a:p>
@@ -2287,7 +2736,9 @@
           <a:p>
             <a:r>
               <a:rPr lang="en-US" dirty="0"/>
-              <a:t>Source: research.md (Lines 326-421, 489-506)</a:t>
+              <a:t>28 ToolMessage-derived receipts. tp-001 shows both Defender and both Anomaly tools. Receipts prove execution, not semantic correctness. Synthetic fixtures are not live Defender or airline telemetry. Safety case: no further tools. Bounded evidence attached to response.completed.
+Source: https://github.com/devopsabcs-engineering/foundry-hosted-agents/actions/runs/34178081808
+Evidence: assets/release-evidence/source; SHA-256 manifest: assets/release-evidence/manifest.json. Images render downloaded artifacts, not native portal UI.</a:t>
             </a:r>
             <a:endParaRPr lang="en-US" dirty="0"/>
           </a:p>
@@ -2375,7 +2826,9 @@
           <a:p>
             <a:r>
               <a:rPr lang="en-US" dirty="0"/>
-              <a:t>Source: research.md (Line 418, Lines 394-416, Lines 469-475)</a:t>
+              <a:t>Version 34 active, toolbox 1. Exact-version smoke succeeded. At 02:12:02 UTC AppExceptions for the trailing ten minutes returned zero. Not a ten-minute soak or complete tracing proof. Quality suite ran on staging. Production rebuilds the same source with evaluated MCP digests. Manual recovery; no automatic rollback or canary.
+Source: https://github.com/devopsabcs-engineering/foundry-hosted-agents/actions/runs/34178081808
+Evidence: assets/release-evidence/source; SHA-256 manifest: assets/release-evidence/manifest.json. Images render downloaded artifacts, not native portal UI.</a:t>
             </a:r>
             <a:endParaRPr lang="en-US" dirty="0"/>
           </a:p>
@@ -2463,7 +2916,7 @@
           <a:p>
             <a:r>
               <a:rPr lang="en-US" dirty="0"/>
-              <a:t>Source: research.md (Lines 420-437, 386-388, 559)</a:t>
+              <a:t>Source: research.md (Lines 535-537, 5, 420, 27-32)</a:t>
             </a:r>
             <a:endParaRPr lang="en-US" dirty="0"/>
           </a:p>
@@ -2551,7 +3004,7 @@
           <a:p>
             <a:r>
               <a:rPr lang="en-US" dirty="0"/>
-              <a:t>Source: research.md (Lines 424-430)</a:t>
+              <a:t>Source: research.md (Lines 538-539, 572-583)</a:t>
             </a:r>
             <a:endParaRPr lang="en-US" dirty="0"/>
           </a:p>
@@ -2639,7 +3092,7 @@
           <a:p>
             <a:r>
               <a:rPr lang="en-US" dirty="0"/>
-              <a:t>Source: research.md (Lines 313-320, 373-400, 556-557)</a:t>
+              <a:t>Source: research.md (Lines 326-421, 489-506)</a:t>
             </a:r>
             <a:endParaRPr lang="en-US" dirty="0"/>
           </a:p>
@@ -2727,7 +3180,7 @@
           <a:p>
             <a:r>
               <a:rPr lang="en-US" dirty="0"/>
-              <a:t>Source: research.md (Lines 388, 570, 576-579, 620)</a:t>
+              <a:t>Source: research.md (Line 418, Lines 394-416, Lines 469-475)</a:t>
             </a:r>
             <a:endParaRPr lang="en-US" dirty="0"/>
           </a:p>
@@ -3290,7 +3743,7 @@
                 <a:ea typeface="Segoe UI" pitchFamily="34" charset="-122"/>
                 <a:cs typeface="Segoe UI" pitchFamily="34" charset="-120"/>
               </a:rPr>
-              <a:t>Every claim on this deck is labeled CONFIRMED / PREVIEW / INFERRED / REQUIRES VALIDATION — see Appendix B.</a:t>
+              <a:t>Verified release: 2026-09-08 UTC | WI-11 resolved | staging 6 / production 34 | synthetic PoC data</a:t>
             </a:r>
             <a:endParaRPr lang="en-US" sz="1100" dirty="0"/>
           </a:p>
@@ -3565,7 +4018,7 @@
                 <a:ea typeface="Segoe UI" pitchFamily="34" charset="-122"/>
                 <a:cs typeface="Segoe UI" pitchFamily="34" charset="-120"/>
               </a:rPr>
-              <a:t>1 / 26</a:t>
+              <a:t>1 / 31</a:t>
             </a:r>
             <a:endParaRPr lang="en-US" sz="900" dirty="0"/>
           </a:p>
@@ -3656,7 +4109,7 @@
                 <a:ea typeface="Segoe UI" pitchFamily="34" charset="-122"/>
                 <a:cs typeface="Segoe UI" pitchFamily="34" charset="-120"/>
               </a:rPr>
-              <a:t>CORE SLIDE 9 OF 12</a:t>
+              <a:t>CORE SLIDE 5 OF 12</a:t>
             </a:r>
             <a:endParaRPr lang="en-US" sz="1100" dirty="0"/>
           </a:p>
@@ -3695,7 +4148,7 @@
                 <a:ea typeface="Segoe UI" pitchFamily="34" charset="-122"/>
                 <a:cs typeface="Segoe UI" pitchFamily="34" charset="-120"/>
               </a:rPr>
-              <a:t>Evaluation</a:t>
+              <a:t>Runtime Architecture — Multi-Agent</a:t>
             </a:r>
             <a:endParaRPr lang="en-US" sz="2600" dirty="0"/>
           </a:p>
@@ -3734,7 +4187,7 @@
                 <a:ea typeface="Segoe UI" pitchFamily="34" charset="-122"/>
                 <a:cs typeface="Segoe UI" pitchFamily="34" charset="-120"/>
               </a:rPr>
-              <a:t>Gate production releases on security-task outcomes, not generic fluency.</a:t>
+              <a:t>Show genuine multi-agent behavior in one deployment; A2A shown only as a dashed future boundary.</a:t>
             </a:r>
             <a:endParaRPr lang="en-US" sz="1300" dirty="0"/>
           </a:p>
@@ -3814,8 +4267,7 @@
                 <a:ea typeface="Segoe UI" pitchFamily="34" charset="-122"/>
                 <a:cs typeface="Segoe UI" pitchFamily="34" charset="-120"/>
               </a:rPr>
-              <a:t>Baseline: offline evaluation of versioned candidate outputs against a human-reviewed golden dataset (true/false positives, ambiguous evidence, missing data, conflicting tools, prompt injection, unauthorized actions, unsupported conclusions).
-</a:t>
+              <a:t>Graph composition: Supervisor → Evidence Investigator + Risk Analyst → Report Composer, all inside one hosted LangGraph deployment.</a:t>
             </a:r>
             <a:endParaRPr lang="en-US" sz="1000" dirty="0"/>
           </a:p>
@@ -3853,8 +4305,7 @@
                 <a:ea typeface="Segoe UI" pitchFamily="34" charset="-122"/>
                 <a:cs typeface="Segoe UI" pitchFamily="34" charset="-120"/>
               </a:rPr>
-              <a:t>Deterministic checks: schema validity, required citations, allowed tool calls, policy constraints.
-</a:t>
+              <a:t>Each role has separate prompts, tool permissions, state contracts, and evaluation criteria despite sharing one deployment.</a:t>
             </a:r>
             <a:endParaRPr lang="en-US" sz="1000" dirty="0"/>
           </a:p>
@@ -3869,13 +4320,13 @@
             <a:r>
               <a:rPr lang="en-US" sz="1000" b="1" dirty="0">
                 <a:solidFill>
-                  <a:srgbClr val="107C10"/>
-                </a:solidFill>
-                <a:latin typeface="Segoe UI" pitchFamily="34" charset="0"/>
-                <a:ea typeface="Segoe UI" pitchFamily="34" charset="-122"/>
-                <a:cs typeface="Segoe UI" pitchFamily="34" charset="-120"/>
-              </a:rPr>
-              <a:t>CONFIRMED  </a:t>
+                  <a:srgbClr val="0078D4"/>
+                </a:solidFill>
+                <a:latin typeface="Segoe UI" pitchFamily="34" charset="0"/>
+                <a:ea typeface="Segoe UI" pitchFamily="34" charset="-122"/>
+                <a:cs typeface="Segoe UI" pitchFamily="34" charset="-120"/>
+              </a:rPr>
+              <a:t>PREVIEW  </a:t>
             </a:r>
             <a:pPr indent="0" marL="0">
               <a:lnSpc>
@@ -3892,8 +4343,7 @@
                 <a:ea typeface="Segoe UI" pitchFamily="34" charset="-122"/>
                 <a:cs typeface="Segoe UI" pitchFamily="34" charset="-120"/>
               </a:rPr>
-              <a:t>Model-based evaluators: relevance, groundedness, task adherence, rubric scoring (built-in evaluator catalog exists).
-</a:t>
+              <a:t>Cross-deployment A2A delegation to a second hosted agent is a preview experiment, justified only by independent ownership/release/isolation/scaling needs — not a baseline requirement.</a:t>
             </a:r>
             <a:endParaRPr lang="en-US" sz="1000" dirty="0"/>
           </a:p>
@@ -3908,13 +4358,13 @@
             <a:r>
               <a:rPr lang="en-US" sz="1000" b="1" dirty="0">
                 <a:solidFill>
-                  <a:srgbClr val="107C10"/>
-                </a:solidFill>
-                <a:latin typeface="Segoe UI" pitchFamily="34" charset="0"/>
-                <a:ea typeface="Segoe UI" pitchFamily="34" charset="-122"/>
-                <a:cs typeface="Segoe UI" pitchFamily="34" charset="-120"/>
-              </a:rPr>
-              <a:t>CONFIRMED  </a:t>
+                  <a:srgbClr val="D13438"/>
+                </a:solidFill>
+                <a:latin typeface="Segoe UI" pitchFamily="34" charset="0"/>
+                <a:ea typeface="Segoe UI" pitchFamily="34" charset="-122"/>
+                <a:cs typeface="Segoe UI" pitchFamily="34" charset="-120"/>
+              </a:rPr>
+              <a:t>REQUIRES VALIDATION  </a:t>
             </a:r>
             <a:pPr indent="0" marL="0">
               <a:lnSpc>
@@ -3931,86 +4381,7 @@
                 <a:ea typeface="Segoe UI" pitchFamily="34" charset="-122"/>
                 <a:cs typeface="Segoe UI" pitchFamily="34" charset="-120"/>
               </a:rPr>
-              <a:t>Human review required for high-impact vulnerability conclusions and any recommendation triggering remediation or operational change.
-</a:t>
-            </a:r>
-            <a:endParaRPr lang="en-US" sz="1000" dirty="0"/>
-          </a:p>
-          <a:p>
-            <a:pPr marL="228600" indent="-228600">
-              <a:lnSpc>
-                <a:spcPct val="112000"/>
-              </a:lnSpc>
-              <a:buSzPct val="100000"/>
-              <a:buChar char="●"/>
-            </a:pPr>
-            <a:r>
-              <a:rPr lang="en-US" sz="1000" b="1" dirty="0">
-                <a:solidFill>
-                  <a:srgbClr val="0078D4"/>
-                </a:solidFill>
-                <a:latin typeface="Segoe UI" pitchFamily="34" charset="0"/>
-                <a:ea typeface="Segoe UI" pitchFamily="34" charset="-122"/>
-                <a:cs typeface="Segoe UI" pitchFamily="34" charset="-120"/>
-              </a:rPr>
-              <a:t>PREVIEW  </a:t>
-            </a:r>
-            <a:pPr indent="0" marL="0">
-              <a:lnSpc>
-                <a:spcPct val="112000"/>
-              </a:lnSpc>
-              <a:buNone/>
-            </a:pPr>
-            <a:r>
-              <a:rPr lang="en-US" sz="1200" dirty="0">
-                <a:solidFill>
-                  <a:srgbClr val="1A1A1A"/>
-                </a:solidFill>
-                <a:latin typeface="Segoe UI" pitchFamily="34" charset="0"/>
-                <a:ea typeface="Segoe UI" pitchFamily="34" charset="-122"/>
-                <a:cs typeface="Segoe UI" pitchFamily="34" charset="-120"/>
-              </a:rPr>
-              <a:t>Continuous evaluation of sampled production traffic is a separate preview and privacy decision — redaction and retention must be defined before enabling.
-</a:t>
-            </a:r>
-            <a:endParaRPr lang="en-US" sz="1000" dirty="0"/>
-          </a:p>
-          <a:p>
-            <a:pPr marL="228600" indent="-228600">
-              <a:lnSpc>
-                <a:spcPct val="112000"/>
-              </a:lnSpc>
-              <a:buSzPct val="100000"/>
-              <a:buChar char="●"/>
-            </a:pPr>
-            <a:r>
-              <a:rPr lang="en-US" sz="1000" b="1" dirty="0">
-                <a:solidFill>
-                  <a:srgbClr val="D13438"/>
-                </a:solidFill>
-                <a:latin typeface="Segoe UI" pitchFamily="34" charset="0"/>
-                <a:ea typeface="Segoe UI" pitchFamily="34" charset="-122"/>
-                <a:cs typeface="Segoe UI" pitchFamily="34" charset="-120"/>
-              </a:rPr>
-              <a:t>REQUIRES VALIDATION  </a:t>
-            </a:r>
-            <a:pPr indent="0" marL="0">
-              <a:lnSpc>
-                <a:spcPct val="112000"/>
-              </a:lnSpc>
-              <a:buNone/>
-            </a:pPr>
-            <a:r>
-              <a:rPr lang="en-US" sz="1200" dirty="0">
-                <a:solidFill>
-                  <a:srgbClr val="1A1A1A"/>
-                </a:solidFill>
-                <a:latin typeface="Segoe UI" pitchFamily="34" charset="0"/>
-                <a:ea typeface="Segoe UI" pitchFamily="34" charset="-122"/>
-                <a:cs typeface="Segoe UI" pitchFamily="34" charset="-120"/>
-              </a:rPr>
-              <a:t>GitHub Action (microsoft/ai-agent-evals@v3-beta) targeting the deployed hosted-agent name/version, and portal visibility of action-created runs.
-</a:t>
+              <a:t>No documented hard limit on graph node count or depth; the practical constraint is per-session sandbox CPU/memory, stated inconsistently across two Microsoft doc pages (0.5-2 vCPU fixed vs. 0.25-4.0 vCPU continuous).</a:t>
             </a:r>
             <a:endParaRPr lang="en-US" sz="1000" dirty="0"/>
           </a:p>
@@ -4108,7 +4479,7 @@
                 <a:ea typeface="Segoe UI" pitchFamily="34" charset="-122"/>
                 <a:cs typeface="Segoe UI" pitchFamily="34" charset="-120"/>
               </a:rPr>
-              <a:t>10 / 26</a:t>
+              <a:t>10 / 31</a:t>
             </a:r>
             <a:endParaRPr lang="en-US" sz="900" dirty="0"/>
           </a:p>
@@ -4199,7 +4570,7 @@
                 <a:ea typeface="Segoe UI" pitchFamily="34" charset="-122"/>
                 <a:cs typeface="Segoe UI" pitchFamily="34" charset="-120"/>
               </a:rPr>
-              <a:t>CORE SLIDE 10 OF 12</a:t>
+              <a:t>CORE SLIDE 6 OF 12</a:t>
             </a:r>
             <a:endParaRPr lang="en-US" sz="1100" dirty="0"/>
           </a:p>
@@ -4238,7 +4609,7 @@
                 <a:ea typeface="Segoe UI" pitchFamily="34" charset="-122"/>
                 <a:cs typeface="Segoe UI" pitchFamily="34" charset="-120"/>
               </a:rPr>
-              <a:t>Automation (CI/CD)</a:t>
+              <a:t>Tools and MCP</a:t>
             </a:r>
             <a:endParaRPr lang="en-US" sz="2600" dirty="0"/>
           </a:p>
@@ -4277,7 +4648,7 @@
                 <a:ea typeface="Segoe UI" pitchFamily="34" charset="-122"/>
                 <a:cs typeface="Segoe UI" pitchFamily="34" charset="-120"/>
               </a:rPr>
-              <a:t>Evaluate every candidate before production traffic moves; show the full staging-to-rollback pipeline.</a:t>
+              <a:t>Separate implementation, hosting, registration, and consumption into four distinct layers.</a:t>
             </a:r>
             <a:endParaRPr lang="en-US" sz="1300" dirty="0"/>
           </a:p>
@@ -4357,8 +4728,7 @@
                 <a:ea typeface="Segoe UI" pitchFamily="34" charset="-122"/>
                 <a:cs typeface="Segoe UI" pitchFamily="34" charset="-120"/>
               </a:rPr>
-              <a:t>Pipeline: lint/unit tests/dependency scan → Bicep validate + what-if → deploy immutable candidate to staging → smoke/contract/streaming tests → offline evaluation quality gate → manual production approval → deploy production version → canary/explicit route switch → post-deploy checks/monitoring → rollback on breach.
-</a:t>
+              <a:t>Layer 1 — Implementation: custom MCP server code (Defender tools, Anomaly tools).</a:t>
             </a:r>
             <a:endParaRPr lang="en-US" sz="1000" dirty="0"/>
           </a:p>
@@ -4396,8 +4766,7 @@
                 <a:ea typeface="Segoe UI" pitchFamily="34" charset="-122"/>
                 <a:cs typeface="Segoe UI" pitchFamily="34" charset="-120"/>
               </a:rPr>
-              <a:t>Bicep provisions infrastructure; azd or Foundry APIs deploy agent versions as a separate lifecycle from infrastructure changes.
-</a:t>
+              <a:t>Layer 2 — Hosting: independent Azure runtime (Container Apps, Functions, or App Service); owns its own auth, networking, versioning, health checks, and throttling.</a:t>
             </a:r>
             <a:endParaRPr lang="en-US" sz="1000" dirty="0"/>
           </a:p>
@@ -4435,8 +4804,159 @@
                 <a:ea typeface="Segoe UI" pitchFamily="34" charset="-122"/>
                 <a:cs typeface="Segoe UI" pitchFamily="34" charset="-120"/>
               </a:rPr>
-              <a:t>Evaluations run against a non-production candidate before traffic promotion; continuous evaluation (if approved) monitors production after release and does not replace the release gate.
-</a:t>
+              <a:t>Layer 3 — Registration: Foundry connections define endpoint and credential policy per MCP server.</a:t>
+            </a:r>
+            <a:endParaRPr lang="en-US" sz="1000" dirty="0"/>
+          </a:p>
+          <a:p>
+            <a:pPr marL="228600" indent="-228600">
+              <a:lnSpc>
+                <a:spcPct val="112000"/>
+              </a:lnSpc>
+              <a:buSzPct val="100000"/>
+              <a:buChar char="●"/>
+            </a:pPr>
+            <a:r>
+              <a:rPr lang="en-US" sz="1000" b="1" dirty="0">
+                <a:solidFill>
+                  <a:srgbClr val="D13438"/>
+                </a:solidFill>
+                <a:latin typeface="Segoe UI" pitchFamily="34" charset="0"/>
+                <a:ea typeface="Segoe UI" pitchFamily="34" charset="-122"/>
+                <a:cs typeface="Segoe UI" pitchFamily="34" charset="-120"/>
+              </a:rPr>
+              <a:t>REQUIRES VALIDATION  </a:t>
+            </a:r>
+            <a:pPr indent="0" marL="0">
+              <a:lnSpc>
+                <a:spcPct val="112000"/>
+              </a:lnSpc>
+              <a:buNone/>
+            </a:pPr>
+            <a:r>
+              <a:rPr lang="en-US" sz="1200" dirty="0">
+                <a:solidFill>
+                  <a:srgbClr val="1A1A1A"/>
+                </a:solidFill>
+                <a:latin typeface="Segoe UI" pitchFamily="34" charset="0"/>
+                <a:ea typeface="Segoe UI" pitchFamily="34" charset="-122"/>
+                <a:cs typeface="Segoe UI" pitchFamily="34" charset="-120"/>
+              </a:rPr>
+              <a:t>Layer 3 private-path reachability is untested.</a:t>
+            </a:r>
+            <a:endParaRPr lang="en-US" sz="1000" dirty="0"/>
+          </a:p>
+          <a:p>
+            <a:pPr marL="228600" indent="-228600">
+              <a:lnSpc>
+                <a:spcPct val="112000"/>
+              </a:lnSpc>
+              <a:buSzPct val="100000"/>
+              <a:buChar char="●"/>
+            </a:pPr>
+            <a:r>
+              <a:rPr lang="en-US" sz="1000" b="1" dirty="0">
+                <a:solidFill>
+                  <a:srgbClr val="107C10"/>
+                </a:solidFill>
+                <a:latin typeface="Segoe UI" pitchFamily="34" charset="0"/>
+                <a:ea typeface="Segoe UI" pitchFamily="34" charset="-122"/>
+                <a:cs typeface="Segoe UI" pitchFamily="34" charset="-120"/>
+              </a:rPr>
+              <a:t>CONFIRMED  </a:t>
+            </a:r>
+            <a:pPr indent="0" marL="0">
+              <a:lnSpc>
+                <a:spcPct val="112000"/>
+              </a:lnSpc>
+              <a:buNone/>
+            </a:pPr>
+            <a:r>
+              <a:rPr lang="en-US" sz="1200" dirty="0">
+                <a:solidFill>
+                  <a:srgbClr val="1A1A1A"/>
+                </a:solidFill>
+                <a:latin typeface="Segoe UI" pitchFamily="34" charset="0"/>
+                <a:ea typeface="Segoe UI" pitchFamily="34" charset="-122"/>
+                <a:cs typeface="Segoe UI" pitchFamily="34" charset="-120"/>
+              </a:rPr>
+              <a:t>Layer 4 — Consumption: Foundry Toolbox aggregates registered tools for reuse; LangGraph consumes via supported client libraries.</a:t>
+            </a:r>
+            <a:endParaRPr lang="en-US" sz="1000" dirty="0"/>
+          </a:p>
+          <a:p>
+            <a:pPr marL="228600" indent="-228600">
+              <a:lnSpc>
+                <a:spcPct val="112000"/>
+              </a:lnSpc>
+              <a:buSzPct val="100000"/>
+              <a:buChar char="●"/>
+            </a:pPr>
+            <a:r>
+              <a:rPr lang="en-US" sz="1000" b="1" dirty="0">
+                <a:solidFill>
+                  <a:srgbClr val="D13438"/>
+                </a:solidFill>
+                <a:latin typeface="Segoe UI" pitchFamily="34" charset="0"/>
+                <a:ea typeface="Segoe UI" pitchFamily="34" charset="-122"/>
+                <a:cs typeface="Segoe UI" pitchFamily="34" charset="-120"/>
+              </a:rPr>
+              <a:t>REQUIRES VALIDATION  </a:t>
+            </a:r>
+            <a:pPr indent="0" marL="0">
+              <a:lnSpc>
+                <a:spcPct val="112000"/>
+              </a:lnSpc>
+              <a:buNone/>
+            </a:pPr>
+            <a:r>
+              <a:rPr lang="en-US" sz="1200" dirty="0">
+                <a:solidFill>
+                  <a:srgbClr val="1A1A1A"/>
+                </a:solidFill>
+                <a:latin typeface="Segoe UI" pitchFamily="34" charset="0"/>
+                <a:ea typeface="Segoe UI" pitchFamily="34" charset="-122"/>
+                <a:cs typeface="Segoe UI" pitchFamily="34" charset="-120"/>
+              </a:rPr>
+              <a:t>Layer 4 private connectivity requires validation.</a:t>
+            </a:r>
+            <a:endParaRPr lang="en-US" sz="1000" dirty="0"/>
+          </a:p>
+          <a:p>
+            <a:pPr marL="228600" indent="-228600">
+              <a:lnSpc>
+                <a:spcPct val="112000"/>
+              </a:lnSpc>
+              <a:buSzPct val="100000"/>
+              <a:buChar char="●"/>
+            </a:pPr>
+            <a:r>
+              <a:rPr lang="en-US" sz="1000" b="1" dirty="0">
+                <a:solidFill>
+                  <a:srgbClr val="107C10"/>
+                </a:solidFill>
+                <a:latin typeface="Segoe UI" pitchFamily="34" charset="0"/>
+                <a:ea typeface="Segoe UI" pitchFamily="34" charset="-122"/>
+                <a:cs typeface="Segoe UI" pitchFamily="34" charset="-120"/>
+              </a:rPr>
+              <a:t>CONFIRMED  </a:t>
+            </a:r>
+            <a:pPr indent="0" marL="0">
+              <a:lnSpc>
+                <a:spcPct val="112000"/>
+              </a:lnSpc>
+              <a:buNone/>
+            </a:pPr>
+            <a:r>
+              <a:rPr lang="en-US" sz="1200" dirty="0">
+                <a:solidFill>
+                  <a:srgbClr val="1A1A1A"/>
+                </a:solidFill>
+                <a:latin typeface="Segoe UI" pitchFamily="34" charset="0"/>
+                <a:ea typeface="Segoe UI" pitchFamily="34" charset="-122"/>
+                <a:cs typeface="Segoe UI" pitchFamily="34" charset="-120"/>
+              </a:rPr>
+              <a:t>Toolbox is the registration/aggregation layer, not the hosting runtime for custom MCP server code — a documented distinction to avoid at architecture review.</a:t>
             </a:r>
             <a:endParaRPr lang="en-US" sz="1000" dirty="0"/>
           </a:p>
@@ -4534,7 +5054,7 @@
                 <a:ea typeface="Segoe UI" pitchFamily="34" charset="-122"/>
                 <a:cs typeface="Segoe UI" pitchFamily="34" charset="-120"/>
               </a:rPr>
-              <a:t>11 / 26</a:t>
+              <a:t>11 / 31</a:t>
             </a:r>
             <a:endParaRPr lang="en-US" sz="900" dirty="0"/>
           </a:p>
@@ -4625,7 +5145,7 @@
                 <a:ea typeface="Segoe UI" pitchFamily="34" charset="-122"/>
                 <a:cs typeface="Segoe UI" pitchFamily="34" charset="-120"/>
               </a:rPr>
-              <a:t>CORE SLIDE 11 OF 12</a:t>
+              <a:t>CORE SLIDE 7 OF 12</a:t>
             </a:r>
             <a:endParaRPr lang="en-US" sz="1100" dirty="0"/>
           </a:p>
@@ -4664,7 +5184,7 @@
                 <a:ea typeface="Segoe UI" pitchFamily="34" charset="-122"/>
                 <a:cs typeface="Segoe UI" pitchFamily="34" charset="-120"/>
               </a:rPr>
-              <a:t>Governance and Readiness</a:t>
+              <a:t>State and History</a:t>
             </a:r>
             <a:endParaRPr lang="en-US" sz="2600" dirty="0"/>
           </a:p>
@@ -4703,7 +5223,7 @@
                 <a:ea typeface="Segoe UI" pitchFamily="34" charset="-122"/>
                 <a:cs typeface="Segoe UI" pitchFamily="34" charset="-120"/>
               </a:rPr>
-              <a:t>Separate confirmed identity/RBAC controls from validation tracks and open blockers.</a:t>
+              <a:t>Choose one runtime source of truth; compare Responses history, application-owned Cosmos checkpoints, and Standard Agent Setup capability hosts.</a:t>
             </a:r>
             <a:endParaRPr lang="en-US" sz="1300" dirty="0"/>
           </a:p>
@@ -4783,8 +5303,7 @@
                 <a:ea typeface="Segoe UI" pitchFamily="34" charset="-122"/>
                 <a:cs typeface="Segoe UI" pitchFamily="34" charset="-120"/>
               </a:rPr>
-              <a:t>Confirmed baseline controls: each hosted agent gets an auto-created, dedicated Entra ID identity at deploy time (no manual managed-identity wiring); Foundry RBAC role family; Application Insights / OpenTelemetry tracing.
-</a:t>
+              <a:t>Option 1 — Foundry Responses history: platform-managed conversation history; sufficient for basic multi-turn interaction; no Cosmos DB required.</a:t>
             </a:r>
             <a:endParaRPr lang="en-US" sz="1000" dirty="0"/>
           </a:p>
@@ -4822,8 +5341,7 @@
                 <a:ea typeface="Segoe UI" pitchFamily="34" charset="-122"/>
                 <a:cs typeface="Segoe UI" pitchFamily="34" charset="-120"/>
               </a:rPr>
-              <a:t>Explicit warning: don't assign Cognitive Services * roles to a CI/CD identity — Foundry has its own role family for this.
-</a:t>
+              <a:t>Option 2 package (langchain-azure-cosmosdb, CosmosDBSaver) is co-maintained by LangChain and Microsoft.</a:t>
             </a:r>
             <a:endParaRPr lang="en-US" sz="1000" dirty="0"/>
           </a:p>
@@ -4861,8 +5379,7 @@
                 <a:ea typeface="Segoe UI" pitchFamily="34" charset="-122"/>
                 <a:cs typeface="Segoe UI" pitchFamily="34" charset="-120"/>
               </a:rPr>
-              <a:t>Agent 365 governance/registry onboarding: Agent 365 and Entra Agent ID are GA; SDK packages exist for Foundry tooling and LangChain observability — but no dedicated Hosted Agent onboarding guide, no confirmed LangGraph-specific package, and no proof a platform-created identity can be migrated in place.
-</a:t>
+              <a:t>Option 2 becomes authoritative graph state only when durable checkpoints, human-in-the-loop pause/resume, time travel, or app-controlled state are required — Hosted Agent pairing is untested.</a:t>
             </a:r>
             <a:endParaRPr lang="en-US" sz="1000" dirty="0"/>
           </a:p>
@@ -4877,13 +5394,13 @@
             <a:r>
               <a:rPr lang="en-US" sz="1000" b="1" dirty="0">
                 <a:solidFill>
-                  <a:srgbClr val="D13438"/>
-                </a:solidFill>
-                <a:latin typeface="Segoe UI" pitchFamily="34" charset="0"/>
-                <a:ea typeface="Segoe UI" pitchFamily="34" charset="-122"/>
-                <a:cs typeface="Segoe UI" pitchFamily="34" charset="-120"/>
-              </a:rPr>
-              <a:t>REQUIRES VALIDATION  </a:t>
+                  <a:srgbClr val="107C10"/>
+                </a:solidFill>
+                <a:latin typeface="Segoe UI" pitchFamily="34" charset="0"/>
+                <a:ea typeface="Segoe UI" pitchFamily="34" charset="-122"/>
+                <a:cs typeface="Segoe UI" pitchFamily="34" charset="-120"/>
+              </a:rPr>
+              <a:t>CONFIRMED  </a:t>
             </a:r>
             <a:pPr indent="0" marL="0">
               <a:lnSpc>
@@ -4900,8 +5417,83 @@
                 <a:ea typeface="Segoe UI" pitchFamily="34" charset="-122"/>
                 <a:cs typeface="Segoe UI" pitchFamily="34" charset="-120"/>
               </a:rPr>
-              <a:t>Platform SLA / GA status / regions / quotas / capacity / cold starts / disaster recovery — first Production Decision Gate item.
-</a:t>
+              <a:t>Option 3 — Standard Agent Setup via capabilityHosts (BYO Cosmos DB / Storage / AI Search): needed only for data-residency/compliance, a separate Bicep tier from Basic Agent Setup.</a:t>
+            </a:r>
+            <a:endParaRPr lang="en-US" sz="1000" dirty="0"/>
+          </a:p>
+          <a:p>
+            <a:pPr marL="228600" indent="-228600">
+              <a:lnSpc>
+                <a:spcPct val="112000"/>
+              </a:lnSpc>
+              <a:buSzPct val="100000"/>
+              <a:buChar char="●"/>
+            </a:pPr>
+            <a:r>
+              <a:rPr lang="en-US" sz="1000" b="1" dirty="0">
+                <a:solidFill>
+                  <a:srgbClr val="D13438"/>
+                </a:solidFill>
+                <a:latin typeface="Segoe UI" pitchFamily="34" charset="0"/>
+                <a:ea typeface="Segoe UI" pitchFamily="34" charset="-122"/>
+                <a:cs typeface="Segoe UI" pitchFamily="34" charset="-120"/>
+              </a:rPr>
+              <a:t>REQUIRES VALIDATION  </a:t>
+            </a:r>
+            <a:pPr indent="0" marL="0">
+              <a:lnSpc>
+                <a:spcPct val="112000"/>
+              </a:lnSpc>
+              <a:buNone/>
+            </a:pPr>
+            <a:r>
+              <a:rPr lang="en-US" sz="1200" dirty="0">
+                <a:solidFill>
+                  <a:srgbClr val="1A1A1A"/>
+                </a:solidFill>
+                <a:latin typeface="Segoe UI" pitchFamily="34" charset="0"/>
+                <a:ea typeface="Segoe UI" pitchFamily="34" charset="-122"/>
+                <a:cs typeface="Segoe UI" pitchFamily="34" charset="-120"/>
+              </a:rPr>
+              <a:t>No user-scoped conversation-list API was found in the researched documentation — an evidence gap, not proof of absence.</a:t>
+            </a:r>
+            <a:endParaRPr lang="en-US" sz="1000" dirty="0"/>
+          </a:p>
+          <a:p>
+            <a:pPr marL="228600" indent="-228600">
+              <a:lnSpc>
+                <a:spcPct val="112000"/>
+              </a:lnSpc>
+              <a:buSzPct val="100000"/>
+              <a:buChar char="●"/>
+            </a:pPr>
+            <a:r>
+              <a:rPr lang="en-US" sz="1000" b="1" dirty="0">
+                <a:solidFill>
+                  <a:srgbClr val="107C10"/>
+                </a:solidFill>
+                <a:latin typeface="Segoe UI" pitchFamily="34" charset="0"/>
+                <a:ea typeface="Segoe UI" pitchFamily="34" charset="-122"/>
+                <a:cs typeface="Segoe UI" pitchFamily="34" charset="-120"/>
+              </a:rPr>
+              <a:t>CONFIRMED  </a:t>
+            </a:r>
+            <a:pPr indent="0" marL="0">
+              <a:lnSpc>
+                <a:spcPct val="112000"/>
+              </a:lnSpc>
+              <a:buNone/>
+            </a:pPr>
+            <a:r>
+              <a:rPr lang="en-US" sz="1200" dirty="0">
+                <a:solidFill>
+                  <a:srgbClr val="1A1A1A"/>
+                </a:solidFill>
+                <a:latin typeface="Segoe UI" pitchFamily="34" charset="0"/>
+                <a:ea typeface="Segoe UI" pitchFamily="34" charset="-122"/>
+                <a:cs typeface="Segoe UI" pitchFamily="34" charset="-120"/>
+              </a:rPr>
+              <a:t>A sidebar can store metadata/identifiers without duplicating message bodies; duplicate-content compliance requirements need explicit retention/deletion/legal-hold design.</a:t>
             </a:r>
             <a:endParaRPr lang="en-US" sz="1000" dirty="0"/>
           </a:p>
@@ -4999,7 +5591,7 @@
                 <a:ea typeface="Segoe UI" pitchFamily="34" charset="-122"/>
                 <a:cs typeface="Segoe UI" pitchFamily="34" charset="-120"/>
               </a:rPr>
-              <a:t>12 / 26</a:t>
+              <a:t>12 / 31</a:t>
             </a:r>
             <a:endParaRPr lang="en-US" sz="900" dirty="0"/>
           </a:p>
@@ -5090,7 +5682,7 @@
                 <a:ea typeface="Segoe UI" pitchFamily="34" charset="-122"/>
                 <a:cs typeface="Segoe UI" pitchFamily="34" charset="-120"/>
               </a:rPr>
-              <a:t>CORE SLIDE 12 OF 12</a:t>
+              <a:t>CORE SLIDE 8 OF 12</a:t>
             </a:r>
             <a:endParaRPr lang="en-US" sz="1100" dirty="0"/>
           </a:p>
@@ -5129,7 +5721,7 @@
                 <a:ea typeface="Segoe UI" pitchFamily="34" charset="-122"/>
                 <a:cs typeface="Segoe UI" pitchFamily="34" charset="-120"/>
               </a:rPr>
-              <a:t>PoC Plan and Decision Gates</a:t>
+              <a:t>Scaling and Cost</a:t>
             </a:r>
             <a:endParaRPr lang="en-US" sz="2600" dirty="0"/>
           </a:p>
@@ -5168,7 +5760,7 @@
                 <a:ea typeface="Segoe UI" pitchFamily="34" charset="-122"/>
                 <a:cs typeface="Segoe UI" pitchFamily="34" charset="-120"/>
               </a:rPr>
-              <a:t>Four increments produce a defensible production decision, with owners, exit criteria, and a decision date.</a:t>
+              <a:t>Show that the scaling model is understood, but capacity and price are not yet quantified — unknowns stay visible.</a:t>
             </a:r>
             <a:endParaRPr lang="en-US" sz="1300" dirty="0"/>
           </a:p>
@@ -5248,8 +5840,7 @@
                 <a:ea typeface="Segoe UI" pitchFamily="34" charset="-122"/>
                 <a:cs typeface="Segoe UI" pitchFamily="34" charset="-120"/>
               </a:rPr>
-              <a:t>Increment 1 — Baseline Hosted Agent &amp; LangGraph Multi-Agent Runtime: supervisor graph + 3 specialist nodes; azure-ai-agentserver-langgraph wrapper on Responses protocol (port 8088); validate local run, Responses SSE, built-in conversation history; provision via Bicep, deploy via azd.
-</a:t>
+              <a:t>Scaling model: per-session isolation (each session is its own VM-isolated sandbox), not per-replica; idle timeout 5-60 min (default 15) triggers scale-to-zero with automatic state restore.</a:t>
             </a:r>
             <a:endParaRPr lang="en-US" sz="1000" dirty="0"/>
           </a:p>
@@ -5287,8 +5878,7 @@
                 <a:ea typeface="Segoe UI" pitchFamily="34" charset="-122"/>
                 <a:cs typeface="Segoe UI" pitchFamily="34" charset="-120"/>
               </a:rPr>
-              <a:t>Increment 2 — Decoupled MCP Tool Hosting &amp; Foundry Integration: Defender + Anomaly MCP servers on Container Apps with system-assigned managed identities and private networking; register as Foundry Custom Connections; bundle into Toolbox.
-</a:t>
+              <a:t>Billing model: vCPU-hour + GiB-hour of active session compute only — closest to Azure Container Apps consumption plan, not AKS always-on or App Service continuous billing.</a:t>
             </a:r>
             <a:endParaRPr lang="en-US" sz="1000" dirty="0"/>
           </a:p>
@@ -5303,13 +5893,13 @@
             <a:r>
               <a:rPr lang="en-US" sz="1000" b="1" dirty="0">
                 <a:solidFill>
-                  <a:srgbClr val="107C10"/>
-                </a:solidFill>
-                <a:latin typeface="Segoe UI" pitchFamily="34" charset="0"/>
-                <a:ea typeface="Segoe UI" pitchFamily="34" charset="-122"/>
-                <a:cs typeface="Segoe UI" pitchFamily="34" charset="-120"/>
-              </a:rPr>
-              <a:t>CONFIRMED  </a:t>
+                  <a:srgbClr val="D13438"/>
+                </a:solidFill>
+                <a:latin typeface="Segoe UI" pitchFamily="34" charset="0"/>
+                <a:ea typeface="Segoe UI" pitchFamily="34" charset="-122"/>
+                <a:cs typeface="Segoe UI" pitchFamily="34" charset="-120"/>
+              </a:rPr>
+              <a:t>REQUIRES VALIDATION  </a:t>
             </a:r>
             <a:pPr indent="0" marL="0">
               <a:lnSpc>
@@ -5326,8 +5916,7 @@
                 <a:ea typeface="Segoe UI" pitchFamily="34" charset="-122"/>
                 <a:cs typeface="Segoe UI" pitchFamily="34" charset="-120"/>
               </a:rPr>
-              <a:t>Increment 3 — Offline Security Evaluation Suite &amp; Automated CI/CD Gates: versioned golden dataset; deterministic schema checks + LLM-as-judge rubrics; GitHub Actions gate with threshold-gated promotion.
-</a:t>
+              <a:t>Unknown / TBD: exact $/vCPU-hr and $/GiB-hr rates (public pricing page showed "N/A"); maximum concurrent sessions; requests-per-second ceiling; same-thread turn concurrency; cold-start latency distribution.</a:t>
             </a:r>
             <a:endParaRPr lang="en-US" sz="1000" dirty="0"/>
           </a:p>
@@ -5365,8 +5954,7 @@
                 <a:ea typeface="Segoe UI" pitchFamily="34" charset="-122"/>
                 <a:cs typeface="Segoe UI" pitchFamily="34" charset="-120"/>
               </a:rPr>
-              <a:t>Increment 4 — Validation Tracks, Load Testing &amp; Production Decision Gates: Load &amp; Scale Gate, State Experiment Track, Governance Validation Track, Continuous Evaluation Track, Deliverable Synthesis — plan of record; individual track outcomes require validation.
-</a:t>
+              <a:t>Known cost drivers (formulas, not totals): model tokens, active session vCPU/memory, idle window, MCP hosting, telemetry, evaluation tokens, optional Cosmos DB and Agent 365 licensing, operations labor — amounts require validation.</a:t>
             </a:r>
             <a:endParaRPr lang="en-US" sz="1000" dirty="0"/>
           </a:p>
@@ -5404,47 +5992,7 @@
                 <a:ea typeface="Segoe UI" pitchFamily="34" charset="-122"/>
                 <a:cs typeface="Segoe UI" pitchFamily="34" charset="-120"/>
               </a:rPr>
-              <a:t>Decision gates requiring evidence before production approval: Platform status, Scale, Security, Data, Quality, Operations, Cost, Preview acceptance — full list in Appendix H.
-</a:t>
-            </a:r>
-            <a:endParaRPr lang="en-US" sz="1000" dirty="0"/>
-          </a:p>
-          <a:p>
-            <a:pPr marL="228600" indent="-228600">
-              <a:lnSpc>
-                <a:spcPct val="112000"/>
-              </a:lnSpc>
-              <a:buSzPct val="100000"/>
-              <a:buChar char="●"/>
-            </a:pPr>
-            <a:r>
-              <a:rPr lang="en-US" sz="1000" b="1" dirty="0">
-                <a:solidFill>
-                  <a:srgbClr val="D13438"/>
-                </a:solidFill>
-                <a:latin typeface="Segoe UI" pitchFamily="34" charset="0"/>
-                <a:ea typeface="Segoe UI" pitchFamily="34" charset="-122"/>
-                <a:cs typeface="Segoe UI" pitchFamily="34" charset="-120"/>
-              </a:rPr>
-              <a:t>REQUIRES VALIDATION  </a:t>
-            </a:r>
-            <a:pPr indent="0" marL="0">
-              <a:lnSpc>
-                <a:spcPct val="112000"/>
-              </a:lnSpc>
-              <a:buNone/>
-            </a:pPr>
-            <a:r>
-              <a:rPr lang="en-US" sz="1200" dirty="0">
-                <a:solidFill>
-                  <a:srgbClr val="1A1A1A"/>
-                </a:solidFill>
-                <a:latin typeface="Segoe UI" pitchFamily="34" charset="0"/>
-                <a:ea typeface="Segoe UI" pitchFamily="34" charset="-122"/>
-                <a:cs typeface="Segoe UI" pitchFamily="34" charset="-120"/>
-              </a:rPr>
-              <a:t>Owners and decision date: not specified in the research document — open item for the presenting team to fill in before delivery.
-</a:t>
+              <a:t>Full load-test matrix in Appendix E.</a:t>
             </a:r>
             <a:endParaRPr lang="en-US" sz="1000" dirty="0"/>
           </a:p>
@@ -5542,7 +6090,7 @@
                 <a:ea typeface="Segoe UI" pitchFamily="34" charset="-122"/>
                 <a:cs typeface="Segoe UI" pitchFamily="34" charset="-120"/>
               </a:rPr>
-              <a:t>13 / 26</a:t>
+              <a:t>13 / 31</a:t>
             </a:r>
             <a:endParaRPr lang="en-US" sz="900" dirty="0"/>
           </a:p>
@@ -5595,7 +6143,7 @@
             <a:avLst/>
           </a:prstGeom>
           <a:solidFill>
-            <a:srgbClr val="5C2D91"/>
+            <a:srgbClr val="0078D4"/>
           </a:solidFill>
           <a:ln/>
         </p:spPr>
@@ -5627,13 +6175,13 @@
             <a:r>
               <a:rPr lang="en-US" sz="1100" b="1" spc="100" kern="0" dirty="0">
                 <a:solidFill>
-                  <a:srgbClr val="5C2D91"/>
-                </a:solidFill>
-                <a:latin typeface="Segoe UI" pitchFamily="34" charset="0"/>
-                <a:ea typeface="Segoe UI" pitchFamily="34" charset="-122"/>
-                <a:cs typeface="Segoe UI" pitchFamily="34" charset="-120"/>
-              </a:rPr>
-              <a:t>APPENDIX</a:t>
+                  <a:srgbClr val="0078D4"/>
+                </a:solidFill>
+                <a:latin typeface="Segoe UI" pitchFamily="34" charset="0"/>
+                <a:ea typeface="Segoe UI" pitchFamily="34" charset="-122"/>
+                <a:cs typeface="Segoe UI" pitchFamily="34" charset="-120"/>
+              </a:rPr>
+              <a:t>CORE SLIDE 9 OF 12</a:t>
             </a:r>
             <a:endParaRPr lang="en-US" sz="1100" dirty="0"/>
           </a:p>
@@ -5672,6 +6220,2040 @@
                 <a:ea typeface="Segoe UI" pitchFamily="34" charset="-122"/>
                 <a:cs typeface="Segoe UI" pitchFamily="34" charset="-120"/>
               </a:rPr>
+              <a:t>Evaluation</a:t>
+            </a:r>
+            <a:endParaRPr lang="en-US" sz="2600" dirty="0"/>
+          </a:p>
+        </p:txBody>
+      </p:sp>
+      <p:sp>
+        <p:nvSpPr>
+          <p:cNvPr id="5" name="Text 3"/>
+          <p:cNvSpPr/>
+          <p:nvPr/>
+        </p:nvSpPr>
+        <p:spPr>
+          <a:xfrm>
+            <a:off x="457200" y="1078992"/>
+            <a:ext cx="11247120" cy="365760"/>
+          </a:xfrm>
+          <a:prstGeom prst="rect">
+            <a:avLst/>
+          </a:prstGeom>
+          <a:noFill/>
+          <a:ln/>
+        </p:spPr>
+        <p:txBody>
+          <a:bodyPr wrap="square" rtlCol="0" anchor="ctr"/>
+          <a:lstStyle/>
+          <a:p>
+            <a:pPr indent="0" marL="0">
+              <a:buNone/>
+            </a:pPr>
+            <a:r>
+              <a:rPr lang="en-US" sz="1300" i="1" dirty="0">
+                <a:solidFill>
+                  <a:srgbClr val="484848"/>
+                </a:solidFill>
+                <a:latin typeface="Segoe UI" pitchFamily="34" charset="0"/>
+                <a:ea typeface="Segoe UI" pitchFamily="34" charset="-122"/>
+                <a:cs typeface="Segoe UI" pitchFamily="34" charset="-120"/>
+              </a:rPr>
+              <a:t>Gate production releases on security-task outcomes, not generic fluency.</a:t>
+            </a:r>
+            <a:endParaRPr lang="en-US" sz="1300" dirty="0"/>
+          </a:p>
+        </p:txBody>
+      </p:sp>
+      <p:sp>
+        <p:nvSpPr>
+          <p:cNvPr id="6" name="Shape 4"/>
+          <p:cNvSpPr/>
+          <p:nvPr/>
+        </p:nvSpPr>
+        <p:spPr>
+          <a:xfrm>
+            <a:off x="457200" y="1481328"/>
+            <a:ext cx="11247120" cy="10973"/>
+          </a:xfrm>
+          <a:prstGeom prst="rect">
+            <a:avLst/>
+          </a:prstGeom>
+          <a:solidFill>
+            <a:srgbClr val="E1E5E8"/>
+          </a:solidFill>
+          <a:ln/>
+        </p:spPr>
+      </p:sp>
+      <p:sp>
+        <p:nvSpPr>
+          <p:cNvPr id="7" name="Text 5"/>
+          <p:cNvSpPr/>
+          <p:nvPr/>
+        </p:nvSpPr>
+        <p:spPr>
+          <a:xfrm>
+            <a:off x="502920" y="1691640"/>
+            <a:ext cx="11155680" cy="4709160"/>
+          </a:xfrm>
+          <a:prstGeom prst="rect">
+            <a:avLst/>
+          </a:prstGeom>
+          <a:noFill/>
+          <a:ln/>
+        </p:spPr>
+        <p:txBody>
+          <a:bodyPr wrap="square" rtlCol="0" anchor="t"/>
+          <a:lstStyle/>
+          <a:p>
+            <a:pPr marL="228600" indent="-228600">
+              <a:lnSpc>
+                <a:spcPct val="112000"/>
+              </a:lnSpc>
+              <a:buSzPct val="100000"/>
+              <a:buChar char="●"/>
+            </a:pPr>
+            <a:r>
+              <a:rPr lang="en-US" sz="1000" b="1" dirty="0">
+                <a:solidFill>
+                  <a:srgbClr val="107C10"/>
+                </a:solidFill>
+                <a:latin typeface="Segoe UI" pitchFamily="34" charset="0"/>
+                <a:ea typeface="Segoe UI" pitchFamily="34" charset="-122"/>
+                <a:cs typeface="Segoe UI" pitchFamily="34" charset="-120"/>
+              </a:rPr>
+              <a:t>CONFIRMED  </a:t>
+            </a:r>
+            <a:pPr indent="0" marL="0">
+              <a:lnSpc>
+                <a:spcPct val="112000"/>
+              </a:lnSpc>
+              <a:buNone/>
+            </a:pPr>
+            <a:r>
+              <a:rPr lang="en-US" sz="1200" dirty="0">
+                <a:solidFill>
+                  <a:srgbClr val="1A1A1A"/>
+                </a:solidFill>
+                <a:latin typeface="Segoe UI" pitchFamily="34" charset="0"/>
+                <a:ea typeface="Segoe UI" pitchFamily="34" charset="-122"/>
+                <a:cs typeface="Segoe UI" pitchFamily="34" charset="-120"/>
+              </a:rPr>
+              <a:t>Baseline: offline evaluation of versioned candidate outputs against a human-reviewed golden dataset (true/false positives, ambiguous evidence, missing data, conflicting tools, prompt injection, unauthorized actions, unsupported conclusions).</a:t>
+            </a:r>
+            <a:endParaRPr lang="en-US" sz="1000" dirty="0"/>
+          </a:p>
+          <a:p>
+            <a:pPr marL="228600" indent="-228600">
+              <a:lnSpc>
+                <a:spcPct val="112000"/>
+              </a:lnSpc>
+              <a:buSzPct val="100000"/>
+              <a:buChar char="●"/>
+            </a:pPr>
+            <a:r>
+              <a:rPr lang="en-US" sz="1000" b="1" dirty="0">
+                <a:solidFill>
+                  <a:srgbClr val="107C10"/>
+                </a:solidFill>
+                <a:latin typeface="Segoe UI" pitchFamily="34" charset="0"/>
+                <a:ea typeface="Segoe UI" pitchFamily="34" charset="-122"/>
+                <a:cs typeface="Segoe UI" pitchFamily="34" charset="-120"/>
+              </a:rPr>
+              <a:t>CONFIRMED  </a:t>
+            </a:r>
+            <a:pPr indent="0" marL="0">
+              <a:lnSpc>
+                <a:spcPct val="112000"/>
+              </a:lnSpc>
+              <a:buNone/>
+            </a:pPr>
+            <a:r>
+              <a:rPr lang="en-US" sz="1200" dirty="0">
+                <a:solidFill>
+                  <a:srgbClr val="1A1A1A"/>
+                </a:solidFill>
+                <a:latin typeface="Segoe UI" pitchFamily="34" charset="0"/>
+                <a:ea typeface="Segoe UI" pitchFamily="34" charset="-122"/>
+                <a:cs typeface="Segoe UI" pitchFamily="34" charset="-120"/>
+              </a:rPr>
+              <a:t>Verified capture: eight cases, zero deterministic policy failures, 28 runtime tool receipts; the injection case is an exact safety refusal with no tools.</a:t>
+            </a:r>
+            <a:endParaRPr lang="en-US" sz="1000" dirty="0"/>
+          </a:p>
+          <a:p>
+            <a:pPr marL="228600" indent="-228600">
+              <a:lnSpc>
+                <a:spcPct val="112000"/>
+              </a:lnSpc>
+              <a:buSzPct val="100000"/>
+              <a:buChar char="●"/>
+            </a:pPr>
+            <a:r>
+              <a:rPr lang="en-US" sz="1000" b="1" dirty="0">
+                <a:solidFill>
+                  <a:srgbClr val="107C10"/>
+                </a:solidFill>
+                <a:latin typeface="Segoe UI" pitchFamily="34" charset="0"/>
+                <a:ea typeface="Segoe UI" pitchFamily="34" charset="-122"/>
+                <a:cs typeface="Segoe UI" pitchFamily="34" charset="-120"/>
+              </a:rPr>
+              <a:t>CONFIRMED  </a:t>
+            </a:r>
+            <a:pPr indent="0" marL="0">
+              <a:lnSpc>
+                <a:spcPct val="112000"/>
+              </a:lnSpc>
+              <a:buNone/>
+            </a:pPr>
+            <a:r>
+              <a:rPr lang="en-US" sz="1200" dirty="0">
+                <a:solidFill>
+                  <a:srgbClr val="1A1A1A"/>
+                </a:solidFill>
+                <a:latin typeface="Segoe UI" pitchFamily="34" charset="0"/>
+                <a:ea typeface="Segoe UI" pitchFamily="34" charset="-122"/>
+                <a:cs typeface="Segoe UI" pitchFamily="34" charset="-120"/>
+              </a:rPr>
+              <a:t>Executed model judges: coherence, groundedness, task adherence. Seven reports per metric, 21/21 passes; each threshold remains 100%.</a:t>
+            </a:r>
+            <a:endParaRPr lang="en-US" sz="1000" dirty="0"/>
+          </a:p>
+          <a:p>
+            <a:pPr marL="228600" indent="-228600">
+              <a:lnSpc>
+                <a:spcPct val="112000"/>
+              </a:lnSpc>
+              <a:buSzPct val="100000"/>
+              <a:buChar char="●"/>
+            </a:pPr>
+            <a:r>
+              <a:rPr lang="en-US" sz="1000" b="1" dirty="0">
+                <a:solidFill>
+                  <a:srgbClr val="107C10"/>
+                </a:solidFill>
+                <a:latin typeface="Segoe UI" pitchFamily="34" charset="0"/>
+                <a:ea typeface="Segoe UI" pitchFamily="34" charset="-122"/>
+                <a:cs typeface="Segoe UI" pitchFamily="34" charset="-120"/>
+              </a:rPr>
+              <a:t>CONFIRMED  </a:t>
+            </a:r>
+            <a:pPr indent="0" marL="0">
+              <a:lnSpc>
+                <a:spcPct val="112000"/>
+              </a:lnSpc>
+              <a:buNone/>
+            </a:pPr>
+            <a:r>
+              <a:rPr lang="en-US" sz="1200" dirty="0">
+                <a:solidFill>
+                  <a:srgbClr val="1A1A1A"/>
+                </a:solidFill>
+                <a:latin typeface="Segoe UI" pitchFamily="34" charset="0"/>
+                <a:ea typeface="Segoe UI" pitchFamily="34" charset="-122"/>
+                <a:cs typeface="Segoe UI" pitchFamily="34" charset="-120"/>
+              </a:rPr>
+              <a:t>Human review required for high-impact vulnerability conclusions and any recommendation triggering remediation or operational change.</a:t>
+            </a:r>
+            <a:endParaRPr lang="en-US" sz="1000" dirty="0"/>
+          </a:p>
+          <a:p>
+            <a:pPr marL="228600" indent="-228600">
+              <a:lnSpc>
+                <a:spcPct val="112000"/>
+              </a:lnSpc>
+              <a:buSzPct val="100000"/>
+              <a:buChar char="●"/>
+            </a:pPr>
+            <a:r>
+              <a:rPr lang="en-US" sz="1000" b="1" dirty="0">
+                <a:solidFill>
+                  <a:srgbClr val="0078D4"/>
+                </a:solidFill>
+                <a:latin typeface="Segoe UI" pitchFamily="34" charset="0"/>
+                <a:ea typeface="Segoe UI" pitchFamily="34" charset="-122"/>
+                <a:cs typeface="Segoe UI" pitchFamily="34" charset="-120"/>
+              </a:rPr>
+              <a:t>PREVIEW  </a:t>
+            </a:r>
+            <a:pPr indent="0" marL="0">
+              <a:lnSpc>
+                <a:spcPct val="112000"/>
+              </a:lnSpc>
+              <a:buNone/>
+            </a:pPr>
+            <a:r>
+              <a:rPr lang="en-US" sz="1200" dirty="0">
+                <a:solidFill>
+                  <a:srgbClr val="1A1A1A"/>
+                </a:solidFill>
+                <a:latin typeface="Segoe UI" pitchFamily="34" charset="0"/>
+                <a:ea typeface="Segoe UI" pitchFamily="34" charset="-122"/>
+                <a:cs typeface="Segoe UI" pitchFamily="34" charset="-120"/>
+              </a:rPr>
+              <a:t>Continuous evaluation of sampled production traffic is a separate preview and privacy decision — redaction and retention must be defined before enabling.</a:t>
+            </a:r>
+            <a:endParaRPr lang="en-US" sz="1000" dirty="0"/>
+          </a:p>
+          <a:p>
+            <a:pPr marL="228600" indent="-228600">
+              <a:lnSpc>
+                <a:spcPct val="112000"/>
+              </a:lnSpc>
+              <a:buSzPct val="100000"/>
+              <a:buChar char="●"/>
+            </a:pPr>
+            <a:r>
+              <a:rPr lang="en-US" sz="1000" b="1" dirty="0">
+                <a:solidFill>
+                  <a:srgbClr val="107C10"/>
+                </a:solidFill>
+                <a:latin typeface="Segoe UI" pitchFamily="34" charset="0"/>
+                <a:ea typeface="Segoe UI" pitchFamily="34" charset="-122"/>
+                <a:cs typeface="Segoe UI" pitchFamily="34" charset="-120"/>
+              </a:rPr>
+              <a:t>CONFIRMED  </a:t>
+            </a:r>
+            <a:pPr indent="0" marL="0">
+              <a:lnSpc>
+                <a:spcPct val="112000"/>
+              </a:lnSpc>
+              <a:buNone/>
+            </a:pPr>
+            <a:r>
+              <a:rPr lang="en-US" sz="1200" dirty="0">
+                <a:solidFill>
+                  <a:srgbClr val="1A1A1A"/>
+                </a:solidFill>
+                <a:latin typeface="Segoe UI" pitchFamily="34" charset="0"/>
+                <a:ea typeface="Segoe UI" pitchFamily="34" charset="-122"/>
+                <a:cs typeface="Segoe UI" pitchFamily="34" charset="-120"/>
+              </a:rPr>
+              <a:t>Custom hosted capture/evaluation runner gates immutable staging version 6. Missing, duplicate, errored, or skipped results fail closed. No third-party evaluation Action is used.</a:t>
+            </a:r>
+            <a:endParaRPr lang="en-US" sz="1000" dirty="0"/>
+          </a:p>
+        </p:txBody>
+      </p:sp>
+      <p:sp>
+        <p:nvSpPr>
+          <p:cNvPr id="9" name="Shape 6"/>
+          <p:cNvSpPr/>
+          <p:nvPr/>
+        </p:nvSpPr>
+        <p:spPr>
+          <a:xfrm>
+            <a:off x="0" y="6784848"/>
+            <a:ext cx="12188952" cy="27432"/>
+          </a:xfrm>
+          <a:prstGeom prst="rect">
+            <a:avLst/>
+          </a:prstGeom>
+          <a:solidFill>
+            <a:srgbClr val="E1E5E8"/>
+          </a:solidFill>
+          <a:ln/>
+        </p:spPr>
+      </p:sp>
+      <p:sp>
+        <p:nvSpPr>
+          <p:cNvPr id="10" name="Text 7"/>
+          <p:cNvSpPr/>
+          <p:nvPr/>
+        </p:nvSpPr>
+        <p:spPr>
+          <a:xfrm>
+            <a:off x="457200" y="6537960"/>
+            <a:ext cx="8229600" cy="256032"/>
+          </a:xfrm>
+          <a:prstGeom prst="rect">
+            <a:avLst/>
+          </a:prstGeom>
+          <a:noFill/>
+          <a:ln/>
+        </p:spPr>
+        <p:txBody>
+          <a:bodyPr wrap="square" rtlCol="0" anchor="ctr"/>
+          <a:lstStyle/>
+          <a:p>
+            <a:pPr indent="0" marL="0">
+              <a:buNone/>
+            </a:pPr>
+            <a:r>
+              <a:rPr lang="en-US" sz="900" dirty="0">
+                <a:solidFill>
+                  <a:srgbClr val="767676"/>
+                </a:solidFill>
+                <a:latin typeface="Segoe UI" pitchFamily="34" charset="0"/>
+                <a:ea typeface="Segoe UI" pitchFamily="34" charset="-122"/>
+                <a:cs typeface="Segoe UI" pitchFamily="34" charset="-120"/>
+              </a:rPr>
+              <a:t>Air Canada — Foundry Hosted Agents Decision</a:t>
+            </a:r>
+            <a:endParaRPr lang="en-US" sz="900" dirty="0"/>
+          </a:p>
+        </p:txBody>
+      </p:sp>
+      <p:sp>
+        <p:nvSpPr>
+          <p:cNvPr id="11" name="Text 8"/>
+          <p:cNvSpPr/>
+          <p:nvPr/>
+        </p:nvSpPr>
+        <p:spPr>
+          <a:xfrm>
+            <a:off x="11430000" y="6528816"/>
+            <a:ext cx="640080" cy="256032"/>
+          </a:xfrm>
+          <a:prstGeom prst="rect">
+            <a:avLst/>
+          </a:prstGeom>
+          <a:noFill/>
+          <a:ln/>
+        </p:spPr>
+        <p:txBody>
+          <a:bodyPr wrap="square" rtlCol="0" anchor="ctr"/>
+          <a:lstStyle/>
+          <a:p>
+            <a:pPr algn="r" indent="0" marL="0">
+              <a:buNone/>
+            </a:pPr>
+            <a:r>
+              <a:rPr lang="en-US" sz="900" dirty="0">
+                <a:solidFill>
+                  <a:srgbClr val="767676"/>
+                </a:solidFill>
+                <a:latin typeface="Segoe UI" pitchFamily="34" charset="0"/>
+                <a:ea typeface="Segoe UI" pitchFamily="34" charset="-122"/>
+                <a:cs typeface="Segoe UI" pitchFamily="34" charset="-120"/>
+              </a:rPr>
+              <a:t>14 / 31</a:t>
+            </a:r>
+            <a:endParaRPr lang="en-US" sz="900" dirty="0"/>
+          </a:p>
+        </p:txBody>
+      </p:sp>
+    </p:spTree>
+  </p:cSld>
+  <p:clrMapOvr>
+    <a:masterClrMapping/>
+  </p:clrMapOvr>
+</p:sld>
+</file>
+
+<file path=ppt/slides/slide15.xml><?xml version="1.0" encoding="utf-8"?>
+<p:sld xmlns:a="http://schemas.openxmlformats.org/drawingml/2006/main" xmlns:r="http://schemas.openxmlformats.org/officeDocument/2006/relationships" xmlns:p="http://schemas.openxmlformats.org/presentationml/2006/main">
+  <p:cSld name="Slide 15">
+    <p:bg>
+      <p:bgPr>
+        <a:solidFill>
+          <a:srgbClr val="FAFBFC"/>
+        </a:solidFill>
+      </p:bgPr>
+    </p:bg>
+    <p:spTree>
+      <p:nvGrpSpPr>
+        <p:cNvPr id="1" name=""/>
+        <p:cNvGrpSpPr/>
+        <p:nvPr/>
+      </p:nvGrpSpPr>
+      <p:grpSpPr>
+        <a:xfrm>
+          <a:off x="0" y="0"/>
+          <a:ext cx="0" cy="0"/>
+          <a:chOff x="0" y="0"/>
+          <a:chExt cx="0" cy="0"/>
+        </a:xfrm>
+      </p:grpSpPr>
+      <p:sp>
+        <p:nvSpPr>
+          <p:cNvPr id="2" name="Shape 0"/>
+          <p:cNvSpPr/>
+          <p:nvPr/>
+        </p:nvSpPr>
+        <p:spPr>
+          <a:xfrm>
+            <a:off x="0" y="0"/>
+            <a:ext cx="12188952" cy="82296"/>
+          </a:xfrm>
+          <a:prstGeom prst="rect">
+            <a:avLst/>
+          </a:prstGeom>
+          <a:solidFill>
+            <a:srgbClr val="0078D4"/>
+          </a:solidFill>
+          <a:ln/>
+        </p:spPr>
+      </p:sp>
+      <p:sp>
+        <p:nvSpPr>
+          <p:cNvPr id="3" name="Text 1"/>
+          <p:cNvSpPr/>
+          <p:nvPr/>
+        </p:nvSpPr>
+        <p:spPr>
+          <a:xfrm>
+            <a:off x="457200" y="292608"/>
+            <a:ext cx="11247120" cy="274320"/>
+          </a:xfrm>
+          <a:prstGeom prst="rect">
+            <a:avLst/>
+          </a:prstGeom>
+          <a:noFill/>
+          <a:ln/>
+        </p:spPr>
+        <p:txBody>
+          <a:bodyPr wrap="square" rtlCol="0" anchor="ctr"/>
+          <a:lstStyle/>
+          <a:p>
+            <a:pPr indent="0" marL="0">
+              <a:buNone/>
+            </a:pPr>
+            <a:r>
+              <a:rPr lang="en-US" sz="1100" b="1" spc="100" kern="0" dirty="0">
+                <a:solidFill>
+                  <a:srgbClr val="0078D4"/>
+                </a:solidFill>
+                <a:latin typeface="Segoe UI" pitchFamily="34" charset="0"/>
+                <a:ea typeface="Segoe UI" pitchFamily="34" charset="-122"/>
+                <a:cs typeface="Segoe UI" pitchFamily="34" charset="-120"/>
+              </a:rPr>
+              <a:t>CORE SLIDE 10 OF 12</a:t>
+            </a:r>
+            <a:endParaRPr lang="en-US" sz="1100" dirty="0"/>
+          </a:p>
+        </p:txBody>
+      </p:sp>
+      <p:sp>
+        <p:nvSpPr>
+          <p:cNvPr id="4" name="Text 2"/>
+          <p:cNvSpPr/>
+          <p:nvPr/>
+        </p:nvSpPr>
+        <p:spPr>
+          <a:xfrm>
+            <a:off x="457200" y="548640"/>
+            <a:ext cx="11247120" cy="548640"/>
+          </a:xfrm>
+          <a:prstGeom prst="rect">
+            <a:avLst/>
+          </a:prstGeom>
+          <a:noFill/>
+          <a:ln/>
+        </p:spPr>
+        <p:txBody>
+          <a:bodyPr wrap="square" rtlCol="0" anchor="ctr"/>
+          <a:lstStyle/>
+          <a:p>
+            <a:pPr indent="0" marL="0">
+              <a:buNone/>
+            </a:pPr>
+            <a:r>
+              <a:rPr lang="en-US" sz="2600" b="1" dirty="0">
+                <a:solidFill>
+                  <a:srgbClr val="001B3D"/>
+                </a:solidFill>
+                <a:latin typeface="Segoe UI" pitchFamily="34" charset="0"/>
+                <a:ea typeface="Segoe UI" pitchFamily="34" charset="-122"/>
+                <a:cs typeface="Segoe UI" pitchFamily="34" charset="-120"/>
+              </a:rPr>
+              <a:t>Automation (CI/CD)</a:t>
+            </a:r>
+            <a:endParaRPr lang="en-US" sz="2600" dirty="0"/>
+          </a:p>
+        </p:txBody>
+      </p:sp>
+      <p:sp>
+        <p:nvSpPr>
+          <p:cNvPr id="5" name="Text 3"/>
+          <p:cNvSpPr/>
+          <p:nvPr/>
+        </p:nvSpPr>
+        <p:spPr>
+          <a:xfrm>
+            <a:off x="457200" y="1078992"/>
+            <a:ext cx="11247120" cy="365760"/>
+          </a:xfrm>
+          <a:prstGeom prst="rect">
+            <a:avLst/>
+          </a:prstGeom>
+          <a:noFill/>
+          <a:ln/>
+        </p:spPr>
+        <p:txBody>
+          <a:bodyPr wrap="square" rtlCol="0" anchor="ctr"/>
+          <a:lstStyle/>
+          <a:p>
+            <a:pPr indent="0" marL="0">
+              <a:buNone/>
+            </a:pPr>
+            <a:r>
+              <a:rPr lang="en-US" sz="1300" i="1" dirty="0">
+                <a:solidFill>
+                  <a:srgbClr val="484848"/>
+                </a:solidFill>
+                <a:latin typeface="Segoe UI" pitchFamily="34" charset="0"/>
+                <a:ea typeface="Segoe UI" pitchFamily="34" charset="-122"/>
+                <a:cs typeface="Segoe UI" pitchFamily="34" charset="-120"/>
+              </a:rPr>
+              <a:t>Verified staging-to-production path, normal approvals, and explicit manual recovery boundaries.</a:t>
+            </a:r>
+            <a:endParaRPr lang="en-US" sz="1300" dirty="0"/>
+          </a:p>
+        </p:txBody>
+      </p:sp>
+      <p:sp>
+        <p:nvSpPr>
+          <p:cNvPr id="6" name="Shape 4"/>
+          <p:cNvSpPr/>
+          <p:nvPr/>
+        </p:nvSpPr>
+        <p:spPr>
+          <a:xfrm>
+            <a:off x="457200" y="1481328"/>
+            <a:ext cx="11247120" cy="10973"/>
+          </a:xfrm>
+          <a:prstGeom prst="rect">
+            <a:avLst/>
+          </a:prstGeom>
+          <a:solidFill>
+            <a:srgbClr val="E1E5E8"/>
+          </a:solidFill>
+          <a:ln/>
+        </p:spPr>
+      </p:sp>
+      <p:sp>
+        <p:nvSpPr>
+          <p:cNvPr id="7" name="Text 5"/>
+          <p:cNvSpPr/>
+          <p:nvPr/>
+        </p:nvSpPr>
+        <p:spPr>
+          <a:xfrm>
+            <a:off x="502920" y="1691640"/>
+            <a:ext cx="11155680" cy="4709160"/>
+          </a:xfrm>
+          <a:prstGeom prst="rect">
+            <a:avLst/>
+          </a:prstGeom>
+          <a:noFill/>
+          <a:ln/>
+        </p:spPr>
+        <p:txBody>
+          <a:bodyPr wrap="square" rtlCol="0" anchor="t"/>
+          <a:lstStyle/>
+          <a:p>
+            <a:pPr marL="228600" indent="-228600">
+              <a:lnSpc>
+                <a:spcPct val="112000"/>
+              </a:lnSpc>
+              <a:buSzPct val="100000"/>
+              <a:buChar char="●"/>
+            </a:pPr>
+            <a:r>
+              <a:rPr lang="en-US" sz="1000" b="1" dirty="0">
+                <a:solidFill>
+                  <a:srgbClr val="107C10"/>
+                </a:solidFill>
+                <a:latin typeface="Segoe UI" pitchFamily="34" charset="0"/>
+                <a:ea typeface="Segoe UI" pitchFamily="34" charset="-122"/>
+                <a:cs typeface="Segoe UI" pitchFamily="34" charset="-120"/>
+              </a:rPr>
+              <a:t>CONFIRMED  </a:t>
+            </a:r>
+            <a:pPr indent="0" marL="0">
+              <a:lnSpc>
+                <a:spcPct val="112000"/>
+              </a:lnSpc>
+              <a:buNone/>
+            </a:pPr>
+            <a:r>
+              <a:rPr lang="en-US" sz="1200" dirty="0">
+                <a:solidFill>
+                  <a:srgbClr val="1A1A1A"/>
+                </a:solidFill>
+                <a:latin typeface="Segoe UI" pitchFamily="34" charset="0"/>
+                <a:ea typeface="Segoe UI" pitchFamily="34" charset="-122"/>
+                <a:cs typeface="Segoe UI" pitchFamily="34" charset="-120"/>
+              </a:rPr>
+              <a:t>Passed run 34178081808: lint/tests -&gt; Bicep/what-if -&gt; isolated staging -&gt; smoke/contract/streaming -&gt; evaluation -&gt; production approval/deploy -&gt; approved smoke/monitoring.</a:t>
+            </a:r>
+            <a:endParaRPr lang="en-US" sz="1000" dirty="0"/>
+          </a:p>
+          <a:p>
+            <a:pPr marL="228600" indent="-228600">
+              <a:lnSpc>
+                <a:spcPct val="112000"/>
+              </a:lnSpc>
+              <a:buSzPct val="100000"/>
+              <a:buChar char="●"/>
+            </a:pPr>
+            <a:r>
+              <a:rPr lang="en-US" sz="1000" b="1" dirty="0">
+                <a:solidFill>
+                  <a:srgbClr val="107C10"/>
+                </a:solidFill>
+                <a:latin typeface="Segoe UI" pitchFamily="34" charset="0"/>
+                <a:ea typeface="Segoe UI" pitchFamily="34" charset="-122"/>
+                <a:cs typeface="Segoe UI" pitchFamily="34" charset="-120"/>
+              </a:rPr>
+              <a:t>CONFIRMED  </a:t>
+            </a:r>
+            <a:pPr indent="0" marL="0">
+              <a:lnSpc>
+                <a:spcPct val="112000"/>
+              </a:lnSpc>
+              <a:buNone/>
+            </a:pPr>
+            <a:r>
+              <a:rPr lang="en-US" sz="1200" dirty="0">
+                <a:solidFill>
+                  <a:srgbClr val="1A1A1A"/>
+                </a:solidFill>
+                <a:latin typeface="Segoe UI" pitchFamily="34" charset="0"/>
+                <a:ea typeface="Segoe UI" pitchFamily="34" charset="-122"/>
+                <a:cs typeface="Segoe UI" pitchFamily="34" charset="-120"/>
+              </a:rPr>
+              <a:t>MCP images use the evaluated SHA-256 digests. The agent is remotely rebuilt from the same source, not promoted as an identical runtime binary.</a:t>
+            </a:r>
+            <a:endParaRPr lang="en-US" sz="1000" dirty="0"/>
+          </a:p>
+          <a:p>
+            <a:pPr marL="228600" indent="-228600">
+              <a:lnSpc>
+                <a:spcPct val="112000"/>
+              </a:lnSpc>
+              <a:buSzPct val="100000"/>
+              <a:buChar char="●"/>
+            </a:pPr>
+            <a:r>
+              <a:rPr lang="en-US" sz="1000" b="1" dirty="0">
+                <a:solidFill>
+                  <a:srgbClr val="D13438"/>
+                </a:solidFill>
+                <a:latin typeface="Segoe UI" pitchFamily="34" charset="0"/>
+                <a:ea typeface="Segoe UI" pitchFamily="34" charset="-122"/>
+                <a:cs typeface="Segoe UI" pitchFamily="34" charset="-120"/>
+              </a:rPr>
+              <a:t>REQUIRES VALIDATION  </a:t>
+            </a:r>
+            <a:pPr indent="0" marL="0">
+              <a:lnSpc>
+                <a:spcPct val="112000"/>
+              </a:lnSpc>
+              <a:buNone/>
+            </a:pPr>
+            <a:r>
+              <a:rPr lang="en-US" sz="1200" dirty="0">
+                <a:solidFill>
+                  <a:srgbClr val="1A1A1A"/>
+                </a:solidFill>
+                <a:latin typeface="Segoe UI" pitchFamily="34" charset="0"/>
+                <a:ea typeface="Segoe UI" pitchFamily="34" charset="-122"/>
+                <a:cs typeface="Segoe UI" pitchFamily="34" charset="-120"/>
+              </a:rPr>
+              <a:t>No automatic rollback or canary. Recovery job signals manual action; rehearse route and infrastructure recovery before live-data production.</a:t>
+            </a:r>
+            <a:endParaRPr lang="en-US" sz="1000" dirty="0"/>
+          </a:p>
+          <a:p>
+            <a:pPr marL="228600" indent="-228600">
+              <a:lnSpc>
+                <a:spcPct val="112000"/>
+              </a:lnSpc>
+              <a:buSzPct val="100000"/>
+              <a:buChar char="●"/>
+            </a:pPr>
+            <a:r>
+              <a:rPr lang="en-US" sz="1000" b="1" dirty="0">
+                <a:solidFill>
+                  <a:srgbClr val="107C10"/>
+                </a:solidFill>
+                <a:latin typeface="Segoe UI" pitchFamily="34" charset="0"/>
+                <a:ea typeface="Segoe UI" pitchFamily="34" charset="-122"/>
+                <a:cs typeface="Segoe UI" pitchFamily="34" charset="-120"/>
+              </a:rPr>
+              <a:t>CONFIRMED  </a:t>
+            </a:r>
+            <a:pPr indent="0" marL="0">
+              <a:lnSpc>
+                <a:spcPct val="112000"/>
+              </a:lnSpc>
+              <a:buNone/>
+            </a:pPr>
+            <a:r>
+              <a:rPr lang="en-US" sz="1200" dirty="0">
+                <a:solidFill>
+                  <a:srgbClr val="1A1A1A"/>
+                </a:solidFill>
+                <a:latin typeface="Segoe UI" pitchFamily="34" charset="0"/>
+                <a:ea typeface="Segoe UI" pitchFamily="34" charset="-122"/>
+                <a:cs typeface="Segoe UI" pitchFamily="34" charset="-120"/>
+              </a:rPr>
+              <a:t>Bicep provisions infrastructure; azd or Foundry APIs deploy agent versions as a separate lifecycle from infrastructure changes.</a:t>
+            </a:r>
+            <a:endParaRPr lang="en-US" sz="1000" dirty="0"/>
+          </a:p>
+          <a:p>
+            <a:pPr marL="228600" indent="-228600">
+              <a:lnSpc>
+                <a:spcPct val="112000"/>
+              </a:lnSpc>
+              <a:buSzPct val="100000"/>
+              <a:buChar char="●"/>
+            </a:pPr>
+            <a:r>
+              <a:rPr lang="en-US" sz="1000" b="1" dirty="0">
+                <a:solidFill>
+                  <a:srgbClr val="107C10"/>
+                </a:solidFill>
+                <a:latin typeface="Segoe UI" pitchFamily="34" charset="0"/>
+                <a:ea typeface="Segoe UI" pitchFamily="34" charset="-122"/>
+                <a:cs typeface="Segoe UI" pitchFamily="34" charset="-120"/>
+              </a:rPr>
+              <a:t>CONFIRMED  </a:t>
+            </a:r>
+            <a:pPr indent="0" marL="0">
+              <a:lnSpc>
+                <a:spcPct val="112000"/>
+              </a:lnSpc>
+              <a:buNone/>
+            </a:pPr>
+            <a:r>
+              <a:rPr lang="en-US" sz="1200" dirty="0">
+                <a:solidFill>
+                  <a:srgbClr val="1A1A1A"/>
+                </a:solidFill>
+                <a:latin typeface="Segoe UI" pitchFamily="34" charset="0"/>
+                <a:ea typeface="Segoe UI" pitchFamily="34" charset="-122"/>
+                <a:cs typeface="Segoe UI" pitchFamily="34" charset="-120"/>
+              </a:rPr>
+              <a:t>Evaluations run against a non-production candidate before traffic promotion; continuous evaluation (if approved) monitors production after release and does not replace the release gate.</a:t>
+            </a:r>
+            <a:endParaRPr lang="en-US" sz="1000" dirty="0"/>
+          </a:p>
+        </p:txBody>
+      </p:sp>
+      <p:sp>
+        <p:nvSpPr>
+          <p:cNvPr id="9" name="Shape 6"/>
+          <p:cNvSpPr/>
+          <p:nvPr/>
+        </p:nvSpPr>
+        <p:spPr>
+          <a:xfrm>
+            <a:off x="0" y="6784848"/>
+            <a:ext cx="12188952" cy="27432"/>
+          </a:xfrm>
+          <a:prstGeom prst="rect">
+            <a:avLst/>
+          </a:prstGeom>
+          <a:solidFill>
+            <a:srgbClr val="E1E5E8"/>
+          </a:solidFill>
+          <a:ln/>
+        </p:spPr>
+      </p:sp>
+      <p:sp>
+        <p:nvSpPr>
+          <p:cNvPr id="10" name="Text 7"/>
+          <p:cNvSpPr/>
+          <p:nvPr/>
+        </p:nvSpPr>
+        <p:spPr>
+          <a:xfrm>
+            <a:off x="457200" y="6537960"/>
+            <a:ext cx="8229600" cy="256032"/>
+          </a:xfrm>
+          <a:prstGeom prst="rect">
+            <a:avLst/>
+          </a:prstGeom>
+          <a:noFill/>
+          <a:ln/>
+        </p:spPr>
+        <p:txBody>
+          <a:bodyPr wrap="square" rtlCol="0" anchor="ctr"/>
+          <a:lstStyle/>
+          <a:p>
+            <a:pPr indent="0" marL="0">
+              <a:buNone/>
+            </a:pPr>
+            <a:r>
+              <a:rPr lang="en-US" sz="900" dirty="0">
+                <a:solidFill>
+                  <a:srgbClr val="767676"/>
+                </a:solidFill>
+                <a:latin typeface="Segoe UI" pitchFamily="34" charset="0"/>
+                <a:ea typeface="Segoe UI" pitchFamily="34" charset="-122"/>
+                <a:cs typeface="Segoe UI" pitchFamily="34" charset="-120"/>
+              </a:rPr>
+              <a:t>Air Canada — Foundry Hosted Agents Decision</a:t>
+            </a:r>
+            <a:endParaRPr lang="en-US" sz="900" dirty="0"/>
+          </a:p>
+        </p:txBody>
+      </p:sp>
+      <p:sp>
+        <p:nvSpPr>
+          <p:cNvPr id="11" name="Text 8"/>
+          <p:cNvSpPr/>
+          <p:nvPr/>
+        </p:nvSpPr>
+        <p:spPr>
+          <a:xfrm>
+            <a:off x="11430000" y="6528816"/>
+            <a:ext cx="640080" cy="256032"/>
+          </a:xfrm>
+          <a:prstGeom prst="rect">
+            <a:avLst/>
+          </a:prstGeom>
+          <a:noFill/>
+          <a:ln/>
+        </p:spPr>
+        <p:txBody>
+          <a:bodyPr wrap="square" rtlCol="0" anchor="ctr"/>
+          <a:lstStyle/>
+          <a:p>
+            <a:pPr algn="r" indent="0" marL="0">
+              <a:buNone/>
+            </a:pPr>
+            <a:r>
+              <a:rPr lang="en-US" sz="900" dirty="0">
+                <a:solidFill>
+                  <a:srgbClr val="767676"/>
+                </a:solidFill>
+                <a:latin typeface="Segoe UI" pitchFamily="34" charset="0"/>
+                <a:ea typeface="Segoe UI" pitchFamily="34" charset="-122"/>
+                <a:cs typeface="Segoe UI" pitchFamily="34" charset="-120"/>
+              </a:rPr>
+              <a:t>15 / 31</a:t>
+            </a:r>
+            <a:endParaRPr lang="en-US" sz="900" dirty="0"/>
+          </a:p>
+        </p:txBody>
+      </p:sp>
+    </p:spTree>
+  </p:cSld>
+  <p:clrMapOvr>
+    <a:masterClrMapping/>
+  </p:clrMapOvr>
+</p:sld>
+</file>
+
+<file path=ppt/slides/slide16.xml><?xml version="1.0" encoding="utf-8"?>
+<p:sld xmlns:a="http://schemas.openxmlformats.org/drawingml/2006/main" xmlns:r="http://schemas.openxmlformats.org/officeDocument/2006/relationships" xmlns:p="http://schemas.openxmlformats.org/presentationml/2006/main">
+  <p:cSld name="Slide 16">
+    <p:bg>
+      <p:bgPr>
+        <a:solidFill>
+          <a:srgbClr val="FAFBFC"/>
+        </a:solidFill>
+      </p:bgPr>
+    </p:bg>
+    <p:spTree>
+      <p:nvGrpSpPr>
+        <p:cNvPr id="1" name=""/>
+        <p:cNvGrpSpPr/>
+        <p:nvPr/>
+      </p:nvGrpSpPr>
+      <p:grpSpPr>
+        <a:xfrm>
+          <a:off x="0" y="0"/>
+          <a:ext cx="0" cy="0"/>
+          <a:chOff x="0" y="0"/>
+          <a:chExt cx="0" cy="0"/>
+        </a:xfrm>
+      </p:grpSpPr>
+      <p:sp>
+        <p:nvSpPr>
+          <p:cNvPr id="2" name="Shape 0"/>
+          <p:cNvSpPr/>
+          <p:nvPr/>
+        </p:nvSpPr>
+        <p:spPr>
+          <a:xfrm>
+            <a:off x="0" y="0"/>
+            <a:ext cx="12188952" cy="82296"/>
+          </a:xfrm>
+          <a:prstGeom prst="rect">
+            <a:avLst/>
+          </a:prstGeom>
+          <a:solidFill>
+            <a:srgbClr val="0078D4"/>
+          </a:solidFill>
+          <a:ln/>
+        </p:spPr>
+      </p:sp>
+      <p:sp>
+        <p:nvSpPr>
+          <p:cNvPr id="3" name="Text 1"/>
+          <p:cNvSpPr/>
+          <p:nvPr/>
+        </p:nvSpPr>
+        <p:spPr>
+          <a:xfrm>
+            <a:off x="457200" y="292608"/>
+            <a:ext cx="11247120" cy="274320"/>
+          </a:xfrm>
+          <a:prstGeom prst="rect">
+            <a:avLst/>
+          </a:prstGeom>
+          <a:noFill/>
+          <a:ln/>
+        </p:spPr>
+        <p:txBody>
+          <a:bodyPr wrap="square" rtlCol="0" anchor="ctr"/>
+          <a:lstStyle/>
+          <a:p>
+            <a:pPr indent="0" marL="0">
+              <a:buNone/>
+            </a:pPr>
+            <a:r>
+              <a:rPr lang="en-US" sz="1100" b="1" spc="100" kern="0" dirty="0">
+                <a:solidFill>
+                  <a:srgbClr val="0078D4"/>
+                </a:solidFill>
+                <a:latin typeface="Segoe UI" pitchFamily="34" charset="0"/>
+                <a:ea typeface="Segoe UI" pitchFamily="34" charset="-122"/>
+                <a:cs typeface="Segoe UI" pitchFamily="34" charset="-120"/>
+              </a:rPr>
+              <a:t>CORE SLIDE 11 OF 12</a:t>
+            </a:r>
+            <a:endParaRPr lang="en-US" sz="1100" dirty="0"/>
+          </a:p>
+        </p:txBody>
+      </p:sp>
+      <p:sp>
+        <p:nvSpPr>
+          <p:cNvPr id="4" name="Text 2"/>
+          <p:cNvSpPr/>
+          <p:nvPr/>
+        </p:nvSpPr>
+        <p:spPr>
+          <a:xfrm>
+            <a:off x="457200" y="548640"/>
+            <a:ext cx="11247120" cy="548640"/>
+          </a:xfrm>
+          <a:prstGeom prst="rect">
+            <a:avLst/>
+          </a:prstGeom>
+          <a:noFill/>
+          <a:ln/>
+        </p:spPr>
+        <p:txBody>
+          <a:bodyPr wrap="square" rtlCol="0" anchor="ctr"/>
+          <a:lstStyle/>
+          <a:p>
+            <a:pPr indent="0" marL="0">
+              <a:buNone/>
+            </a:pPr>
+            <a:r>
+              <a:rPr lang="en-US" sz="2600" b="1" dirty="0">
+                <a:solidFill>
+                  <a:srgbClr val="001B3D"/>
+                </a:solidFill>
+                <a:latin typeface="Segoe UI" pitchFamily="34" charset="0"/>
+                <a:ea typeface="Segoe UI" pitchFamily="34" charset="-122"/>
+                <a:cs typeface="Segoe UI" pitchFamily="34" charset="-120"/>
+              </a:rPr>
+              <a:t>Governance and Readiness</a:t>
+            </a:r>
+            <a:endParaRPr lang="en-US" sz="2600" dirty="0"/>
+          </a:p>
+        </p:txBody>
+      </p:sp>
+      <p:sp>
+        <p:nvSpPr>
+          <p:cNvPr id="5" name="Text 3"/>
+          <p:cNvSpPr/>
+          <p:nvPr/>
+        </p:nvSpPr>
+        <p:spPr>
+          <a:xfrm>
+            <a:off x="457200" y="1078992"/>
+            <a:ext cx="11247120" cy="365760"/>
+          </a:xfrm>
+          <a:prstGeom prst="rect">
+            <a:avLst/>
+          </a:prstGeom>
+          <a:noFill/>
+          <a:ln/>
+        </p:spPr>
+        <p:txBody>
+          <a:bodyPr wrap="square" rtlCol="0" anchor="ctr"/>
+          <a:lstStyle/>
+          <a:p>
+            <a:pPr indent="0" marL="0">
+              <a:buNone/>
+            </a:pPr>
+            <a:r>
+              <a:rPr lang="en-US" sz="1300" i="1" dirty="0">
+                <a:solidFill>
+                  <a:srgbClr val="484848"/>
+                </a:solidFill>
+                <a:latin typeface="Segoe UI" pitchFamily="34" charset="0"/>
+                <a:ea typeface="Segoe UI" pitchFamily="34" charset="-122"/>
+                <a:cs typeface="Segoe UI" pitchFamily="34" charset="-120"/>
+              </a:rPr>
+              <a:t>Separate confirmed identity/RBAC controls from validation tracks and open blockers.</a:t>
+            </a:r>
+            <a:endParaRPr lang="en-US" sz="1300" dirty="0"/>
+          </a:p>
+        </p:txBody>
+      </p:sp>
+      <p:sp>
+        <p:nvSpPr>
+          <p:cNvPr id="6" name="Shape 4"/>
+          <p:cNvSpPr/>
+          <p:nvPr/>
+        </p:nvSpPr>
+        <p:spPr>
+          <a:xfrm>
+            <a:off x="457200" y="1481328"/>
+            <a:ext cx="11247120" cy="10973"/>
+          </a:xfrm>
+          <a:prstGeom prst="rect">
+            <a:avLst/>
+          </a:prstGeom>
+          <a:solidFill>
+            <a:srgbClr val="E1E5E8"/>
+          </a:solidFill>
+          <a:ln/>
+        </p:spPr>
+      </p:sp>
+      <p:sp>
+        <p:nvSpPr>
+          <p:cNvPr id="7" name="Text 5"/>
+          <p:cNvSpPr/>
+          <p:nvPr/>
+        </p:nvSpPr>
+        <p:spPr>
+          <a:xfrm>
+            <a:off x="502920" y="1691640"/>
+            <a:ext cx="11155680" cy="4709160"/>
+          </a:xfrm>
+          <a:prstGeom prst="rect">
+            <a:avLst/>
+          </a:prstGeom>
+          <a:noFill/>
+          <a:ln/>
+        </p:spPr>
+        <p:txBody>
+          <a:bodyPr wrap="square" rtlCol="0" anchor="t"/>
+          <a:lstStyle/>
+          <a:p>
+            <a:pPr marL="228600" indent="-228600">
+              <a:lnSpc>
+                <a:spcPct val="112000"/>
+              </a:lnSpc>
+              <a:buSzPct val="100000"/>
+              <a:buChar char="●"/>
+            </a:pPr>
+            <a:r>
+              <a:rPr lang="en-US" sz="1000" b="1" dirty="0">
+                <a:solidFill>
+                  <a:srgbClr val="107C10"/>
+                </a:solidFill>
+                <a:latin typeface="Segoe UI" pitchFamily="34" charset="0"/>
+                <a:ea typeface="Segoe UI" pitchFamily="34" charset="-122"/>
+                <a:cs typeface="Segoe UI" pitchFamily="34" charset="-120"/>
+              </a:rPr>
+              <a:t>CONFIRMED  </a:t>
+            </a:r>
+            <a:pPr indent="0" marL="0">
+              <a:lnSpc>
+                <a:spcPct val="112000"/>
+              </a:lnSpc>
+              <a:buNone/>
+            </a:pPr>
+            <a:r>
+              <a:rPr lang="en-US" sz="1200" dirty="0">
+                <a:solidFill>
+                  <a:srgbClr val="1A1A1A"/>
+                </a:solidFill>
+                <a:latin typeface="Segoe UI" pitchFamily="34" charset="0"/>
+                <a:ea typeface="Segoe UI" pitchFamily="34" charset="-122"/>
+                <a:cs typeface="Segoe UI" pitchFamily="34" charset="-120"/>
+              </a:rPr>
+              <a:t>Runtime instance identity is distinct from CI OIDC and Blueprint identities. Checked account-scoped runtime roles: Foundry User and Cognitive Services OpenAI User.</a:t>
+            </a:r>
+            <a:endParaRPr lang="en-US" sz="1000" dirty="0"/>
+          </a:p>
+          <a:p>
+            <a:pPr marL="228600" indent="-228600">
+              <a:lnSpc>
+                <a:spcPct val="112000"/>
+              </a:lnSpc>
+              <a:buSzPct val="100000"/>
+              <a:buChar char="●"/>
+            </a:pPr>
+            <a:r>
+              <a:rPr lang="en-US" sz="1000" b="1" dirty="0">
+                <a:solidFill>
+                  <a:srgbClr val="107C10"/>
+                </a:solidFill>
+                <a:latin typeface="Segoe UI" pitchFamily="34" charset="0"/>
+                <a:ea typeface="Segoe UI" pitchFamily="34" charset="-122"/>
+                <a:cs typeface="Segoe UI" pitchFamily="34" charset="-120"/>
+              </a:rPr>
+              <a:t>CONFIRMED  </a:t>
+            </a:r>
+            <a:pPr indent="0" marL="0">
+              <a:lnSpc>
+                <a:spcPct val="112000"/>
+              </a:lnSpc>
+              <a:buNone/>
+            </a:pPr>
+            <a:r>
+              <a:rPr lang="en-US" sz="1200" dirty="0">
+                <a:solidFill>
+                  <a:srgbClr val="1A1A1A"/>
+                </a:solidFill>
+                <a:latin typeface="Segoe UI" pitchFamily="34" charset="0"/>
+                <a:ea typeface="Segoe UI" pitchFamily="34" charset="-122"/>
+                <a:cs typeface="Segoe UI" pitchFamily="34" charset="-120"/>
+              </a:rPr>
+              <a:t>Production smoke passed; AppExceptions query returned 0. Full specialist/model/tool trace coverage is not established by an exception count.</a:t>
+            </a:r>
+            <a:endParaRPr lang="en-US" sz="1000" dirty="0"/>
+          </a:p>
+          <a:p>
+            <a:pPr marL="228600" indent="-228600">
+              <a:lnSpc>
+                <a:spcPct val="112000"/>
+              </a:lnSpc>
+              <a:buSzPct val="100000"/>
+              <a:buChar char="●"/>
+            </a:pPr>
+            <a:r>
+              <a:rPr lang="en-US" sz="1000" b="1" dirty="0">
+                <a:solidFill>
+                  <a:srgbClr val="5C2D91"/>
+                </a:solidFill>
+                <a:latin typeface="Segoe UI" pitchFamily="34" charset="0"/>
+                <a:ea typeface="Segoe UI" pitchFamily="34" charset="-122"/>
+                <a:cs typeface="Segoe UI" pitchFamily="34" charset="-120"/>
+              </a:rPr>
+              <a:t>INFERRED  </a:t>
+            </a:r>
+            <a:pPr indent="0" marL="0">
+              <a:lnSpc>
+                <a:spcPct val="112000"/>
+              </a:lnSpc>
+              <a:buNone/>
+            </a:pPr>
+            <a:r>
+              <a:rPr lang="en-US" sz="1200" dirty="0">
+                <a:solidFill>
+                  <a:srgbClr val="1A1A1A"/>
+                </a:solidFill>
+                <a:latin typeface="Segoe UI" pitchFamily="34" charset="0"/>
+                <a:ea typeface="Segoe UI" pitchFamily="34" charset="-122"/>
+                <a:cs typeface="Segoe UI" pitchFamily="34" charset="-120"/>
+              </a:rPr>
+              <a:t>Agent 365 governance/registry onboarding: Agent 365 and Entra Agent ID are GA; SDK packages exist for Foundry tooling and LangChain observability — but no dedicated Hosted Agent onboarding guide, no confirmed LangGraph-specific package, and no proof a platform-created identity can be migrated in place.</a:t>
+            </a:r>
+            <a:endParaRPr lang="en-US" sz="1000" dirty="0"/>
+          </a:p>
+          <a:p>
+            <a:pPr marL="228600" indent="-228600">
+              <a:lnSpc>
+                <a:spcPct val="112000"/>
+              </a:lnSpc>
+              <a:buSzPct val="100000"/>
+              <a:buChar char="●"/>
+            </a:pPr>
+            <a:r>
+              <a:rPr lang="en-US" sz="1000" b="1" dirty="0">
+                <a:solidFill>
+                  <a:srgbClr val="D13438"/>
+                </a:solidFill>
+                <a:latin typeface="Segoe UI" pitchFamily="34" charset="0"/>
+                <a:ea typeface="Segoe UI" pitchFamily="34" charset="-122"/>
+                <a:cs typeface="Segoe UI" pitchFamily="34" charset="-120"/>
+              </a:rPr>
+              <a:t>REQUIRES VALIDATION  </a:t>
+            </a:r>
+            <a:pPr indent="0" marL="0">
+              <a:lnSpc>
+                <a:spcPct val="112000"/>
+              </a:lnSpc>
+              <a:buNone/>
+            </a:pPr>
+            <a:r>
+              <a:rPr lang="en-US" sz="1200" dirty="0">
+                <a:solidFill>
+                  <a:srgbClr val="1A1A1A"/>
+                </a:solidFill>
+                <a:latin typeface="Segoe UI" pitchFamily="34" charset="0"/>
+                <a:ea typeface="Segoe UI" pitchFamily="34" charset="-122"/>
+                <a:cs typeface="Segoe UI" pitchFamily="34" charset="-120"/>
+              </a:rPr>
+              <a:t>Platform SLA / GA status / regions / quotas / capacity / cold starts / disaster recovery — first Production Decision Gate item.</a:t>
+            </a:r>
+            <a:endParaRPr lang="en-US" sz="1000" dirty="0"/>
+          </a:p>
+        </p:txBody>
+      </p:sp>
+      <p:sp>
+        <p:nvSpPr>
+          <p:cNvPr id="9" name="Shape 6"/>
+          <p:cNvSpPr/>
+          <p:nvPr/>
+        </p:nvSpPr>
+        <p:spPr>
+          <a:xfrm>
+            <a:off x="0" y="6784848"/>
+            <a:ext cx="12188952" cy="27432"/>
+          </a:xfrm>
+          <a:prstGeom prst="rect">
+            <a:avLst/>
+          </a:prstGeom>
+          <a:solidFill>
+            <a:srgbClr val="E1E5E8"/>
+          </a:solidFill>
+          <a:ln/>
+        </p:spPr>
+      </p:sp>
+      <p:sp>
+        <p:nvSpPr>
+          <p:cNvPr id="10" name="Text 7"/>
+          <p:cNvSpPr/>
+          <p:nvPr/>
+        </p:nvSpPr>
+        <p:spPr>
+          <a:xfrm>
+            <a:off x="457200" y="6537960"/>
+            <a:ext cx="8229600" cy="256032"/>
+          </a:xfrm>
+          <a:prstGeom prst="rect">
+            <a:avLst/>
+          </a:prstGeom>
+          <a:noFill/>
+          <a:ln/>
+        </p:spPr>
+        <p:txBody>
+          <a:bodyPr wrap="square" rtlCol="0" anchor="ctr"/>
+          <a:lstStyle/>
+          <a:p>
+            <a:pPr indent="0" marL="0">
+              <a:buNone/>
+            </a:pPr>
+            <a:r>
+              <a:rPr lang="en-US" sz="900" dirty="0">
+                <a:solidFill>
+                  <a:srgbClr val="767676"/>
+                </a:solidFill>
+                <a:latin typeface="Segoe UI" pitchFamily="34" charset="0"/>
+                <a:ea typeface="Segoe UI" pitchFamily="34" charset="-122"/>
+                <a:cs typeface="Segoe UI" pitchFamily="34" charset="-120"/>
+              </a:rPr>
+              <a:t>Air Canada — Foundry Hosted Agents Decision</a:t>
+            </a:r>
+            <a:endParaRPr lang="en-US" sz="900" dirty="0"/>
+          </a:p>
+        </p:txBody>
+      </p:sp>
+      <p:sp>
+        <p:nvSpPr>
+          <p:cNvPr id="11" name="Text 8"/>
+          <p:cNvSpPr/>
+          <p:nvPr/>
+        </p:nvSpPr>
+        <p:spPr>
+          <a:xfrm>
+            <a:off x="11430000" y="6528816"/>
+            <a:ext cx="640080" cy="256032"/>
+          </a:xfrm>
+          <a:prstGeom prst="rect">
+            <a:avLst/>
+          </a:prstGeom>
+          <a:noFill/>
+          <a:ln/>
+        </p:spPr>
+        <p:txBody>
+          <a:bodyPr wrap="square" rtlCol="0" anchor="ctr"/>
+          <a:lstStyle/>
+          <a:p>
+            <a:pPr algn="r" indent="0" marL="0">
+              <a:buNone/>
+            </a:pPr>
+            <a:r>
+              <a:rPr lang="en-US" sz="900" dirty="0">
+                <a:solidFill>
+                  <a:srgbClr val="767676"/>
+                </a:solidFill>
+                <a:latin typeface="Segoe UI" pitchFamily="34" charset="0"/>
+                <a:ea typeface="Segoe UI" pitchFamily="34" charset="-122"/>
+                <a:cs typeface="Segoe UI" pitchFamily="34" charset="-120"/>
+              </a:rPr>
+              <a:t>16 / 31</a:t>
+            </a:r>
+            <a:endParaRPr lang="en-US" sz="900" dirty="0"/>
+          </a:p>
+        </p:txBody>
+      </p:sp>
+    </p:spTree>
+  </p:cSld>
+  <p:clrMapOvr>
+    <a:masterClrMapping/>
+  </p:clrMapOvr>
+</p:sld>
+</file>
+
+<file path=ppt/slides/slide17.xml><?xml version="1.0" encoding="utf-8"?>
+<p:sld xmlns:a="http://schemas.openxmlformats.org/drawingml/2006/main" xmlns:r="http://schemas.openxmlformats.org/officeDocument/2006/relationships" xmlns:p="http://schemas.openxmlformats.org/presentationml/2006/main">
+  <p:cSld name="Slide 17">
+    <p:bg>
+      <p:bgPr>
+        <a:solidFill>
+          <a:srgbClr val="FAFBFC"/>
+        </a:solidFill>
+      </p:bgPr>
+    </p:bg>
+    <p:spTree>
+      <p:nvGrpSpPr>
+        <p:cNvPr id="1" name=""/>
+        <p:cNvGrpSpPr/>
+        <p:nvPr/>
+      </p:nvGrpSpPr>
+      <p:grpSpPr>
+        <a:xfrm>
+          <a:off x="0" y="0"/>
+          <a:ext cx="0" cy="0"/>
+          <a:chOff x="0" y="0"/>
+          <a:chExt cx="0" cy="0"/>
+        </a:xfrm>
+      </p:grpSpPr>
+      <p:sp>
+        <p:nvSpPr>
+          <p:cNvPr id="2" name="Shape 0"/>
+          <p:cNvSpPr/>
+          <p:nvPr/>
+        </p:nvSpPr>
+        <p:spPr>
+          <a:xfrm>
+            <a:off x="0" y="0"/>
+            <a:ext cx="12188952" cy="82296"/>
+          </a:xfrm>
+          <a:prstGeom prst="rect">
+            <a:avLst/>
+          </a:prstGeom>
+          <a:solidFill>
+            <a:srgbClr val="0078D4"/>
+          </a:solidFill>
+          <a:ln/>
+        </p:spPr>
+      </p:sp>
+      <p:sp>
+        <p:nvSpPr>
+          <p:cNvPr id="3" name="Text 1"/>
+          <p:cNvSpPr/>
+          <p:nvPr/>
+        </p:nvSpPr>
+        <p:spPr>
+          <a:xfrm>
+            <a:off x="457200" y="292608"/>
+            <a:ext cx="11247120" cy="274320"/>
+          </a:xfrm>
+          <a:prstGeom prst="rect">
+            <a:avLst/>
+          </a:prstGeom>
+          <a:noFill/>
+          <a:ln/>
+        </p:spPr>
+        <p:txBody>
+          <a:bodyPr wrap="square" rtlCol="0" anchor="ctr"/>
+          <a:lstStyle/>
+          <a:p>
+            <a:pPr indent="0" marL="0">
+              <a:buNone/>
+            </a:pPr>
+            <a:r>
+              <a:rPr lang="en-US" sz="1100" b="1" spc="100" kern="0" dirty="0">
+                <a:solidFill>
+                  <a:srgbClr val="0078D4"/>
+                </a:solidFill>
+                <a:latin typeface="Segoe UI" pitchFamily="34" charset="0"/>
+                <a:ea typeface="Segoe UI" pitchFamily="34" charset="-122"/>
+                <a:cs typeface="Segoe UI" pitchFamily="34" charset="-120"/>
+              </a:rPr>
+              <a:t>CORE SLIDE 12 OF 12</a:t>
+            </a:r>
+            <a:endParaRPr lang="en-US" sz="1100" dirty="0"/>
+          </a:p>
+        </p:txBody>
+      </p:sp>
+      <p:sp>
+        <p:nvSpPr>
+          <p:cNvPr id="4" name="Text 2"/>
+          <p:cNvSpPr/>
+          <p:nvPr/>
+        </p:nvSpPr>
+        <p:spPr>
+          <a:xfrm>
+            <a:off x="457200" y="548640"/>
+            <a:ext cx="11247120" cy="548640"/>
+          </a:xfrm>
+          <a:prstGeom prst="rect">
+            <a:avLst/>
+          </a:prstGeom>
+          <a:noFill/>
+          <a:ln/>
+        </p:spPr>
+        <p:txBody>
+          <a:bodyPr wrap="square" rtlCol="0" anchor="ctr"/>
+          <a:lstStyle/>
+          <a:p>
+            <a:pPr indent="0" marL="0">
+              <a:buNone/>
+            </a:pPr>
+            <a:r>
+              <a:rPr lang="en-US" sz="2600" b="1" dirty="0">
+                <a:solidFill>
+                  <a:srgbClr val="001B3D"/>
+                </a:solidFill>
+                <a:latin typeface="Segoe UI" pitchFamily="34" charset="0"/>
+                <a:ea typeface="Segoe UI" pitchFamily="34" charset="-122"/>
+                <a:cs typeface="Segoe UI" pitchFamily="34" charset="-120"/>
+              </a:rPr>
+              <a:t>PoC Plan and Decision Gates</a:t>
+            </a:r>
+            <a:endParaRPr lang="en-US" sz="2600" dirty="0"/>
+          </a:p>
+        </p:txBody>
+      </p:sp>
+      <p:sp>
+        <p:nvSpPr>
+          <p:cNvPr id="5" name="Text 3"/>
+          <p:cNvSpPr/>
+          <p:nvPr/>
+        </p:nvSpPr>
+        <p:spPr>
+          <a:xfrm>
+            <a:off x="457200" y="1078992"/>
+            <a:ext cx="11247120" cy="365760"/>
+          </a:xfrm>
+          <a:prstGeom prst="rect">
+            <a:avLst/>
+          </a:prstGeom>
+          <a:noFill/>
+          <a:ln/>
+        </p:spPr>
+        <p:txBody>
+          <a:bodyPr wrap="square" rtlCol="0" anchor="ctr"/>
+          <a:lstStyle/>
+          <a:p>
+            <a:pPr indent="0" marL="0">
+              <a:buNone/>
+            </a:pPr>
+            <a:r>
+              <a:rPr lang="en-US" sz="1300" i="1" dirty="0">
+                <a:solidFill>
+                  <a:srgbClr val="484848"/>
+                </a:solidFill>
+                <a:latin typeface="Segoe UI" pitchFamily="34" charset="0"/>
+                <a:ea typeface="Segoe UI" pitchFamily="34" charset="-122"/>
+                <a:cs typeface="Segoe UI" pitchFamily="34" charset="-120"/>
+              </a:rPr>
+              <a:t>Four increments produce a defensible production decision, with owners, exit criteria, and a decision date.</a:t>
+            </a:r>
+            <a:endParaRPr lang="en-US" sz="1300" dirty="0"/>
+          </a:p>
+        </p:txBody>
+      </p:sp>
+      <p:sp>
+        <p:nvSpPr>
+          <p:cNvPr id="6" name="Shape 4"/>
+          <p:cNvSpPr/>
+          <p:nvPr/>
+        </p:nvSpPr>
+        <p:spPr>
+          <a:xfrm>
+            <a:off x="457200" y="1481328"/>
+            <a:ext cx="11247120" cy="10973"/>
+          </a:xfrm>
+          <a:prstGeom prst="rect">
+            <a:avLst/>
+          </a:prstGeom>
+          <a:solidFill>
+            <a:srgbClr val="E1E5E8"/>
+          </a:solidFill>
+          <a:ln/>
+        </p:spPr>
+      </p:sp>
+      <p:sp>
+        <p:nvSpPr>
+          <p:cNvPr id="7" name="Text 5"/>
+          <p:cNvSpPr/>
+          <p:nvPr/>
+        </p:nvSpPr>
+        <p:spPr>
+          <a:xfrm>
+            <a:off x="502920" y="1691640"/>
+            <a:ext cx="11155680" cy="4709160"/>
+          </a:xfrm>
+          <a:prstGeom prst="rect">
+            <a:avLst/>
+          </a:prstGeom>
+          <a:noFill/>
+          <a:ln/>
+        </p:spPr>
+        <p:txBody>
+          <a:bodyPr wrap="square" rtlCol="0" anchor="t"/>
+          <a:lstStyle/>
+          <a:p>
+            <a:pPr marL="228600" indent="-228600">
+              <a:lnSpc>
+                <a:spcPct val="112000"/>
+              </a:lnSpc>
+              <a:buSzPct val="100000"/>
+              <a:buChar char="●"/>
+            </a:pPr>
+            <a:r>
+              <a:rPr lang="en-US" sz="1000" b="1" dirty="0">
+                <a:solidFill>
+                  <a:srgbClr val="107C10"/>
+                </a:solidFill>
+                <a:latin typeface="Segoe UI" pitchFamily="34" charset="0"/>
+                <a:ea typeface="Segoe UI" pitchFamily="34" charset="-122"/>
+                <a:cs typeface="Segoe UI" pitchFamily="34" charset="-120"/>
+              </a:rPr>
+              <a:t>CONFIRMED  </a:t>
+            </a:r>
+            <a:pPr indent="0" marL="0">
+              <a:lnSpc>
+                <a:spcPct val="112000"/>
+              </a:lnSpc>
+              <a:buNone/>
+            </a:pPr>
+            <a:r>
+              <a:rPr lang="en-US" sz="1200" dirty="0">
+                <a:solidFill>
+                  <a:srgbClr val="1A1A1A"/>
+                </a:solidFill>
+                <a:latin typeface="Segoe UI" pitchFamily="34" charset="0"/>
+                <a:ea typeface="Segoe UI" pitchFamily="34" charset="-122"/>
+                <a:cs typeface="Segoe UI" pitchFamily="34" charset="-120"/>
+              </a:rPr>
+              <a:t>Increment 1 — Baseline Hosted Agent &amp; LangGraph Multi-Agent Runtime: supervisor graph + 3 specialist nodes; azure-ai-agentserver-langgraph wrapper on Responses protocol (port 8088); validate local run, Responses SSE, built-in conversation history; provision via Bicep, deploy via azd.</a:t>
+            </a:r>
+            <a:endParaRPr lang="en-US" sz="1000" dirty="0"/>
+          </a:p>
+          <a:p>
+            <a:pPr marL="228600" indent="-228600">
+              <a:lnSpc>
+                <a:spcPct val="112000"/>
+              </a:lnSpc>
+              <a:buSzPct val="100000"/>
+              <a:buChar char="●"/>
+            </a:pPr>
+            <a:r>
+              <a:rPr lang="en-US" sz="1000" b="1" dirty="0">
+                <a:solidFill>
+                  <a:srgbClr val="107C10"/>
+                </a:solidFill>
+                <a:latin typeface="Segoe UI" pitchFamily="34" charset="0"/>
+                <a:ea typeface="Segoe UI" pitchFamily="34" charset="-122"/>
+                <a:cs typeface="Segoe UI" pitchFamily="34" charset="-120"/>
+              </a:rPr>
+              <a:t>CONFIRMED  </a:t>
+            </a:r>
+            <a:pPr indent="0" marL="0">
+              <a:lnSpc>
+                <a:spcPct val="112000"/>
+              </a:lnSpc>
+              <a:buNone/>
+            </a:pPr>
+            <a:r>
+              <a:rPr lang="en-US" sz="1200" dirty="0">
+                <a:solidFill>
+                  <a:srgbClr val="1A1A1A"/>
+                </a:solidFill>
+                <a:latin typeface="Segoe UI" pitchFamily="34" charset="0"/>
+                <a:ea typeface="Segoe UI" pitchFamily="34" charset="-122"/>
+                <a:cs typeface="Segoe UI" pitchFamily="34" charset="-120"/>
+              </a:rPr>
+              <a:t>Increment 2 delivered: separate staging/production MCP apps, RemoteTool connections, versioned MCP transport, strict specialist allowlists. Public PoC ingress; private/authenticated upstream access remains a gate.</a:t>
+            </a:r>
+            <a:endParaRPr lang="en-US" sz="1000" dirty="0"/>
+          </a:p>
+          <a:p>
+            <a:pPr marL="228600" indent="-228600">
+              <a:lnSpc>
+                <a:spcPct val="112000"/>
+              </a:lnSpc>
+              <a:buSzPct val="100000"/>
+              <a:buChar char="●"/>
+            </a:pPr>
+            <a:r>
+              <a:rPr lang="en-US" sz="1000" b="1" dirty="0">
+                <a:solidFill>
+                  <a:srgbClr val="107C10"/>
+                </a:solidFill>
+                <a:latin typeface="Segoe UI" pitchFamily="34" charset="0"/>
+                <a:ea typeface="Segoe UI" pitchFamily="34" charset="-122"/>
+                <a:cs typeface="Segoe UI" pitchFamily="34" charset="-120"/>
+              </a:rPr>
+              <a:t>CONFIRMED  </a:t>
+            </a:r>
+            <a:pPr indent="0" marL="0">
+              <a:lnSpc>
+                <a:spcPct val="112000"/>
+              </a:lnSpc>
+              <a:buNone/>
+            </a:pPr>
+            <a:r>
+              <a:rPr lang="en-US" sz="1200" dirty="0">
+                <a:solidFill>
+                  <a:srgbClr val="1A1A1A"/>
+                </a:solidFill>
+                <a:latin typeface="Segoe UI" pitchFamily="34" charset="0"/>
+                <a:ea typeface="Segoe UI" pitchFamily="34" charset="-122"/>
+                <a:cs typeface="Segoe UI" pitchFamily="34" charset="-120"/>
+              </a:rPr>
+              <a:t>Increment 3 — Offline Security Evaluation Suite &amp; Automated CI/CD Gates: versioned golden dataset; deterministic schema checks + LLM-as-judge rubrics; GitHub Actions gate with threshold-gated promotion.</a:t>
+            </a:r>
+            <a:endParaRPr lang="en-US" sz="1000" dirty="0"/>
+          </a:p>
+          <a:p>
+            <a:pPr marL="228600" indent="-228600">
+              <a:lnSpc>
+                <a:spcPct val="112000"/>
+              </a:lnSpc>
+              <a:buSzPct val="100000"/>
+              <a:buChar char="●"/>
+            </a:pPr>
+            <a:r>
+              <a:rPr lang="en-US" sz="1000" b="1" dirty="0">
+                <a:solidFill>
+                  <a:srgbClr val="107C10"/>
+                </a:solidFill>
+                <a:latin typeface="Segoe UI" pitchFamily="34" charset="0"/>
+                <a:ea typeface="Segoe UI" pitchFamily="34" charset="-122"/>
+                <a:cs typeface="Segoe UI" pitchFamily="34" charset="-120"/>
+              </a:rPr>
+              <a:t>CONFIRMED  </a:t>
+            </a:r>
+            <a:pPr indent="0" marL="0">
+              <a:lnSpc>
+                <a:spcPct val="112000"/>
+              </a:lnSpc>
+              <a:buNone/>
+            </a:pPr>
+            <a:r>
+              <a:rPr lang="en-US" sz="1200" dirty="0">
+                <a:solidFill>
+                  <a:srgbClr val="1A1A1A"/>
+                </a:solidFill>
+                <a:latin typeface="Segoe UI" pitchFamily="34" charset="0"/>
+                <a:ea typeface="Segoe UI" pitchFamily="34" charset="-122"/>
+                <a:cs typeface="Segoe UI" pitchFamily="34" charset="-120"/>
+              </a:rPr>
+              <a:t>Increment 4 — Validation Tracks, Load Testing &amp; Production Decision Gates: Load &amp; Scale Gate, State Experiment Track, Governance Validation Track, Continuous Evaluation Track, Deliverable Synthesis — plan of record; individual track outcomes require validation.</a:t>
+            </a:r>
+            <a:endParaRPr lang="en-US" sz="1000" dirty="0"/>
+          </a:p>
+          <a:p>
+            <a:pPr marL="228600" indent="-228600">
+              <a:lnSpc>
+                <a:spcPct val="112000"/>
+              </a:lnSpc>
+              <a:buSzPct val="100000"/>
+              <a:buChar char="●"/>
+            </a:pPr>
+            <a:r>
+              <a:rPr lang="en-US" sz="1000" b="1" dirty="0">
+                <a:solidFill>
+                  <a:srgbClr val="107C10"/>
+                </a:solidFill>
+                <a:latin typeface="Segoe UI" pitchFamily="34" charset="0"/>
+                <a:ea typeface="Segoe UI" pitchFamily="34" charset="-122"/>
+                <a:cs typeface="Segoe UI" pitchFamily="34" charset="-120"/>
+              </a:rPr>
+              <a:t>CONFIRMED  </a:t>
+            </a:r>
+            <a:pPr indent="0" marL="0">
+              <a:lnSpc>
+                <a:spcPct val="112000"/>
+              </a:lnSpc>
+              <a:buNone/>
+            </a:pPr>
+            <a:r>
+              <a:rPr lang="en-US" sz="1200" dirty="0">
+                <a:solidFill>
+                  <a:srgbClr val="1A1A1A"/>
+                </a:solidFill>
+                <a:latin typeface="Segoe UI" pitchFamily="34" charset="0"/>
+                <a:ea typeface="Segoe UI" pitchFamily="34" charset="-122"/>
+                <a:cs typeface="Segoe UI" pitchFamily="34" charset="-120"/>
+              </a:rPr>
+              <a:t>Decision gates requiring evidence before production approval: Platform status, Scale, Security, Data, Quality, Operations, Cost, Preview acceptance — full list in Appendix H.</a:t>
+            </a:r>
+            <a:endParaRPr lang="en-US" sz="1000" dirty="0"/>
+          </a:p>
+          <a:p>
+            <a:pPr marL="228600" indent="-228600">
+              <a:lnSpc>
+                <a:spcPct val="112000"/>
+              </a:lnSpc>
+              <a:buSzPct val="100000"/>
+              <a:buChar char="●"/>
+            </a:pPr>
+            <a:r>
+              <a:rPr lang="en-US" sz="1000" b="1" dirty="0">
+                <a:solidFill>
+                  <a:srgbClr val="D13438"/>
+                </a:solidFill>
+                <a:latin typeface="Segoe UI" pitchFamily="34" charset="0"/>
+                <a:ea typeface="Segoe UI" pitchFamily="34" charset="-122"/>
+                <a:cs typeface="Segoe UI" pitchFamily="34" charset="-120"/>
+              </a:rPr>
+              <a:t>REQUIRES VALIDATION  </a:t>
+            </a:r>
+            <a:pPr indent="0" marL="0">
+              <a:lnSpc>
+                <a:spcPct val="112000"/>
+              </a:lnSpc>
+              <a:buNone/>
+            </a:pPr>
+            <a:r>
+              <a:rPr lang="en-US" sz="1200" dirty="0">
+                <a:solidFill>
+                  <a:srgbClr val="1A1A1A"/>
+                </a:solidFill>
+                <a:latin typeface="Segoe UI" pitchFamily="34" charset="0"/>
+                <a:ea typeface="Segoe UI" pitchFamily="34" charset="-122"/>
+                <a:cs typeface="Segoe UI" pitchFamily="34" charset="-120"/>
+              </a:rPr>
+              <a:t>Owners and decision date: not specified in the research document — open item for the presenting team to fill in before delivery.</a:t>
+            </a:r>
+            <a:endParaRPr lang="en-US" sz="1000" dirty="0"/>
+          </a:p>
+        </p:txBody>
+      </p:sp>
+      <p:sp>
+        <p:nvSpPr>
+          <p:cNvPr id="9" name="Shape 6"/>
+          <p:cNvSpPr/>
+          <p:nvPr/>
+        </p:nvSpPr>
+        <p:spPr>
+          <a:xfrm>
+            <a:off x="0" y="6784848"/>
+            <a:ext cx="12188952" cy="27432"/>
+          </a:xfrm>
+          <a:prstGeom prst="rect">
+            <a:avLst/>
+          </a:prstGeom>
+          <a:solidFill>
+            <a:srgbClr val="E1E5E8"/>
+          </a:solidFill>
+          <a:ln/>
+        </p:spPr>
+      </p:sp>
+      <p:sp>
+        <p:nvSpPr>
+          <p:cNvPr id="10" name="Text 7"/>
+          <p:cNvSpPr/>
+          <p:nvPr/>
+        </p:nvSpPr>
+        <p:spPr>
+          <a:xfrm>
+            <a:off x="457200" y="6537960"/>
+            <a:ext cx="8229600" cy="256032"/>
+          </a:xfrm>
+          <a:prstGeom prst="rect">
+            <a:avLst/>
+          </a:prstGeom>
+          <a:noFill/>
+          <a:ln/>
+        </p:spPr>
+        <p:txBody>
+          <a:bodyPr wrap="square" rtlCol="0" anchor="ctr"/>
+          <a:lstStyle/>
+          <a:p>
+            <a:pPr indent="0" marL="0">
+              <a:buNone/>
+            </a:pPr>
+            <a:r>
+              <a:rPr lang="en-US" sz="900" dirty="0">
+                <a:solidFill>
+                  <a:srgbClr val="767676"/>
+                </a:solidFill>
+                <a:latin typeface="Segoe UI" pitchFamily="34" charset="0"/>
+                <a:ea typeface="Segoe UI" pitchFamily="34" charset="-122"/>
+                <a:cs typeface="Segoe UI" pitchFamily="34" charset="-120"/>
+              </a:rPr>
+              <a:t>Air Canada — Foundry Hosted Agents Decision</a:t>
+            </a:r>
+            <a:endParaRPr lang="en-US" sz="900" dirty="0"/>
+          </a:p>
+        </p:txBody>
+      </p:sp>
+      <p:sp>
+        <p:nvSpPr>
+          <p:cNvPr id="11" name="Text 8"/>
+          <p:cNvSpPr/>
+          <p:nvPr/>
+        </p:nvSpPr>
+        <p:spPr>
+          <a:xfrm>
+            <a:off x="11430000" y="6528816"/>
+            <a:ext cx="640080" cy="256032"/>
+          </a:xfrm>
+          <a:prstGeom prst="rect">
+            <a:avLst/>
+          </a:prstGeom>
+          <a:noFill/>
+          <a:ln/>
+        </p:spPr>
+        <p:txBody>
+          <a:bodyPr wrap="square" rtlCol="0" anchor="ctr"/>
+          <a:lstStyle/>
+          <a:p>
+            <a:pPr algn="r" indent="0" marL="0">
+              <a:buNone/>
+            </a:pPr>
+            <a:r>
+              <a:rPr lang="en-US" sz="900" dirty="0">
+                <a:solidFill>
+                  <a:srgbClr val="767676"/>
+                </a:solidFill>
+                <a:latin typeface="Segoe UI" pitchFamily="34" charset="0"/>
+                <a:ea typeface="Segoe UI" pitchFamily="34" charset="-122"/>
+                <a:cs typeface="Segoe UI" pitchFamily="34" charset="-120"/>
+              </a:rPr>
+              <a:t>17 / 31</a:t>
+            </a:r>
+            <a:endParaRPr lang="en-US" sz="900" dirty="0"/>
+          </a:p>
+        </p:txBody>
+      </p:sp>
+    </p:spTree>
+  </p:cSld>
+  <p:clrMapOvr>
+    <a:masterClrMapping/>
+  </p:clrMapOvr>
+</p:sld>
+</file>
+
+<file path=ppt/slides/slide18.xml><?xml version="1.0" encoding="utf-8"?>
+<p:sld xmlns:a="http://schemas.openxmlformats.org/drawingml/2006/main" xmlns:r="http://schemas.openxmlformats.org/officeDocument/2006/relationships" xmlns:p="http://schemas.openxmlformats.org/presentationml/2006/main">
+  <p:cSld name="Slide 18">
+    <p:bg>
+      <p:bgPr>
+        <a:solidFill>
+          <a:srgbClr val="FAFBFC"/>
+        </a:solidFill>
+      </p:bgPr>
+    </p:bg>
+    <p:spTree>
+      <p:nvGrpSpPr>
+        <p:cNvPr id="1" name=""/>
+        <p:cNvGrpSpPr/>
+        <p:nvPr/>
+      </p:nvGrpSpPr>
+      <p:grpSpPr>
+        <a:xfrm>
+          <a:off x="0" y="0"/>
+          <a:ext cx="0" cy="0"/>
+          <a:chOff x="0" y="0"/>
+          <a:chExt cx="0" cy="0"/>
+        </a:xfrm>
+      </p:grpSpPr>
+      <p:sp>
+        <p:nvSpPr>
+          <p:cNvPr id="2" name="Shape 0"/>
+          <p:cNvSpPr/>
+          <p:nvPr/>
+        </p:nvSpPr>
+        <p:spPr>
+          <a:xfrm>
+            <a:off x="0" y="0"/>
+            <a:ext cx="12188952" cy="82296"/>
+          </a:xfrm>
+          <a:prstGeom prst="rect">
+            <a:avLst/>
+          </a:prstGeom>
+          <a:solidFill>
+            <a:srgbClr val="5C2D91"/>
+          </a:solidFill>
+          <a:ln/>
+        </p:spPr>
+      </p:sp>
+      <p:sp>
+        <p:nvSpPr>
+          <p:cNvPr id="3" name="Text 1"/>
+          <p:cNvSpPr/>
+          <p:nvPr/>
+        </p:nvSpPr>
+        <p:spPr>
+          <a:xfrm>
+            <a:off x="457200" y="292608"/>
+            <a:ext cx="11247120" cy="274320"/>
+          </a:xfrm>
+          <a:prstGeom prst="rect">
+            <a:avLst/>
+          </a:prstGeom>
+          <a:noFill/>
+          <a:ln/>
+        </p:spPr>
+        <p:txBody>
+          <a:bodyPr wrap="square" rtlCol="0" anchor="ctr"/>
+          <a:lstStyle/>
+          <a:p>
+            <a:pPr indent="0" marL="0">
+              <a:buNone/>
+            </a:pPr>
+            <a:r>
+              <a:rPr lang="en-US" sz="1100" b="1" spc="100" kern="0" dirty="0">
+                <a:solidFill>
+                  <a:srgbClr val="5C2D91"/>
+                </a:solidFill>
+                <a:latin typeface="Segoe UI" pitchFamily="34" charset="0"/>
+                <a:ea typeface="Segoe UI" pitchFamily="34" charset="-122"/>
+                <a:cs typeface="Segoe UI" pitchFamily="34" charset="-120"/>
+              </a:rPr>
+              <a:t>APPENDIX</a:t>
+            </a:r>
+            <a:endParaRPr lang="en-US" sz="1100" dirty="0"/>
+          </a:p>
+        </p:txBody>
+      </p:sp>
+      <p:sp>
+        <p:nvSpPr>
+          <p:cNvPr id="4" name="Text 2"/>
+          <p:cNvSpPr/>
+          <p:nvPr/>
+        </p:nvSpPr>
+        <p:spPr>
+          <a:xfrm>
+            <a:off x="457200" y="548640"/>
+            <a:ext cx="11247120" cy="548640"/>
+          </a:xfrm>
+          <a:prstGeom prst="rect">
+            <a:avLst/>
+          </a:prstGeom>
+          <a:noFill/>
+          <a:ln/>
+        </p:spPr>
+        <p:txBody>
+          <a:bodyPr wrap="square" rtlCol="0" anchor="ctr"/>
+          <a:lstStyle/>
+          <a:p>
+            <a:pPr indent="0" marL="0">
+              <a:buNone/>
+            </a:pPr>
+            <a:r>
+              <a:rPr lang="en-US" sz="2600" b="1" dirty="0">
+                <a:solidFill>
+                  <a:srgbClr val="001B3D"/>
+                </a:solidFill>
+                <a:latin typeface="Segoe UI" pitchFamily="34" charset="0"/>
+                <a:ea typeface="Segoe UI" pitchFamily="34" charset="-122"/>
+                <a:cs typeface="Segoe UI" pitchFamily="34" charset="-120"/>
+              </a:rPr>
               <a:t>Appendix A (1 of 3) — Five-Option Comparison Matrix</a:t>
             </a:r>
             <a:endParaRPr lang="en-US" sz="2600" dirty="0"/>
@@ -5700,7 +8282,7 @@
       </p:sp>
       <p:graphicFrame>
         <p:nvGraphicFramePr>
-          <p:cNvPr id="15" name="Table 0"/>
+          <p:cNvPr id="19" name="Table 0"/>
           <p:cNvGraphicFramePr>
             <a:graphicFrameLocks noGrp="1"/>
           </p:cNvGraphicFramePr>
@@ -7913,7 +10495,7 @@
                 <a:ea typeface="Segoe UI" pitchFamily="34" charset="-122"/>
                 <a:cs typeface="Segoe UI" pitchFamily="34" charset="-120"/>
               </a:rPr>
-              <a:t>14 / 26</a:t>
+              <a:t>18 / 31</a:t>
             </a:r>
             <a:endParaRPr lang="en-US" sz="900" dirty="0"/>
           </a:p>
@@ -7927,9 +10509,9 @@
 </p:sld>
 </file>
 
-<file path=ppt/slides/slide15.xml><?xml version="1.0" encoding="utf-8"?>
+<file path=ppt/slides/slide19.xml><?xml version="1.0" encoding="utf-8"?>
 <p:sld xmlns:a="http://schemas.openxmlformats.org/drawingml/2006/main" xmlns:r="http://schemas.openxmlformats.org/officeDocument/2006/relationships" xmlns:p="http://schemas.openxmlformats.org/presentationml/2006/main">
-  <p:cSld name="Slide 15">
+  <p:cSld name="Slide 19">
     <p:bg>
       <p:bgPr>
         <a:solidFill>
@@ -8071,7 +10653,7 @@
       </p:sp>
       <p:graphicFrame>
         <p:nvGraphicFramePr>
-          <p:cNvPr id="16" name="Table 0"/>
+          <p:cNvPr id="20" name="Table 0"/>
           <p:cNvGraphicFramePr>
             <a:graphicFrameLocks noGrp="1"/>
           </p:cNvGraphicFramePr>
@@ -10284,7 +12866,7 @@
                 <a:ea typeface="Segoe UI" pitchFamily="34" charset="-122"/>
                 <a:cs typeface="Segoe UI" pitchFamily="34" charset="-120"/>
               </a:rPr>
-              <a:t>15 / 26</a:t>
+              <a:t>19 / 31</a:t>
             </a:r>
             <a:endParaRPr lang="en-US" sz="900" dirty="0"/>
           </a:p>
@@ -10298,9 +12880,230 @@
 </p:sld>
 </file>
 
-<file path=ppt/slides/slide16.xml><?xml version="1.0" encoding="utf-8"?>
+<file path=ppt/slides/slide2.xml><?xml version="1.0" encoding="utf-8"?>
 <p:sld xmlns:a="http://schemas.openxmlformats.org/drawingml/2006/main" xmlns:r="http://schemas.openxmlformats.org/officeDocument/2006/relationships" xmlns:p="http://schemas.openxmlformats.org/presentationml/2006/main">
-  <p:cSld name="Slide 16">
+  <p:cSld name="Slide 2">
+    <p:bg>
+      <p:bgPr>
+        <a:solidFill>
+          <a:srgbClr val="FFFFFF"/>
+        </a:solidFill>
+      </p:bgPr>
+    </p:bg>
+    <p:spTree>
+      <p:nvGrpSpPr>
+        <p:cNvPr id="1" name=""/>
+        <p:cNvGrpSpPr/>
+        <p:nvPr/>
+      </p:nvGrpSpPr>
+      <p:grpSpPr>
+        <a:xfrm>
+          <a:off x="0" y="0"/>
+          <a:ext cx="0" cy="0"/>
+          <a:chOff x="0" y="0"/>
+          <a:chExt cx="0" cy="0"/>
+        </a:xfrm>
+      </p:grpSpPr>
+      <p:sp>
+        <p:nvSpPr>
+          <p:cNvPr id="2" name="Text 0"/>
+          <p:cNvSpPr/>
+          <p:nvPr/>
+        </p:nvSpPr>
+        <p:spPr>
+          <a:xfrm>
+            <a:off x="411480" y="146304"/>
+            <a:ext cx="11338560" cy="502920"/>
+          </a:xfrm>
+          <a:prstGeom prst="rect">
+            <a:avLst/>
+          </a:prstGeom>
+          <a:noFill/>
+          <a:ln/>
+        </p:spPr>
+        <p:txBody>
+          <a:bodyPr wrap="square" rtlCol="0" anchor="ctr"/>
+          <a:lstStyle/>
+          <a:p>
+            <a:pPr indent="0" marL="0">
+              <a:buNone/>
+            </a:pPr>
+            <a:r>
+              <a:rPr lang="en-US" sz="2400" b="1" dirty="0">
+                <a:solidFill>
+                  <a:srgbClr val="146C54"/>
+                </a:solidFill>
+                <a:latin typeface="Segoe UI" pitchFamily="34" charset="0"/>
+                <a:ea typeface="Segoe UI" pitchFamily="34" charset="-122"/>
+                <a:cs typeface="Segoe UI" pitchFamily="34" charset="-120"/>
+              </a:rPr>
+              <a:t>Verified Release: Staging to Production</a:t>
+            </a:r>
+            <a:endParaRPr lang="en-US" sz="2400" dirty="0"/>
+          </a:p>
+        </p:txBody>
+      </p:sp>
+      <p:pic>
+        <p:nvPicPr>
+          <p:cNvPr id="3" name="Image 0" descr="Verified Release: Staging to Production">    </p:cNvPr>
+          <p:cNvPicPr>
+            <a:picLocks noChangeAspect="1"/>
+          </p:cNvPicPr>
+          <p:nvPr/>
+        </p:nvPicPr>
+        <p:blipFill>
+          <a:blip r:embed="rId1"/>
+          <a:stretch>
+            <a:fillRect/>
+          </a:stretch>
+        </p:blipFill>
+        <p:spPr>
+          <a:xfrm>
+            <a:off x="2068830" y="777240"/>
+            <a:ext cx="8051292" cy="5367528"/>
+          </a:xfrm>
+          <a:prstGeom prst="rect">
+            <a:avLst/>
+          </a:prstGeom>
+        </p:spPr>
+      </p:pic>
+      <p:sp>
+        <p:nvSpPr>
+          <p:cNvPr id="4" name="Text 1"/>
+          <p:cNvSpPr/>
+          <p:nvPr/>
+        </p:nvSpPr>
+        <p:spPr>
+          <a:xfrm>
+            <a:off x="411480" y="6245352"/>
+            <a:ext cx="11338560" cy="256032"/>
+          </a:xfrm>
+          <a:prstGeom prst="rect">
+            <a:avLst/>
+          </a:prstGeom>
+          <a:noFill/>
+          <a:ln/>
+        </p:spPr>
+        <p:txBody>
+          <a:bodyPr wrap="square" rtlCol="0" anchor="ctr"/>
+          <a:lstStyle/>
+          <a:p>
+            <a:pPr indent="0" marL="0">
+              <a:buNone/>
+            </a:pPr>
+            <a:r>
+              <a:rPr lang="en-US" sz="1000" dirty="0">
+                <a:solidFill>
+                  <a:srgbClr val="53635E"/>
+                </a:solidFill>
+                <a:latin typeface="Segoe UI" pitchFamily="34" charset="0"/>
+                <a:ea typeface="Segoe UI" pitchFamily="34" charset="-122"/>
+                <a:cs typeface="Segoe UI" pitchFamily="34" charset="-120"/>
+              </a:rPr>
+              <a:t>Artifact rendering, not a portal screenshot. Synthetic fixtures. Sources and SHA-256 hashes retained.</a:t>
+            </a:r>
+            <a:endParaRPr lang="en-US" sz="1000" dirty="0"/>
+          </a:p>
+        </p:txBody>
+      </p:sp>
+      <p:sp>
+        <p:nvSpPr>
+          <p:cNvPr id="5" name="Text 2">
+            <a:hlinkClick r:id="rId2" tooltip=""/>
+          </p:cNvPr>
+          <p:cNvSpPr/>
+          <p:nvPr/>
+        </p:nvSpPr>
+        <p:spPr>
+          <a:xfrm>
+            <a:off x="411480" y="6528816"/>
+            <a:ext cx="10515600" cy="201168"/>
+          </a:xfrm>
+          <a:prstGeom prst="rect">
+            <a:avLst/>
+          </a:prstGeom>
+          <a:noFill/>
+          <a:ln/>
+        </p:spPr>
+        <p:txBody>
+          <a:bodyPr wrap="square" rtlCol="0" anchor="ctr"/>
+          <a:lstStyle/>
+          <a:p>
+            <a:pPr indent="0" marL="0">
+              <a:buNone/>
+            </a:pPr>
+            <a:r>
+              <a:rPr lang="en-US" sz="900" u="sng" dirty="0">
+                <a:solidFill>
+                  <a:srgbClr val="075C9B"/>
+                </a:solidFill>
+                <a:latin typeface="Segoe UI" pitchFamily="34" charset="0"/>
+                <a:ea typeface="Segoe UI" pitchFamily="34" charset="-122"/>
+                <a:cs typeface="Segoe UI" pitchFamily="34" charset="-120"/>
+                <a:hlinkClick r:id="rId2" invalidUrl="" action="" tgtFrame="" tooltip="" history="1" highlightClick="0" endSnd="0">
+                  <a:extLst>
+                    <a:ext uri="{A12FA001-AC4F-418D-AE19-62706E023703}">
+                      <ahyp:hlinkClr xmlns:ahyp="http://schemas.microsoft.com/office/drawing/2018/hyperlinkcolor" val="tx"/>
+                    </a:ext>
+                  </a:extLst>
+                </a:hlinkClick>
+              </a:rPr>
+              <a:t>GitHub Actions 34178081808 | f3da486 | 2026-09-08 UTC</a:t>
+            </a:r>
+            <a:endParaRPr lang="en-US" sz="900" dirty="0"/>
+          </a:p>
+        </p:txBody>
+      </p:sp>
+      <p:sp>
+        <p:nvSpPr>
+          <p:cNvPr id="7" name="Text 3"/>
+          <p:cNvSpPr/>
+          <p:nvPr/>
+        </p:nvSpPr>
+        <p:spPr>
+          <a:xfrm>
+            <a:off x="11430000" y="6528816"/>
+            <a:ext cx="640080" cy="256032"/>
+          </a:xfrm>
+          <a:prstGeom prst="rect">
+            <a:avLst/>
+          </a:prstGeom>
+          <a:noFill/>
+          <a:ln/>
+        </p:spPr>
+        <p:txBody>
+          <a:bodyPr wrap="square" rtlCol="0" anchor="ctr"/>
+          <a:lstStyle/>
+          <a:p>
+            <a:pPr algn="r" indent="0" marL="0">
+              <a:buNone/>
+            </a:pPr>
+            <a:r>
+              <a:rPr lang="en-US" sz="900" dirty="0">
+                <a:solidFill>
+                  <a:srgbClr val="767676"/>
+                </a:solidFill>
+                <a:latin typeface="Segoe UI" pitchFamily="34" charset="0"/>
+                <a:ea typeface="Segoe UI" pitchFamily="34" charset="-122"/>
+                <a:cs typeface="Segoe UI" pitchFamily="34" charset="-120"/>
+              </a:rPr>
+              <a:t>2 / 31</a:t>
+            </a:r>
+            <a:endParaRPr lang="en-US" sz="900" dirty="0"/>
+          </a:p>
+        </p:txBody>
+      </p:sp>
+    </p:spTree>
+  </p:cSld>
+  <p:clrMapOvr>
+    <a:masterClrMapping/>
+  </p:clrMapOvr>
+</p:sld>
+</file>
+
+<file path=ppt/slides/slide20.xml><?xml version="1.0" encoding="utf-8"?>
+<p:sld xmlns:a="http://schemas.openxmlformats.org/drawingml/2006/main" xmlns:r="http://schemas.openxmlformats.org/officeDocument/2006/relationships" xmlns:p="http://schemas.openxmlformats.org/presentationml/2006/main">
+  <p:cSld name="Slide 20">
     <p:bg>
       <p:bgPr>
         <a:solidFill>
@@ -10442,7 +13245,7 @@
       </p:sp>
       <p:graphicFrame>
         <p:nvGraphicFramePr>
-          <p:cNvPr id="17" name="Table 0"/>
+          <p:cNvPr id="21" name="Table 0"/>
           <p:cNvGraphicFramePr>
             <a:graphicFrameLocks noGrp="1"/>
           </p:cNvGraphicFramePr>
@@ -11170,7 +13973,7 @@
                           <a:ea typeface="Segoe UI" pitchFamily="34" charset="-122"/>
                           <a:cs typeface="Segoe UI" pitchFamily="34" charset="-120"/>
                         </a:rPr>
-                        <a:t>Foundry local and batch evaluation confirmed</a:t>
+                        <a:t>Hosted capture plus Foundry judges: 21/21 passed</a:t>
                       </a:r>
                       <a:endParaRPr lang="en-US" sz="800" dirty="0">
                         <a:latin typeface="Segoe UI" charset="0"/>
@@ -11238,7 +14041,7 @@
                           <a:ea typeface="Segoe UI" pitchFamily="34" charset="-122"/>
                           <a:cs typeface="Segoe UI" pitchFamily="34" charset="-120"/>
                         </a:rPr>
-                        <a:t>Optional continuous evaluation and hosted-agent action integration after validation</a:t>
+                        <a:t>Optional continuous evaluation after privacy and identity validation</a:t>
                       </a:r>
                       <a:endParaRPr lang="en-US" sz="800" dirty="0">
                         <a:latin typeface="Segoe UI" charset="0"/>
@@ -12655,7 +15458,7 @@
                 <a:ea typeface="Segoe UI" pitchFamily="34" charset="-122"/>
                 <a:cs typeface="Segoe UI" pitchFamily="34" charset="-120"/>
               </a:rPr>
-              <a:t>16 / 26</a:t>
+              <a:t>20 / 31</a:t>
             </a:r>
             <a:endParaRPr lang="en-US" sz="900" dirty="0"/>
           </a:p>
@@ -12669,9 +15472,9 @@
 </p:sld>
 </file>
 
-<file path=ppt/slides/slide17.xml><?xml version="1.0" encoding="utf-8"?>
+<file path=ppt/slides/slide21.xml><?xml version="1.0" encoding="utf-8"?>
 <p:sld xmlns:a="http://schemas.openxmlformats.org/drawingml/2006/main" xmlns:r="http://schemas.openxmlformats.org/officeDocument/2006/relationships" xmlns:p="http://schemas.openxmlformats.org/presentationml/2006/main">
-  <p:cSld name="Slide 17">
+  <p:cSld name="Slide 21">
     <p:bg>
       <p:bgPr>
         <a:solidFill>
@@ -12813,7 +15616,7 @@
       </p:sp>
       <p:graphicFrame>
         <p:nvGraphicFramePr>
-          <p:cNvPr id="18" name="Table 0"/>
+          <p:cNvPr id="22" name="Table 0"/>
           <p:cNvGraphicFramePr>
             <a:graphicFrameLocks noGrp="1"/>
           </p:cNvGraphicFramePr>
@@ -13336,7 +16139,7 @@
                           <a:ea typeface="Segoe UI" pitchFamily="34" charset="-122"/>
                           <a:cs typeface="Segoe UI" pitchFamily="34" charset="-120"/>
                         </a:rPr>
-                        <a:t>Confirmed; application parity untested</a:t>
+                        <a:t>Smoke, contract, streaming checks passed</a:t>
                       </a:r>
                       <a:endParaRPr lang="en-US" sz="950" dirty="0">
                         <a:latin typeface="Segoe UI" charset="0"/>
@@ -13404,7 +16207,7 @@
                           <a:ea typeface="Segoe UI" pitchFamily="34" charset="-122"/>
                           <a:cs typeface="Segoe UI" pitchFamily="34" charset="-120"/>
                         </a:rPr>
-                        <a:t>Supported, with PoC contract and reconnect testing required</a:t>
+                        <a:t>Reconnect, cancellation and complete UI parity remain separate tests</a:t>
                       </a:r>
                       <a:endParaRPr lang="en-US" sz="950" dirty="0">
                         <a:latin typeface="Segoe UI" charset="0"/>
@@ -14582,7 +17385,7 @@
                 <a:ea typeface="Segoe UI" pitchFamily="34" charset="-122"/>
                 <a:cs typeface="Segoe UI" pitchFamily="34" charset="-120"/>
               </a:rPr>
-              <a:t>17 / 26</a:t>
+              <a:t>21 / 31</a:t>
             </a:r>
             <a:endParaRPr lang="en-US" sz="900" dirty="0"/>
           </a:p>
@@ -14596,9 +17399,9 @@
 </p:sld>
 </file>
 
-<file path=ppt/slides/slide18.xml><?xml version="1.0" encoding="utf-8"?>
+<file path=ppt/slides/slide22.xml><?xml version="1.0" encoding="utf-8"?>
 <p:sld xmlns:a="http://schemas.openxmlformats.org/drawingml/2006/main" xmlns:r="http://schemas.openxmlformats.org/officeDocument/2006/relationships" xmlns:p="http://schemas.openxmlformats.org/presentationml/2006/main">
-  <p:cSld name="Slide 18">
+  <p:cSld name="Slide 22">
     <p:bg>
       <p:bgPr>
         <a:solidFill>
@@ -14740,7 +17543,7 @@
       </p:sp>
       <p:graphicFrame>
         <p:nvGraphicFramePr>
-          <p:cNvPr id="19" name="Table 0"/>
+          <p:cNvPr id="23" name="Table 0"/>
           <p:cNvGraphicFramePr>
             <a:graphicFrameLocks noGrp="1"/>
           </p:cNvGraphicFramePr>
@@ -15607,7 +18410,7 @@
                           <a:ea typeface="Segoe UI" pitchFamily="34" charset="-122"/>
                           <a:cs typeface="Segoe UI" pitchFamily="34" charset="-120"/>
                         </a:rPr>
-                        <a:t>GitHub Action targeting Hosted Agent versions and portal visibility</a:t>
+                        <a:t>Hosted capture/evaluation pipeline</a:t>
                       </a:r>
                       <a:endParaRPr lang="en-US" sz="950" dirty="0">
                         <a:latin typeface="Segoe UI" charset="0"/>
@@ -15675,7 +18478,7 @@
                           <a:ea typeface="Segoe UI" pitchFamily="34" charset="-122"/>
                           <a:cs typeface="Segoe UI" pitchFamily="34" charset="-120"/>
                         </a:rPr>
-                        <a:t>Not verified</a:t>
+                        <a:t>Verified on staging v6; 21/21 passed</a:t>
                       </a:r>
                       <a:endParaRPr lang="en-US" sz="950" dirty="0">
                         <a:latin typeface="Segoe UI" charset="0"/>
@@ -15743,7 +18546,7 @@
                           <a:ea typeface="Segoe UI" pitchFamily="34" charset="-122"/>
                           <a:cs typeface="Segoe UI" pitchFamily="34" charset="-120"/>
                         </a:rPr>
-                        <a:t>Must be proven before claiming evaluation synchronization</a:t>
+                        <a:t>Custom runner; native portal screenshot unavailable</a:t>
                       </a:r>
                       <a:endParaRPr lang="en-US" sz="950" dirty="0">
                         <a:latin typeface="Segoe UI" charset="0"/>
@@ -16342,7 +19145,7 @@
                 <a:ea typeface="Segoe UI" pitchFamily="34" charset="-122"/>
                 <a:cs typeface="Segoe UI" pitchFamily="34" charset="-120"/>
               </a:rPr>
-              <a:t>18 / 26</a:t>
+              <a:t>22 / 31</a:t>
             </a:r>
             <a:endParaRPr lang="en-US" sz="900" dirty="0"/>
           </a:p>
@@ -16356,9 +19159,9 @@
 </p:sld>
 </file>
 
-<file path=ppt/slides/slide19.xml><?xml version="1.0" encoding="utf-8"?>
+<file path=ppt/slides/slide23.xml><?xml version="1.0" encoding="utf-8"?>
 <p:sld xmlns:a="http://schemas.openxmlformats.org/drawingml/2006/main" xmlns:r="http://schemas.openxmlformats.org/officeDocument/2006/relationships" xmlns:p="http://schemas.openxmlformats.org/presentationml/2006/main">
-  <p:cSld name="Slide 19">
+  <p:cSld name="Slide 23">
     <p:bg>
       <p:bgPr>
         <a:solidFill>
@@ -16552,8 +19355,7 @@
                 <a:ea typeface="Segoe UI" pitchFamily="34" charset="-122"/>
                 <a:cs typeface="Segoe UI" pitchFamily="34" charset="-120"/>
               </a:rPr>
-              <a:t>Cost drivers: model tokens, active session vCPU-hour + GiB-hour compute, idle window duration, MCP hosting compute, telemetry (Application Insights), evaluation tokens, optional Cosmos DB (RU + storage), optional Agent 365 licensing, operations labor.
-</a:t>
+              <a:t>Cost drivers: model tokens, active session vCPU-hour + GiB-hour compute, idle window duration, MCP hosting compute, telemetry (Application Insights), evaluation tokens, optional Cosmos DB (RU + storage), optional Agent 365 licensing, operations labor.</a:t>
             </a:r>
             <a:endParaRPr lang="en-US" sz="1150" dirty="0"/>
           </a:p>
@@ -16591,8 +19393,7 @@
                 <a:ea typeface="Segoe UI" pitchFamily="34" charset="-122"/>
                 <a:cs typeface="Segoe UI" pitchFamily="34" charset="-120"/>
               </a:rPr>
-              <a:t>Billing shape: pay only for active session compute while a session sandbox is warm; scale-to-zero on idle timeout (5-60 min, default 15 min) — architecturally closest to Azure Container Apps consumption plan.
-</a:t>
+              <a:t>Billing shape: pay only for active session compute while a session sandbox is warm; scale-to-zero on idle timeout (5-60 min, default 15 min) — architecturally closest to Azure Container Apps consumption plan.</a:t>
             </a:r>
             <a:endParaRPr lang="en-US" sz="1150" dirty="0"/>
           </a:p>
@@ -16630,8 +19431,7 @@
                 <a:ea typeface="Segoe UI" pitchFamily="34" charset="-122"/>
                 <a:cs typeface="Segoe UI" pitchFamily="34" charset="-120"/>
               </a:rPr>
-              <a:t>Unknown / TBD: exact $/vCPU-hr and $/GiB-hr session-compute rates (public pricing page returned "N/A" at research time); real workload token/session volumes; Cosmos DB RU consumption under load; Agent 365 add-on pricing per license tier.
-</a:t>
+              <a:t>Unknown / TBD: exact $/vCPU-hr and $/GiB-hr session-compute rates (public pricing page returned "N/A" at research time); real workload token/session volumes; Cosmos DB RU consumption under load; Agent 365 add-on pricing per license tier.</a:t>
             </a:r>
             <a:endParaRPr lang="en-US" sz="1150" dirty="0"/>
           </a:p>
@@ -16788,7 +19588,7 @@
                 <a:ea typeface="Segoe UI" pitchFamily="34" charset="-122"/>
                 <a:cs typeface="Segoe UI" pitchFamily="34" charset="-120"/>
               </a:rPr>
-              <a:t>19 / 26</a:t>
+              <a:t>23 / 31</a:t>
             </a:r>
             <a:endParaRPr lang="en-US" sz="900" dirty="0"/>
           </a:p>
@@ -16802,9 +19602,9 @@
 </p:sld>
 </file>
 
-<file path=ppt/slides/slide2.xml><?xml version="1.0" encoding="utf-8"?>
+<file path=ppt/slides/slide24.xml><?xml version="1.0" encoding="utf-8"?>
 <p:sld xmlns:a="http://schemas.openxmlformats.org/drawingml/2006/main" xmlns:r="http://schemas.openxmlformats.org/officeDocument/2006/relationships" xmlns:p="http://schemas.openxmlformats.org/presentationml/2006/main">
-  <p:cSld name="Slide 2">
+  <p:cSld name="Slide 24">
     <p:bg>
       <p:bgPr>
         <a:solidFill>
@@ -16841,7 +19641,7 @@
             <a:avLst/>
           </a:prstGeom>
           <a:solidFill>
-            <a:srgbClr val="0078D4"/>
+            <a:srgbClr val="5C2D91"/>
           </a:solidFill>
           <a:ln/>
         </p:spPr>
@@ -16873,13 +19673,13 @@
             <a:r>
               <a:rPr lang="en-US" sz="1100" b="1" spc="100" kern="0" dirty="0">
                 <a:solidFill>
-                  <a:srgbClr val="0078D4"/>
-                </a:solidFill>
-                <a:latin typeface="Segoe UI" pitchFamily="34" charset="0"/>
-                <a:ea typeface="Segoe UI" pitchFamily="34" charset="-122"/>
-                <a:cs typeface="Segoe UI" pitchFamily="34" charset="-120"/>
-              </a:rPr>
-              <a:t>CORE SLIDE 1 OF 12</a:t>
+                  <a:srgbClr val="5C2D91"/>
+                </a:solidFill>
+                <a:latin typeface="Segoe UI" pitchFamily="34" charset="0"/>
+                <a:ea typeface="Segoe UI" pitchFamily="34" charset="-122"/>
+                <a:cs typeface="Segoe UI" pitchFamily="34" charset="-120"/>
+              </a:rPr>
+              <a:t>APPENDIX</a:t>
             </a:r>
             <a:endParaRPr lang="en-US" sz="1100" dirty="0"/>
           </a:p>
@@ -16918,7 +19718,7 @@
                 <a:ea typeface="Segoe UI" pitchFamily="34" charset="-122"/>
                 <a:cs typeface="Segoe UI" pitchFamily="34" charset="-120"/>
               </a:rPr>
-              <a:t>Decision Required</a:t>
+              <a:t>Appendix D — Evaluation Rubric</a:t>
             </a:r>
             <a:endParaRPr lang="en-US" sz="2600" dirty="0"/>
           </a:p>
@@ -16926,52 +19726,13 @@
       </p:sp>
       <p:sp>
         <p:nvSpPr>
-          <p:cNvPr id="5" name="Text 3"/>
+          <p:cNvPr id="5" name="Shape 3"/>
           <p:cNvSpPr/>
           <p:nvPr/>
         </p:nvSpPr>
         <p:spPr>
           <a:xfrm>
-            <a:off x="457200" y="1078992"/>
-            <a:ext cx="11247120" cy="365760"/>
-          </a:xfrm>
-          <a:prstGeom prst="rect">
-            <a:avLst/>
-          </a:prstGeom>
-          <a:noFill/>
-          <a:ln/>
-        </p:spPr>
-        <p:txBody>
-          <a:bodyPr wrap="square" rtlCol="0" anchor="ctr"/>
-          <a:lstStyle/>
-          <a:p>
-            <a:pPr indent="0" marL="0">
-              <a:buNone/>
-            </a:pPr>
-            <a:r>
-              <a:rPr lang="en-US" sz="1300" i="1" dirty="0">
-                <a:solidFill>
-                  <a:srgbClr val="484848"/>
-                </a:solidFill>
-                <a:latin typeface="Segoe UI" pitchFamily="34" charset="0"/>
-                <a:ea typeface="Segoe UI" pitchFamily="34" charset="-122"/>
-                <a:cs typeface="Segoe UI" pitchFamily="34" charset="-120"/>
-              </a:rPr>
-              <a:t>Frame the single decision Air Canada must make: select a reusable hosting blueprint for LangGraph agents.</a:t>
-            </a:r>
-            <a:endParaRPr lang="en-US" sz="1300" dirty="0"/>
-          </a:p>
-        </p:txBody>
-      </p:sp>
-      <p:sp>
-        <p:nvSpPr>
-          <p:cNvPr id="6" name="Shape 4"/>
-          <p:cNvSpPr/>
-          <p:nvPr/>
-        </p:nvSpPr>
-        <p:spPr>
-          <a:xfrm>
-            <a:off x="457200" y="1481328"/>
+            <a:off x="457200" y="1188720"/>
             <a:ext cx="11247120" cy="10973"/>
           </a:xfrm>
           <a:prstGeom prst="rect">
@@ -16985,14 +19746,14 @@
       </p:sp>
       <p:sp>
         <p:nvSpPr>
-          <p:cNvPr id="7" name="Text 5"/>
+          <p:cNvPr id="6" name="Text 4"/>
           <p:cNvSpPr/>
           <p:nvPr/>
         </p:nvSpPr>
         <p:spPr>
           <a:xfrm>
-            <a:off x="502920" y="1691640"/>
-            <a:ext cx="11155680" cy="4709160"/>
+            <a:off x="502920" y="1554480"/>
+            <a:ext cx="11155680" cy="4846320"/>
           </a:xfrm>
           <a:prstGeom prst="rect">
             <a:avLst/>
@@ -17012,7 +19773,7 @@
               <a:buChar char="●"/>
             </a:pPr>
             <a:r>
-              <a:rPr lang="en-US" sz="1000" b="1" dirty="0">
+              <a:rPr lang="en-US" sz="1150" b="1" dirty="0">
                 <a:solidFill>
                   <a:srgbClr val="107C10"/>
                 </a:solidFill>
@@ -17029,7 +19790,7 @@
               <a:buNone/>
             </a:pPr>
             <a:r>
-              <a:rPr lang="en-US" sz="1200" dirty="0">
+              <a:rPr lang="en-US" sz="1250" dirty="0">
                 <a:solidFill>
                   <a:srgbClr val="1A1A1A"/>
                 </a:solidFill>
@@ -17037,10 +19798,9 @@
                 <a:ea typeface="Segoe UI" pitchFamily="34" charset="-122"/>
                 <a:cs typeface="Segoe UI" pitchFamily="34" charset="-120"/>
               </a:rPr>
-              <a:t>Decision framing: adopt, validate, or defer a hosting blueprint for future LangGraph agents.
-</a:t>
-            </a:r>
-            <a:endParaRPr lang="en-US" sz="1000" dirty="0"/>
+              <a:t>Golden dataset composition: true positives, false positives, ambiguous evidence, missing data, conflicting tools, prompt injection, unauthorized actions, unsupported conclusions.</a:t>
+            </a:r>
+            <a:endParaRPr lang="en-US" sz="1150" dirty="0"/>
           </a:p>
           <a:p>
             <a:pPr marL="228600" indent="-228600">
@@ -17051,7 +19811,7 @@
               <a:buChar char="●"/>
             </a:pPr>
             <a:r>
-              <a:rPr lang="en-US" sz="1000" b="1" dirty="0">
+              <a:rPr lang="en-US" sz="1150" b="1" dirty="0">
                 <a:solidFill>
                   <a:srgbClr val="107C10"/>
                 </a:solidFill>
@@ -17068,7 +19828,7 @@
               <a:buNone/>
             </a:pPr>
             <a:r>
-              <a:rPr lang="en-US" sz="1200" dirty="0">
+              <a:rPr lang="en-US" sz="1250" dirty="0">
                 <a:solidFill>
                   <a:srgbClr val="1A1A1A"/>
                 </a:solidFill>
@@ -17076,10 +19836,9 @@
                 <a:ea typeface="Segoe UI" pitchFamily="34" charset="-122"/>
                 <a:cs typeface="Segoe UI" pitchFamily="34" charset="-120"/>
               </a:rPr>
-              <a:t>Foundry Hosted Agents is the leading PoC candidate — not yet an unconditional production selection.
-</a:t>
-            </a:r>
-            <a:endParaRPr lang="en-US" sz="1000" dirty="0"/>
+              <a:t>Executed gate: trusted runtime evidence, required receipts, policy constraints, exact safety refusal; seven reports pass coherence, groundedness, and task adherence.</a:t>
+            </a:r>
+            <a:endParaRPr lang="en-US" sz="1150" dirty="0"/>
           </a:p>
           <a:p>
             <a:pPr marL="228600" indent="-228600">
@@ -17090,15 +19849,15 @@
               <a:buChar char="●"/>
             </a:pPr>
             <a:r>
-              <a:rPr lang="en-US" sz="1000" b="1" dirty="0">
-                <a:solidFill>
-                  <a:srgbClr val="107C10"/>
-                </a:solidFill>
-                <a:latin typeface="Segoe UI" pitchFamily="34" charset="0"/>
-                <a:ea typeface="Segoe UI" pitchFamily="34" charset="-122"/>
-                <a:cs typeface="Segoe UI" pitchFamily="34" charset="-120"/>
-              </a:rPr>
-              <a:t>CONFIRMED  </a:t>
+              <a:rPr lang="en-US" sz="1150" b="1" dirty="0">
+                <a:solidFill>
+                  <a:srgbClr val="D13438"/>
+                </a:solidFill>
+                <a:latin typeface="Segoe UI" pitchFamily="34" charset="0"/>
+                <a:ea typeface="Segoe UI" pitchFamily="34" charset="-122"/>
+                <a:cs typeface="Segoe UI" pitchFamily="34" charset="-120"/>
+              </a:rPr>
+              <a:t>REQUIRES VALIDATION  </a:t>
             </a:r>
             <a:pPr indent="0" marL="0">
               <a:lnSpc>
@@ -17107,7 +19866,7 @@
               <a:buNone/>
             </a:pPr>
             <a:r>
-              <a:rPr lang="en-US" sz="1200" dirty="0">
+              <a:rPr lang="en-US" sz="1250" dirty="0">
                 <a:solidFill>
                   <a:srgbClr val="1A1A1A"/>
                 </a:solidFill>
@@ -17115,16 +19874,91 @@
                 <a:ea typeface="Segoe UI" pitchFamily="34" charset="-122"/>
                 <a:cs typeface="Segoe UI" pitchFamily="34" charset="-120"/>
               </a:rPr>
-              <a:t>This deck separates what today's evidence proves from what the PoC must still prove.
-</a:t>
-            </a:r>
-            <a:endParaRPr lang="en-US" sz="1000" dirty="0"/>
+              <a:t>Tool argument accuracy, latency, token use, and session compute need separate acceptance measures. Receipt presence or judge passes do not establish every proposed rubric dimension.</a:t>
+            </a:r>
+            <a:endParaRPr lang="en-US" sz="1150" dirty="0"/>
+          </a:p>
+          <a:p>
+            <a:pPr marL="228600" indent="-228600">
+              <a:lnSpc>
+                <a:spcPct val="112000"/>
+              </a:lnSpc>
+              <a:buSzPct val="100000"/>
+              <a:buChar char="●"/>
+            </a:pPr>
+            <a:r>
+              <a:rPr lang="en-US" sz="1150" b="1" dirty="0">
+                <a:solidFill>
+                  <a:srgbClr val="107C10"/>
+                </a:solidFill>
+                <a:latin typeface="Segoe UI" pitchFamily="34" charset="0"/>
+                <a:ea typeface="Segoe UI" pitchFamily="34" charset="-122"/>
+                <a:cs typeface="Segoe UI" pitchFamily="34" charset="-120"/>
+              </a:rPr>
+              <a:t>CONFIRMED  </a:t>
+            </a:r>
+            <a:pPr indent="0" marL="0">
+              <a:lnSpc>
+                <a:spcPct val="112000"/>
+              </a:lnSpc>
+              <a:buNone/>
+            </a:pPr>
+            <a:r>
+              <a:rPr lang="en-US" sz="1250" dirty="0">
+                <a:solidFill>
+                  <a:srgbClr val="1A1A1A"/>
+                </a:solidFill>
+                <a:latin typeface="Segoe UI" pitchFamily="34" charset="0"/>
+                <a:ea typeface="Segoe UI" pitchFamily="34" charset="-122"/>
+                <a:cs typeface="Segoe UI" pitchFamily="34" charset="-120"/>
+              </a:rPr>
+              <a:t>Human review gate required for high-impact vulnerability conclusions and any recommendation triggering remediation or operational change.</a:t>
+            </a:r>
+            <a:endParaRPr lang="en-US" sz="1150" dirty="0"/>
+          </a:p>
+          <a:p>
+            <a:pPr marL="228600" indent="-228600">
+              <a:lnSpc>
+                <a:spcPct val="112000"/>
+              </a:lnSpc>
+              <a:buSzPct val="100000"/>
+              <a:buChar char="●"/>
+            </a:pPr>
+            <a:r>
+              <a:rPr lang="en-US" sz="1150" b="1" dirty="0">
+                <a:solidFill>
+                  <a:srgbClr val="0078D4"/>
+                </a:solidFill>
+                <a:latin typeface="Segoe UI" pitchFamily="34" charset="0"/>
+                <a:ea typeface="Segoe UI" pitchFamily="34" charset="-122"/>
+                <a:cs typeface="Segoe UI" pitchFamily="34" charset="-120"/>
+              </a:rPr>
+              <a:t>PREVIEW  </a:t>
+            </a:r>
+            <a:pPr indent="0" marL="0">
+              <a:lnSpc>
+                <a:spcPct val="112000"/>
+              </a:lnSpc>
+              <a:buNone/>
+            </a:pPr>
+            <a:r>
+              <a:rPr lang="en-US" sz="1250" dirty="0">
+                <a:solidFill>
+                  <a:srgbClr val="1A1A1A"/>
+                </a:solidFill>
+                <a:latin typeface="Segoe UI" pitchFamily="34" charset="0"/>
+                <a:ea typeface="Segoe UI" pitchFamily="34" charset="-122"/>
+                <a:cs typeface="Segoe UI" pitchFamily="34" charset="-120"/>
+              </a:rPr>
+              <a:t>Production sampling: continuous evaluation is a separate preview/privacy decision; redact sensitive content and define retention before enabling.</a:t>
+            </a:r>
+            <a:endParaRPr lang="en-US" sz="1150" dirty="0"/>
           </a:p>
         </p:txBody>
       </p:sp>
       <p:sp>
         <p:nvSpPr>
-          <p:cNvPr id="9" name="Shape 6"/>
+          <p:cNvPr id="8" name="Shape 5"/>
           <p:cNvSpPr/>
           <p:nvPr/>
         </p:nvSpPr>
@@ -17144,7 +19978,7 @@
       </p:sp>
       <p:sp>
         <p:nvSpPr>
-          <p:cNvPr id="10" name="Text 7"/>
+          <p:cNvPr id="9" name="Text 6"/>
           <p:cNvSpPr/>
           <p:nvPr/>
         </p:nvSpPr>
@@ -17175,7 +20009,7 @@
                 <a:ea typeface="Segoe UI" pitchFamily="34" charset="-122"/>
                 <a:cs typeface="Segoe UI" pitchFamily="34" charset="-120"/>
               </a:rPr>
-              <a:t>Air Canada — Foundry Hosted Agents Decision</a:t>
+              <a:t>Air Canada — Foundry Hosted Agents Decision · Appendix</a:t>
             </a:r>
             <a:endParaRPr lang="en-US" sz="900" dirty="0"/>
           </a:p>
@@ -17183,7 +20017,7 @@
       </p:sp>
       <p:sp>
         <p:nvSpPr>
-          <p:cNvPr id="11" name="Text 8"/>
+          <p:cNvPr id="10" name="Text 7"/>
           <p:cNvSpPr/>
           <p:nvPr/>
         </p:nvSpPr>
@@ -17214,7 +20048,7 @@
                 <a:ea typeface="Segoe UI" pitchFamily="34" charset="-122"/>
                 <a:cs typeface="Segoe UI" pitchFamily="34" charset="-120"/>
               </a:rPr>
-              <a:t>2 / 26</a:t>
+              <a:t>24 / 31</a:t>
             </a:r>
             <a:endParaRPr lang="en-US" sz="900" dirty="0"/>
           </a:p>
@@ -17228,9 +20062,9 @@
 </p:sld>
 </file>
 
-<file path=ppt/slides/slide20.xml><?xml version="1.0" encoding="utf-8"?>
+<file path=ppt/slides/slide25.xml><?xml version="1.0" encoding="utf-8"?>
 <p:sld xmlns:a="http://schemas.openxmlformats.org/drawingml/2006/main" xmlns:r="http://schemas.openxmlformats.org/officeDocument/2006/relationships" xmlns:p="http://schemas.openxmlformats.org/presentationml/2006/main">
-  <p:cSld name="Slide 20">
+  <p:cSld name="Slide 25">
     <p:bg>
       <p:bgPr>
         <a:solidFill>
@@ -17344,7 +20178,7 @@
                 <a:ea typeface="Segoe UI" pitchFamily="34" charset="-122"/>
                 <a:cs typeface="Segoe UI" pitchFamily="34" charset="-120"/>
               </a:rPr>
-              <a:t>Appendix D — Evaluation Rubric</a:t>
+              <a:t>Appendix E — Load-Test Plan</a:t>
             </a:r>
             <a:endParaRPr lang="en-US" sz="2600" dirty="0"/>
           </a:p>
@@ -17424,8 +20258,7 @@
                 <a:ea typeface="Segoe UI" pitchFamily="34" charset="-122"/>
                 <a:cs typeface="Segoe UI" pitchFamily="34" charset="-120"/>
               </a:rPr>
-              <a:t>Golden dataset composition: true positives, false positives, ambiguous evidence, missing data, conflicting tools, prompt injection, unauthorized actions, unsupported conclusions.
-</a:t>
+              <a:t>Scope (Increment 4 plan of record): 10-100 concurrent users/sessions; same-thread turn concurrency; cold-start latency distribution; active session compute measurement.</a:t>
             </a:r>
             <a:endParaRPr lang="en-US" sz="1150" dirty="0"/>
           </a:p>
@@ -17440,13 +20273,13 @@
             <a:r>
               <a:rPr lang="en-US" sz="1150" b="1" dirty="0">
                 <a:solidFill>
-                  <a:srgbClr val="107C10"/>
-                </a:solidFill>
-                <a:latin typeface="Segoe UI" pitchFamily="34" charset="0"/>
-                <a:ea typeface="Segoe UI" pitchFamily="34" charset="-122"/>
-                <a:cs typeface="Segoe UI" pitchFamily="34" charset="-120"/>
-              </a:rPr>
-              <a:t>CONFIRMED  </a:t>
+                  <a:srgbClr val="D13438"/>
+                </a:solidFill>
+                <a:latin typeface="Segoe UI" pitchFamily="34" charset="0"/>
+                <a:ea typeface="Segoe UI" pitchFamily="34" charset="-122"/>
+                <a:cs typeface="Segoe UI" pitchFamily="34" charset="-120"/>
+              </a:rPr>
+              <a:t>REQUIRES VALIDATION  </a:t>
             </a:r>
             <a:pPr indent="0" marL="0">
               <a:lnSpc>
@@ -17463,8 +20296,7 @@
                 <a:ea typeface="Segoe UI" pitchFamily="34" charset="-122"/>
                 <a:cs typeface="Segoe UI" pitchFamily="34" charset="-120"/>
               </a:rPr>
-              <a:t>Release-gate criteria: triage correctness, evidence citation, tool selection, tool argument accuracy, unsupported-action refusal, task completion, output-schema validity, safety, latency, token use, session compute.
-</a:t>
+              <a:t>Unmeasured today: maximum sessions, requests-per-second ceiling, MCP fan-out throughput, checkpoint size limits, downstream throttling behavior.</a:t>
             </a:r>
             <a:endParaRPr lang="en-US" sz="1150" dirty="0"/>
           </a:p>
@@ -17479,13 +20311,13 @@
             <a:r>
               <a:rPr lang="en-US" sz="1150" b="1" dirty="0">
                 <a:solidFill>
-                  <a:srgbClr val="107C10"/>
-                </a:solidFill>
-                <a:latin typeface="Segoe UI" pitchFamily="34" charset="0"/>
-                <a:ea typeface="Segoe UI" pitchFamily="34" charset="-122"/>
-                <a:cs typeface="Segoe UI" pitchFamily="34" charset="-120"/>
-              </a:rPr>
-              <a:t>CONFIRMED  </a:t>
+                  <a:srgbClr val="D13438"/>
+                </a:solidFill>
+                <a:latin typeface="Segoe UI" pitchFamily="34" charset="0"/>
+                <a:ea typeface="Segoe UI" pitchFamily="34" charset="-122"/>
+                <a:cs typeface="Segoe UI" pitchFamily="34" charset="-120"/>
+              </a:rPr>
+              <a:t>REQUIRES VALIDATION  </a:t>
             </a:r>
             <a:pPr indent="0" marL="0">
               <a:lnSpc>
@@ -17502,86 +20334,7 @@
                 <a:ea typeface="Segoe UI" pitchFamily="34" charset="-122"/>
                 <a:cs typeface="Segoe UI" pitchFamily="34" charset="-120"/>
               </a:rPr>
-              <a:t>Evaluator types: deterministic checks (schema, citations, allowed tool calls, policy constraints) + model-based evaluators (relevance, groundedness, task adherence, rubric scoring). Built-in catalog includes quality, similarity, RAG, risk/safety, and agentic evaluator families.
-</a:t>
-            </a:r>
-            <a:endParaRPr lang="en-US" sz="1150" dirty="0"/>
-          </a:p>
-          <a:p>
-            <a:pPr marL="228600" indent="-228600">
-              <a:lnSpc>
-                <a:spcPct val="112000"/>
-              </a:lnSpc>
-              <a:buSzPct val="100000"/>
-              <a:buChar char="●"/>
-            </a:pPr>
-            <a:r>
-              <a:rPr lang="en-US" sz="1150" b="1" dirty="0">
-                <a:solidFill>
-                  <a:srgbClr val="107C10"/>
-                </a:solidFill>
-                <a:latin typeface="Segoe UI" pitchFamily="34" charset="0"/>
-                <a:ea typeface="Segoe UI" pitchFamily="34" charset="-122"/>
-                <a:cs typeface="Segoe UI" pitchFamily="34" charset="-120"/>
-              </a:rPr>
-              <a:t>CONFIRMED  </a:t>
-            </a:r>
-            <a:pPr indent="0" marL="0">
-              <a:lnSpc>
-                <a:spcPct val="112000"/>
-              </a:lnSpc>
-              <a:buNone/>
-            </a:pPr>
-            <a:r>
-              <a:rPr lang="en-US" sz="1250" dirty="0">
-                <a:solidFill>
-                  <a:srgbClr val="1A1A1A"/>
-                </a:solidFill>
-                <a:latin typeface="Segoe UI" pitchFamily="34" charset="0"/>
-                <a:ea typeface="Segoe UI" pitchFamily="34" charset="-122"/>
-                <a:cs typeface="Segoe UI" pitchFamily="34" charset="-120"/>
-              </a:rPr>
-              <a:t>Human review gate required for high-impact vulnerability conclusions and any recommendation triggering remediation or operational change.
-</a:t>
-            </a:r>
-            <a:endParaRPr lang="en-US" sz="1150" dirty="0"/>
-          </a:p>
-          <a:p>
-            <a:pPr marL="228600" indent="-228600">
-              <a:lnSpc>
-                <a:spcPct val="112000"/>
-              </a:lnSpc>
-              <a:buSzPct val="100000"/>
-              <a:buChar char="●"/>
-            </a:pPr>
-            <a:r>
-              <a:rPr lang="en-US" sz="1150" b="1" dirty="0">
-                <a:solidFill>
-                  <a:srgbClr val="0078D4"/>
-                </a:solidFill>
-                <a:latin typeface="Segoe UI" pitchFamily="34" charset="0"/>
-                <a:ea typeface="Segoe UI" pitchFamily="34" charset="-122"/>
-                <a:cs typeface="Segoe UI" pitchFamily="34" charset="-120"/>
-              </a:rPr>
-              <a:t>PREVIEW  </a:t>
-            </a:r>
-            <a:pPr indent="0" marL="0">
-              <a:lnSpc>
-                <a:spcPct val="112000"/>
-              </a:lnSpc>
-              <a:buNone/>
-            </a:pPr>
-            <a:r>
-              <a:rPr lang="en-US" sz="1250" dirty="0">
-                <a:solidFill>
-                  <a:srgbClr val="1A1A1A"/>
-                </a:solidFill>
-                <a:latin typeface="Segoe UI" pitchFamily="34" charset="0"/>
-                <a:ea typeface="Segoe UI" pitchFamily="34" charset="-122"/>
-                <a:cs typeface="Segoe UI" pitchFamily="34" charset="-120"/>
-              </a:rPr>
-              <a:t>Production sampling: continuous evaluation is a separate preview/privacy decision; redact sensitive content and define retention before enabling.
-</a:t>
+              <a:t>State-experiment benchmark (same increment): Cosmos DB serverless CosmosDBSaver checkpointer — latency, RU cost, and private-endpoint reachability vs. the Responses-history baseline.</a:t>
             </a:r>
             <a:endParaRPr lang="en-US" sz="1150" dirty="0"/>
           </a:p>
@@ -17679,7 +20432,7 @@
                 <a:ea typeface="Segoe UI" pitchFamily="34" charset="-122"/>
                 <a:cs typeface="Segoe UI" pitchFamily="34" charset="-120"/>
               </a:rPr>
-              <a:t>20 / 26</a:t>
+              <a:t>25 / 31</a:t>
             </a:r>
             <a:endParaRPr lang="en-US" sz="900" dirty="0"/>
           </a:p>
@@ -17693,9 +20446,9 @@
 </p:sld>
 </file>
 
-<file path=ppt/slides/slide21.xml><?xml version="1.0" encoding="utf-8"?>
+<file path=ppt/slides/slide26.xml><?xml version="1.0" encoding="utf-8"?>
 <p:sld xmlns:a="http://schemas.openxmlformats.org/drawingml/2006/main" xmlns:r="http://schemas.openxmlformats.org/officeDocument/2006/relationships" xmlns:p="http://schemas.openxmlformats.org/presentationml/2006/main">
-  <p:cSld name="Slide 21">
+  <p:cSld name="Slide 26">
     <p:bg>
       <p:bgPr>
         <a:solidFill>
@@ -17809,7 +20562,7 @@
                 <a:ea typeface="Segoe UI" pitchFamily="34" charset="-122"/>
                 <a:cs typeface="Segoe UI" pitchFamily="34" charset="-120"/>
               </a:rPr>
-              <a:t>Appendix E — Load-Test Plan</a:t>
+              <a:t>Appendix F (1 of 2) — RBAC Matrix — Roles</a:t>
             </a:r>
             <a:endParaRPr lang="en-US" sz="2600" dirty="0"/>
           </a:p>
@@ -17835,396 +20588,9 @@
           <a:ln/>
         </p:spPr>
       </p:sp>
-      <p:sp>
-        <p:nvSpPr>
-          <p:cNvPr id="6" name="Text 4"/>
-          <p:cNvSpPr/>
-          <p:nvPr/>
-        </p:nvSpPr>
-        <p:spPr>
-          <a:xfrm>
-            <a:off x="502920" y="1554480"/>
-            <a:ext cx="11155680" cy="4846320"/>
-          </a:xfrm>
-          <a:prstGeom prst="rect">
-            <a:avLst/>
-          </a:prstGeom>
-          <a:noFill/>
-          <a:ln/>
-        </p:spPr>
-        <p:txBody>
-          <a:bodyPr wrap="square" rtlCol="0" anchor="t"/>
-          <a:lstStyle/>
-          <a:p>
-            <a:pPr marL="228600" indent="-228600">
-              <a:lnSpc>
-                <a:spcPct val="112000"/>
-              </a:lnSpc>
-              <a:buSzPct val="100000"/>
-              <a:buChar char="●"/>
-            </a:pPr>
-            <a:r>
-              <a:rPr lang="en-US" sz="1150" b="1" dirty="0">
-                <a:solidFill>
-                  <a:srgbClr val="107C10"/>
-                </a:solidFill>
-                <a:latin typeface="Segoe UI" pitchFamily="34" charset="0"/>
-                <a:ea typeface="Segoe UI" pitchFamily="34" charset="-122"/>
-                <a:cs typeface="Segoe UI" pitchFamily="34" charset="-120"/>
-              </a:rPr>
-              <a:t>CONFIRMED  </a:t>
-            </a:r>
-            <a:pPr indent="0" marL="0">
-              <a:lnSpc>
-                <a:spcPct val="112000"/>
-              </a:lnSpc>
-              <a:buNone/>
-            </a:pPr>
-            <a:r>
-              <a:rPr lang="en-US" sz="1250" dirty="0">
-                <a:solidFill>
-                  <a:srgbClr val="1A1A1A"/>
-                </a:solidFill>
-                <a:latin typeface="Segoe UI" pitchFamily="34" charset="0"/>
-                <a:ea typeface="Segoe UI" pitchFamily="34" charset="-122"/>
-                <a:cs typeface="Segoe UI" pitchFamily="34" charset="-120"/>
-              </a:rPr>
-              <a:t>Scope (Increment 4 plan of record): 10-100 concurrent users/sessions; same-thread turn concurrency; cold-start latency distribution; active session compute measurement.
-</a:t>
-            </a:r>
-            <a:endParaRPr lang="en-US" sz="1150" dirty="0"/>
-          </a:p>
-          <a:p>
-            <a:pPr marL="228600" indent="-228600">
-              <a:lnSpc>
-                <a:spcPct val="112000"/>
-              </a:lnSpc>
-              <a:buSzPct val="100000"/>
-              <a:buChar char="●"/>
-            </a:pPr>
-            <a:r>
-              <a:rPr lang="en-US" sz="1150" b="1" dirty="0">
-                <a:solidFill>
-                  <a:srgbClr val="D13438"/>
-                </a:solidFill>
-                <a:latin typeface="Segoe UI" pitchFamily="34" charset="0"/>
-                <a:ea typeface="Segoe UI" pitchFamily="34" charset="-122"/>
-                <a:cs typeface="Segoe UI" pitchFamily="34" charset="-120"/>
-              </a:rPr>
-              <a:t>REQUIRES VALIDATION  </a:t>
-            </a:r>
-            <a:pPr indent="0" marL="0">
-              <a:lnSpc>
-                <a:spcPct val="112000"/>
-              </a:lnSpc>
-              <a:buNone/>
-            </a:pPr>
-            <a:r>
-              <a:rPr lang="en-US" sz="1250" dirty="0">
-                <a:solidFill>
-                  <a:srgbClr val="1A1A1A"/>
-                </a:solidFill>
-                <a:latin typeface="Segoe UI" pitchFamily="34" charset="0"/>
-                <a:ea typeface="Segoe UI" pitchFamily="34" charset="-122"/>
-                <a:cs typeface="Segoe UI" pitchFamily="34" charset="-120"/>
-              </a:rPr>
-              <a:t>Unmeasured today: maximum sessions, requests-per-second ceiling, MCP fan-out throughput, checkpoint size limits, downstream throttling behavior.
-</a:t>
-            </a:r>
-            <a:endParaRPr lang="en-US" sz="1150" dirty="0"/>
-          </a:p>
-          <a:p>
-            <a:pPr marL="228600" indent="-228600">
-              <a:lnSpc>
-                <a:spcPct val="112000"/>
-              </a:lnSpc>
-              <a:buSzPct val="100000"/>
-              <a:buChar char="●"/>
-            </a:pPr>
-            <a:r>
-              <a:rPr lang="en-US" sz="1150" b="1" dirty="0">
-                <a:solidFill>
-                  <a:srgbClr val="D13438"/>
-                </a:solidFill>
-                <a:latin typeface="Segoe UI" pitchFamily="34" charset="0"/>
-                <a:ea typeface="Segoe UI" pitchFamily="34" charset="-122"/>
-                <a:cs typeface="Segoe UI" pitchFamily="34" charset="-120"/>
-              </a:rPr>
-              <a:t>REQUIRES VALIDATION  </a:t>
-            </a:r>
-            <a:pPr indent="0" marL="0">
-              <a:lnSpc>
-                <a:spcPct val="112000"/>
-              </a:lnSpc>
-              <a:buNone/>
-            </a:pPr>
-            <a:r>
-              <a:rPr lang="en-US" sz="1250" dirty="0">
-                <a:solidFill>
-                  <a:srgbClr val="1A1A1A"/>
-                </a:solidFill>
-                <a:latin typeface="Segoe UI" pitchFamily="34" charset="0"/>
-                <a:ea typeface="Segoe UI" pitchFamily="34" charset="-122"/>
-                <a:cs typeface="Segoe UI" pitchFamily="34" charset="-120"/>
-              </a:rPr>
-              <a:t>State-experiment benchmark (same increment): Cosmos DB serverless CosmosDBSaver checkpointer — latency, RU cost, and private-endpoint reachability vs. the Responses-history baseline.
-</a:t>
-            </a:r>
-            <a:endParaRPr lang="en-US" sz="1150" dirty="0"/>
-          </a:p>
-        </p:txBody>
-      </p:sp>
-      <p:sp>
-        <p:nvSpPr>
-          <p:cNvPr id="8" name="Shape 5"/>
-          <p:cNvSpPr/>
-          <p:nvPr/>
-        </p:nvSpPr>
-        <p:spPr>
-          <a:xfrm>
-            <a:off x="0" y="6784848"/>
-            <a:ext cx="12188952" cy="27432"/>
-          </a:xfrm>
-          <a:prstGeom prst="rect">
-            <a:avLst/>
-          </a:prstGeom>
-          <a:solidFill>
-            <a:srgbClr val="E1E5E8"/>
-          </a:solidFill>
-          <a:ln/>
-        </p:spPr>
-      </p:sp>
-      <p:sp>
-        <p:nvSpPr>
-          <p:cNvPr id="9" name="Text 6"/>
-          <p:cNvSpPr/>
-          <p:nvPr/>
-        </p:nvSpPr>
-        <p:spPr>
-          <a:xfrm>
-            <a:off x="457200" y="6537960"/>
-            <a:ext cx="8229600" cy="256032"/>
-          </a:xfrm>
-          <a:prstGeom prst="rect">
-            <a:avLst/>
-          </a:prstGeom>
-          <a:noFill/>
-          <a:ln/>
-        </p:spPr>
-        <p:txBody>
-          <a:bodyPr wrap="square" rtlCol="0" anchor="ctr"/>
-          <a:lstStyle/>
-          <a:p>
-            <a:pPr indent="0" marL="0">
-              <a:buNone/>
-            </a:pPr>
-            <a:r>
-              <a:rPr lang="en-US" sz="900" dirty="0">
-                <a:solidFill>
-                  <a:srgbClr val="767676"/>
-                </a:solidFill>
-                <a:latin typeface="Segoe UI" pitchFamily="34" charset="0"/>
-                <a:ea typeface="Segoe UI" pitchFamily="34" charset="-122"/>
-                <a:cs typeface="Segoe UI" pitchFamily="34" charset="-120"/>
-              </a:rPr>
-              <a:t>Air Canada — Foundry Hosted Agents Decision · Appendix</a:t>
-            </a:r>
-            <a:endParaRPr lang="en-US" sz="900" dirty="0"/>
-          </a:p>
-        </p:txBody>
-      </p:sp>
-      <p:sp>
-        <p:nvSpPr>
-          <p:cNvPr id="10" name="Text 7"/>
-          <p:cNvSpPr/>
-          <p:nvPr/>
-        </p:nvSpPr>
-        <p:spPr>
-          <a:xfrm>
-            <a:off x="11430000" y="6528816"/>
-            <a:ext cx="640080" cy="256032"/>
-          </a:xfrm>
-          <a:prstGeom prst="rect">
-            <a:avLst/>
-          </a:prstGeom>
-          <a:noFill/>
-          <a:ln/>
-        </p:spPr>
-        <p:txBody>
-          <a:bodyPr wrap="square" rtlCol="0" anchor="ctr"/>
-          <a:lstStyle/>
-          <a:p>
-            <a:pPr algn="r" indent="0" marL="0">
-              <a:buNone/>
-            </a:pPr>
-            <a:r>
-              <a:rPr lang="en-US" sz="900" dirty="0">
-                <a:solidFill>
-                  <a:srgbClr val="767676"/>
-                </a:solidFill>
-                <a:latin typeface="Segoe UI" pitchFamily="34" charset="0"/>
-                <a:ea typeface="Segoe UI" pitchFamily="34" charset="-122"/>
-                <a:cs typeface="Segoe UI" pitchFamily="34" charset="-120"/>
-              </a:rPr>
-              <a:t>21 / 26</a:t>
-            </a:r>
-            <a:endParaRPr lang="en-US" sz="900" dirty="0"/>
-          </a:p>
-        </p:txBody>
-      </p:sp>
-    </p:spTree>
-  </p:cSld>
-  <p:clrMapOvr>
-    <a:masterClrMapping/>
-  </p:clrMapOvr>
-</p:sld>
-</file>
-
-<file path=ppt/slides/slide22.xml><?xml version="1.0" encoding="utf-8"?>
-<p:sld xmlns:a="http://schemas.openxmlformats.org/drawingml/2006/main" xmlns:r="http://schemas.openxmlformats.org/officeDocument/2006/relationships" xmlns:p="http://schemas.openxmlformats.org/presentationml/2006/main">
-  <p:cSld name="Slide 22">
-    <p:bg>
-      <p:bgPr>
-        <a:solidFill>
-          <a:srgbClr val="FAFBFC"/>
-        </a:solidFill>
-      </p:bgPr>
-    </p:bg>
-    <p:spTree>
-      <p:nvGrpSpPr>
-        <p:cNvPr id="1" name=""/>
-        <p:cNvGrpSpPr/>
-        <p:nvPr/>
-      </p:nvGrpSpPr>
-      <p:grpSpPr>
-        <a:xfrm>
-          <a:off x="0" y="0"/>
-          <a:ext cx="0" cy="0"/>
-          <a:chOff x="0" y="0"/>
-          <a:chExt cx="0" cy="0"/>
-        </a:xfrm>
-      </p:grpSpPr>
-      <p:sp>
-        <p:nvSpPr>
-          <p:cNvPr id="2" name="Shape 0"/>
-          <p:cNvSpPr/>
-          <p:nvPr/>
-        </p:nvSpPr>
-        <p:spPr>
-          <a:xfrm>
-            <a:off x="0" y="0"/>
-            <a:ext cx="12188952" cy="82296"/>
-          </a:xfrm>
-          <a:prstGeom prst="rect">
-            <a:avLst/>
-          </a:prstGeom>
-          <a:solidFill>
-            <a:srgbClr val="5C2D91"/>
-          </a:solidFill>
-          <a:ln/>
-        </p:spPr>
-      </p:sp>
-      <p:sp>
-        <p:nvSpPr>
-          <p:cNvPr id="3" name="Text 1"/>
-          <p:cNvSpPr/>
-          <p:nvPr/>
-        </p:nvSpPr>
-        <p:spPr>
-          <a:xfrm>
-            <a:off x="457200" y="292608"/>
-            <a:ext cx="11247120" cy="274320"/>
-          </a:xfrm>
-          <a:prstGeom prst="rect">
-            <a:avLst/>
-          </a:prstGeom>
-          <a:noFill/>
-          <a:ln/>
-        </p:spPr>
-        <p:txBody>
-          <a:bodyPr wrap="square" rtlCol="0" anchor="ctr"/>
-          <a:lstStyle/>
-          <a:p>
-            <a:pPr indent="0" marL="0">
-              <a:buNone/>
-            </a:pPr>
-            <a:r>
-              <a:rPr lang="en-US" sz="1100" b="1" spc="100" kern="0" dirty="0">
-                <a:solidFill>
-                  <a:srgbClr val="5C2D91"/>
-                </a:solidFill>
-                <a:latin typeface="Segoe UI" pitchFamily="34" charset="0"/>
-                <a:ea typeface="Segoe UI" pitchFamily="34" charset="-122"/>
-                <a:cs typeface="Segoe UI" pitchFamily="34" charset="-120"/>
-              </a:rPr>
-              <a:t>APPENDIX</a:t>
-            </a:r>
-            <a:endParaRPr lang="en-US" sz="1100" dirty="0"/>
-          </a:p>
-        </p:txBody>
-      </p:sp>
-      <p:sp>
-        <p:nvSpPr>
-          <p:cNvPr id="4" name="Text 2"/>
-          <p:cNvSpPr/>
-          <p:nvPr/>
-        </p:nvSpPr>
-        <p:spPr>
-          <a:xfrm>
-            <a:off x="457200" y="548640"/>
-            <a:ext cx="11247120" cy="548640"/>
-          </a:xfrm>
-          <a:prstGeom prst="rect">
-            <a:avLst/>
-          </a:prstGeom>
-          <a:noFill/>
-          <a:ln/>
-        </p:spPr>
-        <p:txBody>
-          <a:bodyPr wrap="square" rtlCol="0" anchor="ctr"/>
-          <a:lstStyle/>
-          <a:p>
-            <a:pPr indent="0" marL="0">
-              <a:buNone/>
-            </a:pPr>
-            <a:r>
-              <a:rPr lang="en-US" sz="2600" b="1" dirty="0">
-                <a:solidFill>
-                  <a:srgbClr val="001B3D"/>
-                </a:solidFill>
-                <a:latin typeface="Segoe UI" pitchFamily="34" charset="0"/>
-                <a:ea typeface="Segoe UI" pitchFamily="34" charset="-122"/>
-                <a:cs typeface="Segoe UI" pitchFamily="34" charset="-120"/>
-              </a:rPr>
-              <a:t>Appendix F (1 of 2) — RBAC Matrix — Roles</a:t>
-            </a:r>
-            <a:endParaRPr lang="en-US" sz="2600" dirty="0"/>
-          </a:p>
-        </p:txBody>
-      </p:sp>
-      <p:sp>
-        <p:nvSpPr>
-          <p:cNvPr id="5" name="Shape 3"/>
-          <p:cNvSpPr/>
-          <p:nvPr/>
-        </p:nvSpPr>
-        <p:spPr>
-          <a:xfrm>
-            <a:off x="457200" y="1188720"/>
-            <a:ext cx="11247120" cy="10973"/>
-          </a:xfrm>
-          <a:prstGeom prst="rect">
-            <a:avLst/>
-          </a:prstGeom>
-          <a:solidFill>
-            <a:srgbClr val="E1E5E8"/>
-          </a:solidFill>
-          <a:ln/>
-        </p:spPr>
-      </p:sp>
       <p:graphicFrame>
         <p:nvGraphicFramePr>
-          <p:cNvPr id="23" name="Table 0"/>
+          <p:cNvPr id="27" name="Table 0"/>
           <p:cNvGraphicFramePr>
             <a:graphicFrameLocks noGrp="1"/>
           </p:cNvGraphicFramePr>
@@ -19020,7 +21386,7 @@
                           <a:ea typeface="Segoe UI" pitchFamily="34" charset="-122"/>
                           <a:cs typeface="Segoe UI" pitchFamily="34" charset="-120"/>
                         </a:rPr>
-                        <a:t>data-plane build/deploy — the correct role for CI/CD, not Cognitive Services *</a:t>
+                        <a:t>Foundry data plane; one of two checked runtime roles</a:t>
                       </a:r>
                       <a:endParaRPr lang="en-US" sz="1000" dirty="0">
                         <a:latin typeface="Segoe UI" charset="0"/>
@@ -19090,7 +21456,7 @@
                           <a:ea typeface="Segoe UI" pitchFamily="34" charset="-122"/>
                           <a:cs typeface="Segoe UI" pitchFamily="34" charset="-120"/>
                         </a:rPr>
-                        <a:t>Foundry Project Manager</a:t>
+                        <a:t>Cognitive Services OpenAI User</a:t>
                       </a:r>
                       <a:endParaRPr lang="en-US" sz="1000" dirty="0">
                         <a:latin typeface="Segoe UI" charset="0"/>
@@ -19158,7 +21524,7 @@
                           <a:ea typeface="Segoe UI" pitchFamily="34" charset="-122"/>
                           <a:cs typeface="Segoe UI" pitchFamily="34" charset="-120"/>
                         </a:rPr>
-                        <a:t>eadc314b-1a2d-4efa-be10-5d325db5065e</a:t>
+                        <a:t>5e0bd9bd-7b93-4f28-af87-19fc36ad61bd</a:t>
                       </a:r>
                       <a:endParaRPr lang="en-US" sz="1000" dirty="0">
                         <a:latin typeface="Segoe UI" charset="0"/>
@@ -19294,7 +21660,7 @@
                           <a:ea typeface="Segoe UI" pitchFamily="34" charset="-122"/>
                           <a:cs typeface="Segoe UI" pitchFamily="34" charset="-120"/>
                         </a:rPr>
-                        <a:t>create/manage projects, publish agents</a:t>
+                        <a:t>Model access for the runtime instance principal</a:t>
                       </a:r>
                       <a:endParaRPr lang="en-US" sz="1000" dirty="0">
                         <a:latin typeface="Segoe UI" charset="0"/>
@@ -19364,7 +21730,7 @@
                           <a:ea typeface="Segoe UI" pitchFamily="34" charset="-122"/>
                           <a:cs typeface="Segoe UI" pitchFamily="34" charset="-120"/>
                         </a:rPr>
-                        <a:t>Foundry Account Owner</a:t>
+                        <a:t>Foundry Project Manager</a:t>
                       </a:r>
                       <a:endParaRPr lang="en-US" sz="1000" dirty="0">
                         <a:latin typeface="Segoe UI" charset="0"/>
@@ -19432,7 +21798,7 @@
                           <a:ea typeface="Segoe UI" pitchFamily="34" charset="-122"/>
                           <a:cs typeface="Segoe UI" pitchFamily="34" charset="-120"/>
                         </a:rPr>
-                        <a:t>e47c6f54-e4a2-4754-9501-8e0985b135e1</a:t>
+                        <a:t>eadc314b-1a2d-4efa-be10-5d325db5065e</a:t>
                       </a:r>
                       <a:endParaRPr lang="en-US" sz="1000" dirty="0">
                         <a:latin typeface="Segoe UI" charset="0"/>
@@ -19568,7 +21934,7 @@
                           <a:ea typeface="Segoe UI" pitchFamily="34" charset="-122"/>
                           <a:cs typeface="Segoe UI" pitchFamily="34" charset="-120"/>
                         </a:rPr>
-                        <a:t>create projects/accounts, no data-plane build</a:t>
+                        <a:t>create/manage projects, publish agents</a:t>
                       </a:r>
                       <a:endParaRPr lang="en-US" sz="1000" dirty="0">
                         <a:latin typeface="Segoe UI" charset="0"/>
@@ -19638,7 +22004,7 @@
                           <a:ea typeface="Segoe UI" pitchFamily="34" charset="-122"/>
                           <a:cs typeface="Segoe UI" pitchFamily="34" charset="-120"/>
                         </a:rPr>
-                        <a:t>Foundry Owner</a:t>
+                        <a:t>Foundry Account Owner</a:t>
                       </a:r>
                       <a:endParaRPr lang="en-US" sz="1000" dirty="0">
                         <a:latin typeface="Segoe UI" charset="0"/>
@@ -19706,7 +22072,7 @@
                           <a:ea typeface="Segoe UI" pitchFamily="34" charset="-122"/>
                           <a:cs typeface="Segoe UI" pitchFamily="34" charset="-120"/>
                         </a:rPr>
-                        <a:t>c883944f-8b7b-4483-af10-35834be79c4a</a:t>
+                        <a:t>e47c6f54-e4a2-4754-9501-8e0985b135e1</a:t>
                       </a:r>
                       <a:endParaRPr lang="en-US" sz="1000" dirty="0">
                         <a:latin typeface="Segoe UI" charset="0"/>
@@ -19842,6 +22208,280 @@
                           <a:ea typeface="Segoe UI" pitchFamily="34" charset="-122"/>
                           <a:cs typeface="Segoe UI" pitchFamily="34" charset="-120"/>
                         </a:rPr>
+                        <a:t>create projects/accounts, no data-plane build</a:t>
+                      </a:r>
+                      <a:endParaRPr lang="en-US" sz="1000" dirty="0">
+                        <a:latin typeface="Segoe UI" charset="0"/>
+                        <a:ea typeface="Segoe UI" charset="0"/>
+                        <a:cs typeface="Segoe UI" charset="0"/>
+                      </a:endParaRPr>
+                    </a:p>
+                  </a:txBody>
+                  <a:tcPr marL="91440" marR="91440" marT="45720" marB="45720" anchor="t">
+                    <a:lnL w="6350" cap="flat" cmpd="sng" algn="ctr">
+                      <a:solidFill>
+                        <a:srgbClr val="E1E5E8"/>
+                      </a:solidFill>
+                      <a:prstDash val="solid"/>
+                      <a:round/>
+                      <a:headEnd type="none" w="med" len="med"/>
+                      <a:tailEnd type="none" w="med" len="med"/>
+                    </a:lnL>
+                    <a:lnR w="6350" cap="flat" cmpd="sng" algn="ctr">
+                      <a:solidFill>
+                        <a:srgbClr val="E1E5E8"/>
+                      </a:solidFill>
+                      <a:prstDash val="solid"/>
+                      <a:round/>
+                      <a:headEnd type="none" w="med" len="med"/>
+                      <a:tailEnd type="none" w="med" len="med"/>
+                    </a:lnR>
+                    <a:lnT w="6350" cap="flat" cmpd="sng" algn="ctr">
+                      <a:solidFill>
+                        <a:srgbClr val="E1E5E8"/>
+                      </a:solidFill>
+                      <a:prstDash val="solid"/>
+                      <a:round/>
+                      <a:headEnd type="none" w="med" len="med"/>
+                      <a:tailEnd type="none" w="med" len="med"/>
+                    </a:lnT>
+                    <a:lnB w="6350" cap="flat" cmpd="sng" algn="ctr">
+                      <a:solidFill>
+                        <a:srgbClr val="E1E5E8"/>
+                      </a:solidFill>
+                      <a:prstDash val="solid"/>
+                      <a:round/>
+                      <a:headEnd type="none" w="med" len="med"/>
+                      <a:tailEnd type="none" w="med" len="med"/>
+                    </a:lnB>
+                    <a:solidFill>
+                      <a:srgbClr val="FFFFFF"/>
+                    </a:solidFill>
+                  </a:tcPr>
+                </a:tc>
+              </a:tr>
+              <a:tr h="0">
+                <a:tc>
+                  <a:txBody>
+                    <a:bodyPr/>
+                    <a:lstStyle/>
+                    <a:p>
+                      <a:pPr indent="0" marL="0">
+                        <a:buNone/>
+                      </a:pPr>
+                      <a:r>
+                        <a:rPr lang="en-US" sz="1000" dirty="0">
+                          <a:solidFill>
+                            <a:srgbClr val="1A1A1A"/>
+                          </a:solidFill>
+                          <a:latin typeface="Segoe UI" pitchFamily="34" charset="0"/>
+                          <a:ea typeface="Segoe UI" pitchFamily="34" charset="-122"/>
+                          <a:cs typeface="Segoe UI" pitchFamily="34" charset="-120"/>
+                        </a:rPr>
+                        <a:t>Foundry Owner</a:t>
+                      </a:r>
+                      <a:endParaRPr lang="en-US" sz="1000" dirty="0">
+                        <a:latin typeface="Segoe UI" charset="0"/>
+                        <a:ea typeface="Segoe UI" charset="0"/>
+                        <a:cs typeface="Segoe UI" charset="0"/>
+                      </a:endParaRPr>
+                    </a:p>
+                  </a:txBody>
+                  <a:tcPr marL="91440" marR="91440" marT="45720" marB="45720" anchor="t">
+                    <a:lnL w="6350" cap="flat" cmpd="sng" algn="ctr">
+                      <a:solidFill>
+                        <a:srgbClr val="E1E5E8"/>
+                      </a:solidFill>
+                      <a:prstDash val="solid"/>
+                      <a:round/>
+                      <a:headEnd type="none" w="med" len="med"/>
+                      <a:tailEnd type="none" w="med" len="med"/>
+                    </a:lnL>
+                    <a:lnR w="6350" cap="flat" cmpd="sng" algn="ctr">
+                      <a:solidFill>
+                        <a:srgbClr val="E1E5E8"/>
+                      </a:solidFill>
+                      <a:prstDash val="solid"/>
+                      <a:round/>
+                      <a:headEnd type="none" w="med" len="med"/>
+                      <a:tailEnd type="none" w="med" len="med"/>
+                    </a:lnR>
+                    <a:lnT w="6350" cap="flat" cmpd="sng" algn="ctr">
+                      <a:solidFill>
+                        <a:srgbClr val="E1E5E8"/>
+                      </a:solidFill>
+                      <a:prstDash val="solid"/>
+                      <a:round/>
+                      <a:headEnd type="none" w="med" len="med"/>
+                      <a:tailEnd type="none" w="med" len="med"/>
+                    </a:lnT>
+                    <a:lnB w="6350" cap="flat" cmpd="sng" algn="ctr">
+                      <a:solidFill>
+                        <a:srgbClr val="E1E5E8"/>
+                      </a:solidFill>
+                      <a:prstDash val="solid"/>
+                      <a:round/>
+                      <a:headEnd type="none" w="med" len="med"/>
+                      <a:tailEnd type="none" w="med" len="med"/>
+                    </a:lnB>
+                    <a:solidFill>
+                      <a:srgbClr val="F0F7FF"/>
+                    </a:solidFill>
+                  </a:tcPr>
+                </a:tc>
+                <a:tc>
+                  <a:txBody>
+                    <a:bodyPr/>
+                    <a:lstStyle/>
+                    <a:p>
+                      <a:pPr indent="0" marL="0">
+                        <a:buNone/>
+                      </a:pPr>
+                      <a:r>
+                        <a:rPr lang="en-US" sz="1000" dirty="0">
+                          <a:solidFill>
+                            <a:srgbClr val="1A1A1A"/>
+                          </a:solidFill>
+                          <a:latin typeface="Segoe UI" pitchFamily="34" charset="0"/>
+                          <a:ea typeface="Segoe UI" pitchFamily="34" charset="-122"/>
+                          <a:cs typeface="Segoe UI" pitchFamily="34" charset="-120"/>
+                        </a:rPr>
+                        <a:t>c883944f-8b7b-4483-af10-35834be79c4a</a:t>
+                      </a:r>
+                      <a:endParaRPr lang="en-US" sz="1000" dirty="0">
+                        <a:latin typeface="Segoe UI" charset="0"/>
+                        <a:ea typeface="Segoe UI" charset="0"/>
+                        <a:cs typeface="Segoe UI" charset="0"/>
+                      </a:endParaRPr>
+                    </a:p>
+                  </a:txBody>
+                  <a:tcPr marL="91440" marR="91440" marT="45720" marB="45720" anchor="t">
+                    <a:lnL w="6350" cap="flat" cmpd="sng" algn="ctr">
+                      <a:solidFill>
+                        <a:srgbClr val="E1E5E8"/>
+                      </a:solidFill>
+                      <a:prstDash val="solid"/>
+                      <a:round/>
+                      <a:headEnd type="none" w="med" len="med"/>
+                      <a:tailEnd type="none" w="med" len="med"/>
+                    </a:lnL>
+                    <a:lnR w="6350" cap="flat" cmpd="sng" algn="ctr">
+                      <a:solidFill>
+                        <a:srgbClr val="E1E5E8"/>
+                      </a:solidFill>
+                      <a:prstDash val="solid"/>
+                      <a:round/>
+                      <a:headEnd type="none" w="med" len="med"/>
+                      <a:tailEnd type="none" w="med" len="med"/>
+                    </a:lnR>
+                    <a:lnT w="6350" cap="flat" cmpd="sng" algn="ctr">
+                      <a:solidFill>
+                        <a:srgbClr val="E1E5E8"/>
+                      </a:solidFill>
+                      <a:prstDash val="solid"/>
+                      <a:round/>
+                      <a:headEnd type="none" w="med" len="med"/>
+                      <a:tailEnd type="none" w="med" len="med"/>
+                    </a:lnT>
+                    <a:lnB w="6350" cap="flat" cmpd="sng" algn="ctr">
+                      <a:solidFill>
+                        <a:srgbClr val="E1E5E8"/>
+                      </a:solidFill>
+                      <a:prstDash val="solid"/>
+                      <a:round/>
+                      <a:headEnd type="none" w="med" len="med"/>
+                      <a:tailEnd type="none" w="med" len="med"/>
+                    </a:lnB>
+                    <a:solidFill>
+                      <a:srgbClr val="F0F7FF"/>
+                    </a:solidFill>
+                  </a:tcPr>
+                </a:tc>
+                <a:tc>
+                  <a:txBody>
+                    <a:bodyPr/>
+                    <a:lstStyle/>
+                    <a:p>
+                      <a:pPr indent="0" marL="0">
+                        <a:buNone/>
+                      </a:pPr>
+                      <a:r>
+                        <a:rPr lang="en-US" sz="1000" dirty="0">
+                          <a:solidFill>
+                            <a:srgbClr val="1A1A1A"/>
+                          </a:solidFill>
+                          <a:latin typeface="Segoe UI" pitchFamily="34" charset="0"/>
+                          <a:ea typeface="Segoe UI" pitchFamily="34" charset="-122"/>
+                          <a:cs typeface="Segoe UI" pitchFamily="34" charset="-120"/>
+                        </a:rPr>
+                        <a:t>account</a:t>
+                      </a:r>
+                      <a:endParaRPr lang="en-US" sz="1000" dirty="0">
+                        <a:latin typeface="Segoe UI" charset="0"/>
+                        <a:ea typeface="Segoe UI" charset="0"/>
+                        <a:cs typeface="Segoe UI" charset="0"/>
+                      </a:endParaRPr>
+                    </a:p>
+                  </a:txBody>
+                  <a:tcPr marL="91440" marR="91440" marT="45720" marB="45720" anchor="t">
+                    <a:lnL w="6350" cap="flat" cmpd="sng" algn="ctr">
+                      <a:solidFill>
+                        <a:srgbClr val="E1E5E8"/>
+                      </a:solidFill>
+                      <a:prstDash val="solid"/>
+                      <a:round/>
+                      <a:headEnd type="none" w="med" len="med"/>
+                      <a:tailEnd type="none" w="med" len="med"/>
+                    </a:lnL>
+                    <a:lnR w="6350" cap="flat" cmpd="sng" algn="ctr">
+                      <a:solidFill>
+                        <a:srgbClr val="E1E5E8"/>
+                      </a:solidFill>
+                      <a:prstDash val="solid"/>
+                      <a:round/>
+                      <a:headEnd type="none" w="med" len="med"/>
+                      <a:tailEnd type="none" w="med" len="med"/>
+                    </a:lnR>
+                    <a:lnT w="6350" cap="flat" cmpd="sng" algn="ctr">
+                      <a:solidFill>
+                        <a:srgbClr val="E1E5E8"/>
+                      </a:solidFill>
+                      <a:prstDash val="solid"/>
+                      <a:round/>
+                      <a:headEnd type="none" w="med" len="med"/>
+                      <a:tailEnd type="none" w="med" len="med"/>
+                    </a:lnT>
+                    <a:lnB w="6350" cap="flat" cmpd="sng" algn="ctr">
+                      <a:solidFill>
+                        <a:srgbClr val="E1E5E8"/>
+                      </a:solidFill>
+                      <a:prstDash val="solid"/>
+                      <a:round/>
+                      <a:headEnd type="none" w="med" len="med"/>
+                      <a:tailEnd type="none" w="med" len="med"/>
+                    </a:lnB>
+                    <a:solidFill>
+                      <a:srgbClr val="F0F7FF"/>
+                    </a:solidFill>
+                  </a:tcPr>
+                </a:tc>
+                <a:tc>
+                  <a:txBody>
+                    <a:bodyPr/>
+                    <a:lstStyle/>
+                    <a:p>
+                      <a:pPr indent="0" marL="0">
+                        <a:buNone/>
+                      </a:pPr>
+                      <a:r>
+                        <a:rPr lang="en-US" sz="1000" dirty="0">
+                          <a:solidFill>
+                            <a:srgbClr val="1A1A1A"/>
+                          </a:solidFill>
+                          <a:latin typeface="Segoe UI" pitchFamily="34" charset="0"/>
+                          <a:ea typeface="Segoe UI" pitchFamily="34" charset="-122"/>
+                          <a:cs typeface="Segoe UI" pitchFamily="34" charset="-120"/>
+                        </a:rPr>
                         <a:t>full control</a:t>
                       </a:r>
                       <a:endParaRPr lang="en-US" sz="1000" dirty="0">
@@ -19889,7 +22529,7 @@
                       <a:tailEnd type="none" w="med" len="med"/>
                     </a:lnB>
                     <a:solidFill>
-                      <a:srgbClr val="FFFFFF"/>
+                      <a:srgbClr val="F0F7FF"/>
                     </a:solidFill>
                   </a:tcPr>
                 </a:tc>
@@ -20029,7 +22669,7 @@
                 <a:ea typeface="Segoe UI" pitchFamily="34" charset="-122"/>
                 <a:cs typeface="Segoe UI" pitchFamily="34" charset="-120"/>
               </a:rPr>
-              <a:t>22 / 26</a:t>
+              <a:t>26 / 31</a:t>
             </a:r>
             <a:endParaRPr lang="en-US" sz="900" dirty="0"/>
           </a:p>
@@ -20043,9 +22683,9 @@
 </p:sld>
 </file>
 
-<file path=ppt/slides/slide23.xml><?xml version="1.0" encoding="utf-8"?>
+<file path=ppt/slides/slide27.xml><?xml version="1.0" encoding="utf-8"?>
 <p:sld xmlns:a="http://schemas.openxmlformats.org/drawingml/2006/main" xmlns:r="http://schemas.openxmlformats.org/officeDocument/2006/relationships" xmlns:p="http://schemas.openxmlformats.org/presentationml/2006/main">
-  <p:cSld name="Slide 23">
+  <p:cSld name="Slide 27">
     <p:bg>
       <p:bgPr>
         <a:solidFill>
@@ -20187,7 +22827,7 @@
       </p:sp>
       <p:graphicFrame>
         <p:nvGraphicFramePr>
-          <p:cNvPr id="24" name="Table 0"/>
+          <p:cNvPr id="28" name="Table 0"/>
           <p:cNvGraphicFramePr>
             <a:graphicFrameLocks noGrp="1"/>
           </p:cNvGraphicFramePr>
@@ -21544,7 +24184,7 @@
                 <a:ea typeface="Segoe UI" pitchFamily="34" charset="-122"/>
                 <a:cs typeface="Segoe UI" pitchFamily="34" charset="-120"/>
               </a:rPr>
-              <a:t>23 / 26</a:t>
+              <a:t>27 / 31</a:t>
             </a:r>
             <a:endParaRPr lang="en-US" sz="900" dirty="0"/>
           </a:p>
@@ -21558,9 +24198,9 @@
 </p:sld>
 </file>
 
-<file path=ppt/slides/slide24.xml><?xml version="1.0" encoding="utf-8"?>
+<file path=ppt/slides/slide28.xml><?xml version="1.0" encoding="utf-8"?>
 <p:sld xmlns:a="http://schemas.openxmlformats.org/drawingml/2006/main" xmlns:r="http://schemas.openxmlformats.org/officeDocument/2006/relationships" xmlns:p="http://schemas.openxmlformats.org/presentationml/2006/main">
-  <p:cSld name="Slide 24">
+  <p:cSld name="Slide 28">
     <p:bg>
       <p:bgPr>
         <a:solidFill>
@@ -21702,7 +24342,7 @@
       </p:sp>
       <p:graphicFrame>
         <p:nvGraphicFramePr>
-          <p:cNvPr id="25" name="Table 0"/>
+          <p:cNvPr id="29" name="Table 0"/>
           <p:cNvGraphicFramePr>
             <a:graphicFrameLocks noGrp="1"/>
           </p:cNvGraphicFramePr>
@@ -23255,7 +25895,7 @@
                           <a:ea typeface="Segoe UI" pitchFamily="34" charset="-122"/>
                           <a:cs typeface="Segoe UI" pitchFamily="34" charset="-120"/>
                         </a:rPr>
-                        <a:t>Beta tag (@v3-beta); hosted-agent targeting not verified</a:t>
+                        <a:t>Not used by the verified release; custom runner replaces it</a:t>
                       </a:r>
                       <a:endParaRPr lang="en-US" sz="1000" dirty="0">
                         <a:latin typeface="Segoe UI" charset="0"/>
@@ -23323,7 +25963,7 @@
                           <a:ea typeface="Segoe UI" pitchFamily="34" charset="-122"/>
                           <a:cs typeface="Segoe UI" pitchFamily="34" charset="-120"/>
                         </a:rPr>
-                        <a:t>requires-validation</a:t>
+                        <a:t>confirmed</a:t>
                       </a:r>
                       <a:endParaRPr lang="en-US" sz="1000" dirty="0">
                         <a:latin typeface="Segoe UI" charset="0"/>
@@ -23716,7 +26356,7 @@
                 <a:ea typeface="Segoe UI" pitchFamily="34" charset="-122"/>
                 <a:cs typeface="Segoe UI" pitchFamily="34" charset="-120"/>
               </a:rPr>
-              <a:t>24 / 26</a:t>
+              <a:t>28 / 31</a:t>
             </a:r>
             <a:endParaRPr lang="en-US" sz="900" dirty="0"/>
           </a:p>
@@ -23730,9 +26370,9 @@
 </p:sld>
 </file>
 
-<file path=ppt/slides/slide25.xml><?xml version="1.0" encoding="utf-8"?>
+<file path=ppt/slides/slide29.xml><?xml version="1.0" encoding="utf-8"?>
 <p:sld xmlns:a="http://schemas.openxmlformats.org/drawingml/2006/main" xmlns:r="http://schemas.openxmlformats.org/officeDocument/2006/relationships" xmlns:p="http://schemas.openxmlformats.org/presentationml/2006/main">
-  <p:cSld name="Slide 25">
+  <p:cSld name="Slide 29">
     <p:bg>
       <p:bgPr>
         <a:solidFill>
@@ -23846,7 +26486,7 @@
                 <a:ea typeface="Segoe UI" pitchFamily="34" charset="-122"/>
                 <a:cs typeface="Segoe UI" pitchFamily="34" charset="-120"/>
               </a:rPr>
-              <a:t>Appendix H (1 of 2) — Open Questions</a:t>
+              <a:t>Appendix H (1 of 3) — Open Questions</a:t>
             </a:r>
             <a:endParaRPr lang="en-US" sz="2600" dirty="0"/>
           </a:p>
@@ -23926,8 +26566,7 @@
                 <a:ea typeface="Segoe UI" pitchFamily="34" charset="-122"/>
                 <a:cs typeface="Segoe UI" pitchFamily="34" charset="-120"/>
               </a:rPr>
-              <a:t>Scaling: per-session isolation, idle timeout, scale-to-zero documented; SLA, max sessions, RPS, same-session concurrency, cold-start distribution, model quota, and dependency limits are not established.
-</a:t>
+              <a:t>Scaling: per-session isolation, idle timeout, scale-to-zero documented; SLA, max sessions, RPS, same-session concurrency, cold-start distribution, model quota, and dependency limits are not established.</a:t>
             </a:r>
             <a:endParaRPr lang="en-US" sz="1150" dirty="0"/>
           </a:p>
@@ -23965,8 +26604,7 @@
                 <a:ea typeface="Segoe UI" pitchFamily="34" charset="-122"/>
                 <a:cs typeface="Segoe UI" pitchFamily="34" charset="-120"/>
               </a:rPr>
-              <a:t>Cost: drivers are known; actual rates and workload measurements are missing.
-</a:t>
+              <a:t>Cost: drivers are known; actual rates and workload measurements are missing.</a:t>
             </a:r>
             <a:endParaRPr lang="en-US" sz="1150" dirty="0"/>
           </a:p>
@@ -24004,8 +26642,7 @@
                 <a:ea typeface="Segoe UI" pitchFamily="34" charset="-122"/>
                 <a:cs typeface="Segoe UI" pitchFamily="34" charset="-120"/>
               </a:rPr>
-              <a:t>Tools and MCP: custom MCP code needs its own Azure runtime; auth, private reachability, throttling, versioning, and failure handling must be validated in the PoC.
-</a:t>
+              <a:t>Tools and MCP: custom MCP code needs its own Azure runtime; auth, private reachability, throttling, versioning, and failure handling must be validated in the PoC.</a:t>
             </a:r>
             <a:endParaRPr lang="en-US" sz="1150" dirty="0"/>
           </a:p>
@@ -24043,8 +26680,7 @@
                 <a:ea typeface="Segoe UI" pitchFamily="34" charset="-122"/>
                 <a:cs typeface="Segoe UI" pitchFamily="34" charset="-120"/>
               </a:rPr>
-              <a:t>Multi-agent design: a supervisor coordinating specialists inside one hosted deployment is a genuine multi-agent system.
-</a:t>
+              <a:t>Multi-agent design: a supervisor coordinating specialists inside one hosted deployment is a genuine multi-agent system.</a:t>
             </a:r>
             <a:endParaRPr lang="en-US" sz="1150" dirty="0"/>
           </a:p>
@@ -24082,8 +26718,7 @@
                 <a:ea typeface="Segoe UI" pitchFamily="34" charset="-122"/>
                 <a:cs typeface="Segoe UI" pitchFamily="34" charset="-120"/>
               </a:rPr>
-              <a:t>Separate A2A deployments are justified only by independent ownership/release/isolation/scaling needs and remain preview.
-</a:t>
+              <a:t>Separate A2A deployments are justified only by independent ownership/release/isolation/scaling needs and remain preview.</a:t>
             </a:r>
             <a:endParaRPr lang="en-US" sz="1150" dirty="0"/>
           </a:p>
@@ -24181,7 +26816,7 @@
                 <a:ea typeface="Segoe UI" pitchFamily="34" charset="-122"/>
                 <a:cs typeface="Segoe UI" pitchFamily="34" charset="-120"/>
               </a:rPr>
-              <a:t>25 / 26</a:t>
+              <a:t>29 / 31</a:t>
             </a:r>
             <a:endParaRPr lang="en-US" sz="900" dirty="0"/>
           </a:p>
@@ -24195,9 +26830,230 @@
 </p:sld>
 </file>
 
-<file path=ppt/slides/slide26.xml><?xml version="1.0" encoding="utf-8"?>
+<file path=ppt/slides/slide3.xml><?xml version="1.0" encoding="utf-8"?>
 <p:sld xmlns:a="http://schemas.openxmlformats.org/drawingml/2006/main" xmlns:r="http://schemas.openxmlformats.org/officeDocument/2006/relationships" xmlns:p="http://schemas.openxmlformats.org/presentationml/2006/main">
-  <p:cSld name="Slide 26">
+  <p:cSld name="Slide 3">
+    <p:bg>
+      <p:bgPr>
+        <a:solidFill>
+          <a:srgbClr val="FFFFFF"/>
+        </a:solidFill>
+      </p:bgPr>
+    </p:bg>
+    <p:spTree>
+      <p:nvGrpSpPr>
+        <p:cNvPr id="1" name=""/>
+        <p:cNvGrpSpPr/>
+        <p:nvPr/>
+      </p:nvGrpSpPr>
+      <p:grpSpPr>
+        <a:xfrm>
+          <a:off x="0" y="0"/>
+          <a:ext cx="0" cy="0"/>
+          <a:chOff x="0" y="0"/>
+          <a:chExt cx="0" cy="0"/>
+        </a:xfrm>
+      </p:grpSpPr>
+      <p:sp>
+        <p:nvSpPr>
+          <p:cNvPr id="2" name="Text 0"/>
+          <p:cNvSpPr/>
+          <p:nvPr/>
+        </p:nvSpPr>
+        <p:spPr>
+          <a:xfrm>
+            <a:off x="411480" y="146304"/>
+            <a:ext cx="11338560" cy="502920"/>
+          </a:xfrm>
+          <a:prstGeom prst="rect">
+            <a:avLst/>
+          </a:prstGeom>
+          <a:noFill/>
+          <a:ln/>
+        </p:spPr>
+        <p:txBody>
+          <a:bodyPr wrap="square" rtlCol="0" anchor="ctr"/>
+          <a:lstStyle/>
+          <a:p>
+            <a:pPr indent="0" marL="0">
+              <a:buNone/>
+            </a:pPr>
+            <a:r>
+              <a:rPr lang="en-US" sz="2400" b="1" dirty="0">
+                <a:solidFill>
+                  <a:srgbClr val="146C54"/>
+                </a:solidFill>
+                <a:latin typeface="Segoe UI" pitchFamily="34" charset="0"/>
+                <a:ea typeface="Segoe UI" pitchFamily="34" charset="-122"/>
+                <a:cs typeface="Segoe UI" pitchFamily="34" charset="-120"/>
+              </a:rPr>
+              <a:t>Quality Gate: 21 of 21 Judge Checks Passed</a:t>
+            </a:r>
+            <a:endParaRPr lang="en-US" sz="2400" dirty="0"/>
+          </a:p>
+        </p:txBody>
+      </p:sp>
+      <p:pic>
+        <p:nvPicPr>
+          <p:cNvPr id="3" name="Image 0" descr="Quality Gate: 21 of 21 Judge Checks Passed">    </p:cNvPr>
+          <p:cNvPicPr>
+            <a:picLocks noChangeAspect="1"/>
+          </p:cNvPicPr>
+          <p:nvPr/>
+        </p:nvPicPr>
+        <p:blipFill>
+          <a:blip r:embed="rId1"/>
+          <a:stretch>
+            <a:fillRect/>
+          </a:stretch>
+        </p:blipFill>
+        <p:spPr>
+          <a:xfrm>
+            <a:off x="2068830" y="777240"/>
+            <a:ext cx="8051292" cy="5367528"/>
+          </a:xfrm>
+          <a:prstGeom prst="rect">
+            <a:avLst/>
+          </a:prstGeom>
+        </p:spPr>
+      </p:pic>
+      <p:sp>
+        <p:nvSpPr>
+          <p:cNvPr id="4" name="Text 1"/>
+          <p:cNvSpPr/>
+          <p:nvPr/>
+        </p:nvSpPr>
+        <p:spPr>
+          <a:xfrm>
+            <a:off x="411480" y="6245352"/>
+            <a:ext cx="11338560" cy="256032"/>
+          </a:xfrm>
+          <a:prstGeom prst="rect">
+            <a:avLst/>
+          </a:prstGeom>
+          <a:noFill/>
+          <a:ln/>
+        </p:spPr>
+        <p:txBody>
+          <a:bodyPr wrap="square" rtlCol="0" anchor="ctr"/>
+          <a:lstStyle/>
+          <a:p>
+            <a:pPr indent="0" marL="0">
+              <a:buNone/>
+            </a:pPr>
+            <a:r>
+              <a:rPr lang="en-US" sz="1000" dirty="0">
+                <a:solidFill>
+                  <a:srgbClr val="53635E"/>
+                </a:solidFill>
+                <a:latin typeface="Segoe UI" pitchFamily="34" charset="0"/>
+                <a:ea typeface="Segoe UI" pitchFamily="34" charset="-122"/>
+                <a:cs typeface="Segoe UI" pitchFamily="34" charset="-120"/>
+              </a:rPr>
+              <a:t>Artifact rendering, not a portal screenshot. Synthetic fixtures. Sources and SHA-256 hashes retained.</a:t>
+            </a:r>
+            <a:endParaRPr lang="en-US" sz="1000" dirty="0"/>
+          </a:p>
+        </p:txBody>
+      </p:sp>
+      <p:sp>
+        <p:nvSpPr>
+          <p:cNvPr id="5" name="Text 2">
+            <a:hlinkClick r:id="rId2" tooltip=""/>
+          </p:cNvPr>
+          <p:cNvSpPr/>
+          <p:nvPr/>
+        </p:nvSpPr>
+        <p:spPr>
+          <a:xfrm>
+            <a:off x="411480" y="6528816"/>
+            <a:ext cx="10515600" cy="201168"/>
+          </a:xfrm>
+          <a:prstGeom prst="rect">
+            <a:avLst/>
+          </a:prstGeom>
+          <a:noFill/>
+          <a:ln/>
+        </p:spPr>
+        <p:txBody>
+          <a:bodyPr wrap="square" rtlCol="0" anchor="ctr"/>
+          <a:lstStyle/>
+          <a:p>
+            <a:pPr indent="0" marL="0">
+              <a:buNone/>
+            </a:pPr>
+            <a:r>
+              <a:rPr lang="en-US" sz="900" u="sng" dirty="0">
+                <a:solidFill>
+                  <a:srgbClr val="075C9B"/>
+                </a:solidFill>
+                <a:latin typeface="Segoe UI" pitchFamily="34" charset="0"/>
+                <a:ea typeface="Segoe UI" pitchFamily="34" charset="-122"/>
+                <a:cs typeface="Segoe UI" pitchFamily="34" charset="-120"/>
+                <a:hlinkClick r:id="rId2" invalidUrl="" action="" tgtFrame="" tooltip="" history="1" highlightClick="0" endSnd="0">
+                  <a:extLst>
+                    <a:ext uri="{A12FA001-AC4F-418D-AE19-62706E023703}">
+                      <ahyp:hlinkClr xmlns:ahyp="http://schemas.microsoft.com/office/drawing/2018/hyperlinkcolor" val="tx"/>
+                    </a:ext>
+                  </a:extLst>
+                </a:hlinkClick>
+              </a:rPr>
+              <a:t>GitHub Actions 34178081808 | f3da486 | 2026-09-08 UTC</a:t>
+            </a:r>
+            <a:endParaRPr lang="en-US" sz="900" dirty="0"/>
+          </a:p>
+        </p:txBody>
+      </p:sp>
+      <p:sp>
+        <p:nvSpPr>
+          <p:cNvPr id="7" name="Text 3"/>
+          <p:cNvSpPr/>
+          <p:nvPr/>
+        </p:nvSpPr>
+        <p:spPr>
+          <a:xfrm>
+            <a:off x="11430000" y="6528816"/>
+            <a:ext cx="640080" cy="256032"/>
+          </a:xfrm>
+          <a:prstGeom prst="rect">
+            <a:avLst/>
+          </a:prstGeom>
+          <a:noFill/>
+          <a:ln/>
+        </p:spPr>
+        <p:txBody>
+          <a:bodyPr wrap="square" rtlCol="0" anchor="ctr"/>
+          <a:lstStyle/>
+          <a:p>
+            <a:pPr algn="r" indent="0" marL="0">
+              <a:buNone/>
+            </a:pPr>
+            <a:r>
+              <a:rPr lang="en-US" sz="900" dirty="0">
+                <a:solidFill>
+                  <a:srgbClr val="767676"/>
+                </a:solidFill>
+                <a:latin typeface="Segoe UI" pitchFamily="34" charset="0"/>
+                <a:ea typeface="Segoe UI" pitchFamily="34" charset="-122"/>
+                <a:cs typeface="Segoe UI" pitchFamily="34" charset="-120"/>
+              </a:rPr>
+              <a:t>3 / 31</a:t>
+            </a:r>
+            <a:endParaRPr lang="en-US" sz="900" dirty="0"/>
+          </a:p>
+        </p:txBody>
+      </p:sp>
+    </p:spTree>
+  </p:cSld>
+  <p:clrMapOvr>
+    <a:masterClrMapping/>
+  </p:clrMapOvr>
+</p:sld>
+</file>
+
+<file path=ppt/slides/slide30.xml><?xml version="1.0" encoding="utf-8"?>
+<p:sld xmlns:a="http://schemas.openxmlformats.org/drawingml/2006/main" xmlns:r="http://schemas.openxmlformats.org/officeDocument/2006/relationships" xmlns:p="http://schemas.openxmlformats.org/presentationml/2006/main">
+  <p:cSld name="Slide 30">
     <p:bg>
       <p:bgPr>
         <a:solidFill>
@@ -24311,7 +27167,7 @@
                 <a:ea typeface="Segoe UI" pitchFamily="34" charset="-122"/>
                 <a:cs typeface="Segoe UI" pitchFamily="34" charset="-120"/>
               </a:rPr>
-              <a:t>Appendix H (2 of 2) — Open Questions</a:t>
+              <a:t>Appendix H (2 of 3) — Open Questions</a:t>
             </a:r>
             <a:endParaRPr lang="en-US" sz="2600" dirty="0"/>
           </a:p>
@@ -24391,8 +27247,7 @@
                 <a:ea typeface="Segoe UI" pitchFamily="34" charset="-122"/>
                 <a:cs typeface="Segoe UI" pitchFamily="34" charset="-120"/>
               </a:rPr>
-              <a:t>Evaluations: offline/batch scoring confirmed.
-</a:t>
+              <a:t>Evaluations: offline/batch scoring confirmed.</a:t>
             </a:r>
             <a:endParaRPr lang="en-US" sz="1150" dirty="0"/>
           </a:p>
@@ -24430,8 +27285,7 @@
                 <a:ea typeface="Segoe UI" pitchFamily="34" charset="-122"/>
                 <a:cs typeface="Segoe UI" pitchFamily="34" charset="-120"/>
               </a:rPr>
-              <a:t>Continuous evaluation documented but preview.
-</a:t>
+              <a:t>Continuous evaluation documented but preview.</a:t>
             </a:r>
             <a:endParaRPr lang="en-US" sz="1150" dirty="0"/>
           </a:p>
@@ -24469,8 +27323,7 @@
                 <a:ea typeface="Segoe UI" pitchFamily="34" charset="-122"/>
                 <a:cs typeface="Segoe UI" pitchFamily="34" charset="-120"/>
               </a:rPr>
-              <a:t>GitHub Action hosted-agent targeting, portal visibility, and multi-agent trace coverage require validation.
-</a:t>
+              <a:t>Native portal presentation and complete distributed trace coverage need separate confirmation; downloaded artifacts already prove the release gate.</a:t>
             </a:r>
             <a:endParaRPr lang="en-US" sz="1150" dirty="0"/>
           </a:p>
@@ -24508,8 +27361,7 @@
                 <a:ea typeface="Segoe UI" pitchFamily="34" charset="-122"/>
                 <a:cs typeface="Segoe UI" pitchFamily="34" charset="-120"/>
               </a:rPr>
-              <a:t>Automation: recommended flow (staging → smoke/contract/streaming/offline-eval gates → approval → promote → monitor → rollback); infrastructure and agent versions have separate deployment lifecycles.
-</a:t>
+              <a:t>Staging evaluation, approvals, production deployment and monitoring passed. Infrastructure and agent versions have separate lifecycles; recovery remains manual.</a:t>
             </a:r>
             <a:endParaRPr lang="en-US" sz="1150" dirty="0"/>
           </a:p>
@@ -24547,8 +27399,7 @@
                 <a:ea typeface="Segoe UI" pitchFamily="34" charset="-122"/>
                 <a:cs typeface="Segoe UI" pitchFamily="34" charset="-120"/>
               </a:rPr>
-              <a:t>Streaming: Responses SSE supports progressive output events.
-</a:t>
+              <a:t>Streaming: Responses SSE supports progressive output events.</a:t>
             </a:r>
             <a:endParaRPr lang="en-US" sz="1150" dirty="0"/>
           </a:p>
@@ -24586,242 +27437,7 @@
                 <a:ea typeface="Segoe UI" pitchFamily="34" charset="-122"/>
                 <a:cs typeface="Segoe UI" pitchFamily="34" charset="-120"/>
               </a:rPr>
-              <a:t>Parity with all required LangGraph events, reconnection, cancellation, and the existing UI contract must be tested.
-</a:t>
-            </a:r>
-            <a:endParaRPr lang="en-US" sz="1150" dirty="0"/>
-          </a:p>
-          <a:p>
-            <a:pPr marL="228600" indent="-228600">
-              <a:lnSpc>
-                <a:spcPct val="112000"/>
-              </a:lnSpc>
-              <a:buSzPct val="100000"/>
-              <a:buChar char="●"/>
-            </a:pPr>
-            <a:r>
-              <a:rPr lang="en-US" sz="1150" b="1" dirty="0">
-                <a:solidFill>
-                  <a:srgbClr val="107C10"/>
-                </a:solidFill>
-                <a:latin typeface="Segoe UI" pitchFamily="34" charset="0"/>
-                <a:ea typeface="Segoe UI" pitchFamily="34" charset="-122"/>
-                <a:cs typeface="Segoe UI" pitchFamily="34" charset="-120"/>
-              </a:rPr>
-              <a:t>CONFIRMED  </a:t>
-            </a:r>
-            <a:pPr indent="0" marL="0">
-              <a:lnSpc>
-                <a:spcPct val="112000"/>
-              </a:lnSpc>
-              <a:buNone/>
-            </a:pPr>
-            <a:r>
-              <a:rPr lang="en-US" sz="1250" dirty="0">
-                <a:solidFill>
-                  <a:srgbClr val="1A1A1A"/>
-                </a:solidFill>
-                <a:latin typeface="Segoe UI" pitchFamily="34" charset="0"/>
-                <a:ea typeface="Segoe UI" pitchFamily="34" charset="-122"/>
-                <a:cs typeface="Segoe UI" pitchFamily="34" charset="-120"/>
-              </a:rPr>
-              <a:t>Conversation state: Responses history is the baseline source of truth; adopt Cosmos checkpointer only for a documented durable-state requirement.
-</a:t>
-            </a:r>
-            <a:endParaRPr lang="en-US" sz="1150" dirty="0"/>
-          </a:p>
-          <a:p>
-            <a:pPr marL="228600" indent="-228600">
-              <a:lnSpc>
-                <a:spcPct val="112000"/>
-              </a:lnSpc>
-              <a:buSzPct val="100000"/>
-              <a:buChar char="●"/>
-            </a:pPr>
-            <a:r>
-              <a:rPr lang="en-US" sz="1150" b="1" dirty="0">
-                <a:solidFill>
-                  <a:srgbClr val="D13438"/>
-                </a:solidFill>
-                <a:latin typeface="Segoe UI" pitchFamily="34" charset="0"/>
-                <a:ea typeface="Segoe UI" pitchFamily="34" charset="-122"/>
-                <a:cs typeface="Segoe UI" pitchFamily="34" charset="-120"/>
-              </a:rPr>
-              <a:t>REQUIRES VALIDATION  </a:t>
-            </a:r>
-            <a:pPr indent="0" marL="0">
-              <a:lnSpc>
-                <a:spcPct val="112000"/>
-              </a:lnSpc>
-              <a:buNone/>
-            </a:pPr>
-            <a:r>
-              <a:rPr lang="en-US" sz="1250" dirty="0">
-                <a:solidFill>
-                  <a:srgbClr val="1A1A1A"/>
-                </a:solidFill>
-                <a:latin typeface="Segoe UI" pitchFamily="34" charset="0"/>
-                <a:ea typeface="Segoe UI" pitchFamily="34" charset="-122"/>
-                <a:cs typeface="Segoe UI" pitchFamily="34" charset="-120"/>
-              </a:rPr>
-              <a:t>No user-scoped conversation-list API was found — an evidence gap.
-</a:t>
-            </a:r>
-            <a:endParaRPr lang="en-US" sz="1150" dirty="0"/>
-          </a:p>
-          <a:p>
-            <a:pPr marL="228600" indent="-228600">
-              <a:lnSpc>
-                <a:spcPct val="112000"/>
-              </a:lnSpc>
-              <a:buSzPct val="100000"/>
-              <a:buChar char="●"/>
-            </a:pPr>
-            <a:r>
-              <a:rPr lang="en-US" sz="1150" b="1" dirty="0">
-                <a:solidFill>
-                  <a:srgbClr val="107C10"/>
-                </a:solidFill>
-                <a:latin typeface="Segoe UI" pitchFamily="34" charset="0"/>
-                <a:ea typeface="Segoe UI" pitchFamily="34" charset="-122"/>
-                <a:cs typeface="Segoe UI" pitchFamily="34" charset="-120"/>
-              </a:rPr>
-              <a:t>CONFIRMED  </a:t>
-            </a:r>
-            <a:pPr indent="0" marL="0">
-              <a:lnSpc>
-                <a:spcPct val="112000"/>
-              </a:lnSpc>
-              <a:buNone/>
-            </a:pPr>
-            <a:r>
-              <a:rPr lang="en-US" sz="1250" dirty="0">
-                <a:solidFill>
-                  <a:srgbClr val="1A1A1A"/>
-                </a:solidFill>
-                <a:latin typeface="Segoe UI" pitchFamily="34" charset="0"/>
-                <a:ea typeface="Segoe UI" pitchFamily="34" charset="-122"/>
-                <a:cs typeface="Segoe UI" pitchFamily="34" charset="-120"/>
-              </a:rPr>
-              <a:t>Governance: per-agent Entra identity, Foundry RBAC, and Application Insights are supported baseline controls.
-</a:t>
-            </a:r>
-            <a:endParaRPr lang="en-US" sz="1150" dirty="0"/>
-          </a:p>
-          <a:p>
-            <a:pPr marL="228600" indent="-228600">
-              <a:lnSpc>
-                <a:spcPct val="112000"/>
-              </a:lnSpc>
-              <a:buSzPct val="100000"/>
-              <a:buChar char="●"/>
-            </a:pPr>
-            <a:r>
-              <a:rPr lang="en-US" sz="1150" b="1" dirty="0">
-                <a:solidFill>
-                  <a:srgbClr val="5C2D91"/>
-                </a:solidFill>
-                <a:latin typeface="Segoe UI" pitchFamily="34" charset="0"/>
-                <a:ea typeface="Segoe UI" pitchFamily="34" charset="-122"/>
-                <a:cs typeface="Segoe UI" pitchFamily="34" charset="-120"/>
-              </a:rPr>
-              <a:t>INFERRED  </a:t>
-            </a:r>
-            <a:pPr indent="0" marL="0">
-              <a:lnSpc>
-                <a:spcPct val="112000"/>
-              </a:lnSpc>
-              <a:buNone/>
-            </a:pPr>
-            <a:r>
-              <a:rPr lang="en-US" sz="1250" dirty="0">
-                <a:solidFill>
-                  <a:srgbClr val="1A1A1A"/>
-                </a:solidFill>
-                <a:latin typeface="Segoe UI" pitchFamily="34" charset="0"/>
-                <a:ea typeface="Segoe UI" pitchFamily="34" charset="-122"/>
-                <a:cs typeface="Segoe UI" pitchFamily="34" charset="-120"/>
-              </a:rPr>
-              <a:t>Agent 365 is a validation track because the exact Hosted Agent identity onboarding and LangGraph instrumentation path was not found.
-</a:t>
-            </a:r>
-            <a:endParaRPr lang="en-US" sz="1150" dirty="0"/>
-          </a:p>
-          <a:p>
-            <a:pPr marL="228600" indent="-228600">
-              <a:lnSpc>
-                <a:spcPct val="112000"/>
-              </a:lnSpc>
-              <a:buSzPct val="100000"/>
-              <a:buChar char="●"/>
-            </a:pPr>
-            <a:r>
-              <a:rPr lang="en-US" sz="1150" b="1" dirty="0">
-                <a:solidFill>
-                  <a:srgbClr val="107C10"/>
-                </a:solidFill>
-                <a:latin typeface="Segoe UI" pitchFamily="34" charset="0"/>
-                <a:ea typeface="Segoe UI" pitchFamily="34" charset="-122"/>
-                <a:cs typeface="Segoe UI" pitchFamily="34" charset="-120"/>
-              </a:rPr>
-              <a:t>CONFIRMED  </a:t>
-            </a:r>
-            <a:pPr indent="0" marL="0">
-              <a:lnSpc>
-                <a:spcPct val="112000"/>
-              </a:lnSpc>
-              <a:buNone/>
-            </a:pPr>
-            <a:r>
-              <a:rPr lang="en-US" sz="1250" dirty="0">
-                <a:solidFill>
-                  <a:srgbClr val="1A1A1A"/>
-                </a:solidFill>
-                <a:latin typeface="Segoe UI" pitchFamily="34" charset="0"/>
-                <a:ea typeface="Segoe UI" pitchFamily="34" charset="-122"/>
-                <a:cs typeface="Segoe UI" pitchFamily="34" charset="-120"/>
-              </a:rPr>
-              <a:t>Reusability: reuse comes from versioned Bicep modules, azure.yaml, a standard hosted-agent wrapper, independently owned MCP contracts, common evaluation datasets, and reusable GitHub workflows.
-</a:t>
-            </a:r>
-            <a:endParaRPr lang="en-US" sz="1150" dirty="0"/>
-          </a:p>
-          <a:p>
-            <a:pPr marL="228600" indent="-228600">
-              <a:lnSpc>
-                <a:spcPct val="112000"/>
-              </a:lnSpc>
-              <a:buSzPct val="100000"/>
-              <a:buChar char="●"/>
-            </a:pPr>
-            <a:r>
-              <a:rPr lang="en-US" sz="1150" b="1" dirty="0">
-                <a:solidFill>
-                  <a:srgbClr val="D13438"/>
-                </a:solidFill>
-                <a:latin typeface="Segoe UI" pitchFamily="34" charset="0"/>
-                <a:ea typeface="Segoe UI" pitchFamily="34" charset="-122"/>
-                <a:cs typeface="Segoe UI" pitchFamily="34" charset="-120"/>
-              </a:rPr>
-              <a:t>REQUIRES VALIDATION  </a:t>
-            </a:r>
-            <a:pPr indent="0" marL="0">
-              <a:lnSpc>
-                <a:spcPct val="112000"/>
-              </a:lnSpc>
-              <a:buNone/>
-            </a:pPr>
-            <a:r>
-              <a:rPr lang="en-US" sz="1250" dirty="0">
-                <a:solidFill>
-                  <a:srgbClr val="1A1A1A"/>
-                </a:solidFill>
-                <a:latin typeface="Segoe UI" pitchFamily="34" charset="0"/>
-                <a:ea typeface="Segoe UI" pitchFamily="34" charset="-122"/>
-                <a:cs typeface="Segoe UI" pitchFamily="34" charset="-120"/>
-              </a:rPr>
-              <a:t>Owners and decision date for the PoC plan: not specified anywhere in the research document — open item for the presenting team.
-</a:t>
+              <a:t>Parity with all required LangGraph events, reconnection, cancellation, and the existing UI contract must be tested.</a:t>
             </a:r>
             <a:endParaRPr lang="en-US" sz="1150" dirty="0"/>
           </a:p>
@@ -24919,7 +27535,7 @@
                 <a:ea typeface="Segoe UI" pitchFamily="34" charset="-122"/>
                 <a:cs typeface="Segoe UI" pitchFamily="34" charset="-120"/>
               </a:rPr>
-              <a:t>26 / 26</a:t>
+              <a:t>30 / 31</a:t>
             </a:r>
             <a:endParaRPr lang="en-US" sz="900" dirty="0"/>
           </a:p>
@@ -24933,9 +27549,9 @@
 </p:sld>
 </file>
 
-<file path=ppt/slides/slide3.xml><?xml version="1.0" encoding="utf-8"?>
+<file path=ppt/slides/slide31.xml><?xml version="1.0" encoding="utf-8"?>
 <p:sld xmlns:a="http://schemas.openxmlformats.org/drawingml/2006/main" xmlns:r="http://schemas.openxmlformats.org/officeDocument/2006/relationships" xmlns:p="http://schemas.openxmlformats.org/presentationml/2006/main">
-  <p:cSld name="Slide 3">
+  <p:cSld name="Slide 31">
     <p:bg>
       <p:bgPr>
         <a:solidFill>
@@ -24972,7 +27588,7 @@
             <a:avLst/>
           </a:prstGeom>
           <a:solidFill>
-            <a:srgbClr val="0078D4"/>
+            <a:srgbClr val="5C2D91"/>
           </a:solidFill>
           <a:ln/>
         </p:spPr>
@@ -25004,13 +27620,13 @@
             <a:r>
               <a:rPr lang="en-US" sz="1100" b="1" spc="100" kern="0" dirty="0">
                 <a:solidFill>
-                  <a:srgbClr val="0078D4"/>
-                </a:solidFill>
-                <a:latin typeface="Segoe UI" pitchFamily="34" charset="0"/>
-                <a:ea typeface="Segoe UI" pitchFamily="34" charset="-122"/>
-                <a:cs typeface="Segoe UI" pitchFamily="34" charset="-120"/>
-              </a:rPr>
-              <a:t>CORE SLIDE 2 OF 12</a:t>
+                  <a:srgbClr val="5C2D91"/>
+                </a:solidFill>
+                <a:latin typeface="Segoe UI" pitchFamily="34" charset="0"/>
+                <a:ea typeface="Segoe UI" pitchFamily="34" charset="-122"/>
+                <a:cs typeface="Segoe UI" pitchFamily="34" charset="-120"/>
+              </a:rPr>
+              <a:t>APPENDIX</a:t>
             </a:r>
             <a:endParaRPr lang="en-US" sz="1100" dirty="0"/>
           </a:p>
@@ -25049,7 +27665,7 @@
                 <a:ea typeface="Segoe UI" pitchFamily="34" charset="-122"/>
                 <a:cs typeface="Segoe UI" pitchFamily="34" charset="-120"/>
               </a:rPr>
-              <a:t>Air Canada's Requirements</a:t>
+              <a:t>Appendix H (3 of 3) — Open Questions</a:t>
             </a:r>
             <a:endParaRPr lang="en-US" sz="2600" dirty="0"/>
           </a:p>
@@ -25057,52 +27673,13 @@
       </p:sp>
       <p:sp>
         <p:nvSpPr>
-          <p:cNvPr id="5" name="Text 3"/>
+          <p:cNvPr id="5" name="Shape 3"/>
           <p:cNvSpPr/>
           <p:nvPr/>
         </p:nvSpPr>
         <p:spPr>
           <a:xfrm>
-            <a:off x="457200" y="1078992"/>
-            <a:ext cx="11247120" cy="365760"/>
-          </a:xfrm>
-          <a:prstGeom prst="rect">
-            <a:avLst/>
-          </a:prstGeom>
-          <a:noFill/>
-          <a:ln/>
-        </p:spPr>
-        <p:txBody>
-          <a:bodyPr wrap="square" rtlCol="0" anchor="ctr"/>
-          <a:lstStyle/>
-          <a:p>
-            <a:pPr indent="0" marL="0">
-              <a:buNone/>
-            </a:pPr>
-            <a:r>
-              <a:rPr lang="en-US" sz="1300" i="1" dirty="0">
-                <a:solidFill>
-                  <a:srgbClr val="484848"/>
-                </a:solidFill>
-                <a:latin typeface="Segoe UI" pitchFamily="34" charset="0"/>
-                <a:ea typeface="Segoe UI" pitchFamily="34" charset="-122"/>
-                <a:cs typeface="Segoe UI" pitchFamily="34" charset="-120"/>
-              </a:rPr>
-              <a:t>Show the ten enterprise capabilities the PoC must prove.</a:t>
-            </a:r>
-            <a:endParaRPr lang="en-US" sz="1300" dirty="0"/>
-          </a:p>
-        </p:txBody>
-      </p:sp>
-      <p:sp>
-        <p:nvSpPr>
-          <p:cNvPr id="6" name="Shape 4"/>
-          <p:cNvSpPr/>
-          <p:nvPr/>
-        </p:nvSpPr>
-        <p:spPr>
-          <a:xfrm>
-            <a:off x="457200" y="1481328"/>
+            <a:off x="457200" y="1188720"/>
             <a:ext cx="11247120" cy="10973"/>
           </a:xfrm>
           <a:prstGeom prst="rect">
@@ -25116,14 +27693,14 @@
       </p:sp>
       <p:sp>
         <p:nvSpPr>
-          <p:cNvPr id="7" name="Text 5"/>
+          <p:cNvPr id="6" name="Text 4"/>
           <p:cNvSpPr/>
           <p:nvPr/>
         </p:nvSpPr>
         <p:spPr>
           <a:xfrm>
-            <a:off x="502920" y="1691640"/>
-            <a:ext cx="11155680" cy="4709160"/>
+            <a:off x="502920" y="1554480"/>
+            <a:ext cx="11155680" cy="4846320"/>
           </a:xfrm>
           <a:prstGeom prst="rect">
             <a:avLst/>
@@ -25143,7 +27720,7 @@
               <a:buChar char="●"/>
             </a:pPr>
             <a:r>
-              <a:rPr lang="en-US" sz="1000" b="1" dirty="0">
+              <a:rPr lang="en-US" sz="1150" b="1" dirty="0">
                 <a:solidFill>
                   <a:srgbClr val="107C10"/>
                 </a:solidFill>
@@ -25160,7 +27737,7 @@
               <a:buNone/>
             </a:pPr>
             <a:r>
-              <a:rPr lang="en-US" sz="1200" dirty="0">
+              <a:rPr lang="en-US" sz="1250" dirty="0">
                 <a:solidFill>
                   <a:srgbClr val="1A1A1A"/>
                 </a:solidFill>
@@ -25168,10 +27745,9 @@
                 <a:ea typeface="Segoe UI" pitchFamily="34" charset="-122"/>
                 <a:cs typeface="Segoe UI" pitchFamily="34" charset="-120"/>
               </a:rPr>
-              <a:t>Ten capabilities to prove: scaling, MCP tools, multi-agent behavior, evaluations, CI/CD, streaming, state, governance, cost, and production readiness.
-</a:t>
-            </a:r>
-            <a:endParaRPr lang="en-US" sz="1000" dirty="0"/>
+              <a:t>Conversation state: Responses history is the baseline source of truth; adopt Cosmos checkpointer only for a documented durable-state requirement.</a:t>
+            </a:r>
+            <a:endParaRPr lang="en-US" sz="1150" dirty="0"/>
           </a:p>
           <a:p>
             <a:pPr marL="228600" indent="-228600">
@@ -25182,15 +27758,15 @@
               <a:buChar char="●"/>
             </a:pPr>
             <a:r>
-              <a:rPr lang="en-US" sz="1000" b="1" dirty="0">
-                <a:solidFill>
-                  <a:srgbClr val="107C10"/>
-                </a:solidFill>
-                <a:latin typeface="Segoe UI" pitchFamily="34" charset="0"/>
-                <a:ea typeface="Segoe UI" pitchFamily="34" charset="-122"/>
-                <a:cs typeface="Segoe UI" pitchFamily="34" charset="-120"/>
-              </a:rPr>
-              <a:t>CONFIRMED  </a:t>
+              <a:rPr lang="en-US" sz="1150" b="1" dirty="0">
+                <a:solidFill>
+                  <a:srgbClr val="D13438"/>
+                </a:solidFill>
+                <a:latin typeface="Segoe UI" pitchFamily="34" charset="0"/>
+                <a:ea typeface="Segoe UI" pitchFamily="34" charset="-122"/>
+                <a:cs typeface="Segoe UI" pitchFamily="34" charset="-120"/>
+              </a:rPr>
+              <a:t>REQUIRES VALIDATION  </a:t>
             </a:r>
             <a:pPr indent="0" marL="0">
               <a:lnSpc>
@@ -25199,7 +27775,7 @@
               <a:buNone/>
             </a:pPr>
             <a:r>
-              <a:rPr lang="en-US" sz="1200" dirty="0">
+              <a:rPr lang="en-US" sz="1250" dirty="0">
                 <a:solidFill>
                   <a:srgbClr val="1A1A1A"/>
                 </a:solidFill>
@@ -25207,16 +27783,167 @@
                 <a:ea typeface="Segoe UI" pitchFamily="34" charset="-122"/>
                 <a:cs typeface="Segoe UI" pitchFamily="34" charset="-120"/>
               </a:rPr>
-              <a:t>These map 1:1 to the Production Decision Gates categories used later in the deck.
-</a:t>
-            </a:r>
-            <a:endParaRPr lang="en-US" sz="1000" dirty="0"/>
+              <a:t>No user-scoped conversation-list API was found — an evidence gap.</a:t>
+            </a:r>
+            <a:endParaRPr lang="en-US" sz="1150" dirty="0"/>
+          </a:p>
+          <a:p>
+            <a:pPr marL="228600" indent="-228600">
+              <a:lnSpc>
+                <a:spcPct val="112000"/>
+              </a:lnSpc>
+              <a:buSzPct val="100000"/>
+              <a:buChar char="●"/>
+            </a:pPr>
+            <a:r>
+              <a:rPr lang="en-US" sz="1150" b="1" dirty="0">
+                <a:solidFill>
+                  <a:srgbClr val="107C10"/>
+                </a:solidFill>
+                <a:latin typeface="Segoe UI" pitchFamily="34" charset="0"/>
+                <a:ea typeface="Segoe UI" pitchFamily="34" charset="-122"/>
+                <a:cs typeface="Segoe UI" pitchFamily="34" charset="-120"/>
+              </a:rPr>
+              <a:t>CONFIRMED  </a:t>
+            </a:r>
+            <a:pPr indent="0" marL="0">
+              <a:lnSpc>
+                <a:spcPct val="112000"/>
+              </a:lnSpc>
+              <a:buNone/>
+            </a:pPr>
+            <a:r>
+              <a:rPr lang="en-US" sz="1250" dirty="0">
+                <a:solidFill>
+                  <a:srgbClr val="1A1A1A"/>
+                </a:solidFill>
+                <a:latin typeface="Segoe UI" pitchFamily="34" charset="0"/>
+                <a:ea typeface="Segoe UI" pitchFamily="34" charset="-122"/>
+                <a:cs typeface="Segoe UI" pitchFamily="34" charset="-120"/>
+              </a:rPr>
+              <a:t>Governance: per-agent Entra identity, Foundry RBAC, and Application Insights are supported baseline controls.</a:t>
+            </a:r>
+            <a:endParaRPr lang="en-US" sz="1150" dirty="0"/>
+          </a:p>
+          <a:p>
+            <a:pPr marL="228600" indent="-228600">
+              <a:lnSpc>
+                <a:spcPct val="112000"/>
+              </a:lnSpc>
+              <a:buSzPct val="100000"/>
+              <a:buChar char="●"/>
+            </a:pPr>
+            <a:r>
+              <a:rPr lang="en-US" sz="1150" b="1" dirty="0">
+                <a:solidFill>
+                  <a:srgbClr val="5C2D91"/>
+                </a:solidFill>
+                <a:latin typeface="Segoe UI" pitchFamily="34" charset="0"/>
+                <a:ea typeface="Segoe UI" pitchFamily="34" charset="-122"/>
+                <a:cs typeface="Segoe UI" pitchFamily="34" charset="-120"/>
+              </a:rPr>
+              <a:t>INFERRED  </a:t>
+            </a:r>
+            <a:pPr indent="0" marL="0">
+              <a:lnSpc>
+                <a:spcPct val="112000"/>
+              </a:lnSpc>
+              <a:buNone/>
+            </a:pPr>
+            <a:r>
+              <a:rPr lang="en-US" sz="1250" dirty="0">
+                <a:solidFill>
+                  <a:srgbClr val="1A1A1A"/>
+                </a:solidFill>
+                <a:latin typeface="Segoe UI" pitchFamily="34" charset="0"/>
+                <a:ea typeface="Segoe UI" pitchFamily="34" charset="-122"/>
+                <a:cs typeface="Segoe UI" pitchFamily="34" charset="-120"/>
+              </a:rPr>
+              <a:t>Agent 365 is a validation track because the exact Hosted Agent identity onboarding and LangGraph instrumentation path was not found.</a:t>
+            </a:r>
+            <a:endParaRPr lang="en-US" sz="1150" dirty="0"/>
+          </a:p>
+          <a:p>
+            <a:pPr marL="228600" indent="-228600">
+              <a:lnSpc>
+                <a:spcPct val="112000"/>
+              </a:lnSpc>
+              <a:buSzPct val="100000"/>
+              <a:buChar char="●"/>
+            </a:pPr>
+            <a:r>
+              <a:rPr lang="en-US" sz="1150" b="1" dirty="0">
+                <a:solidFill>
+                  <a:srgbClr val="107C10"/>
+                </a:solidFill>
+                <a:latin typeface="Segoe UI" pitchFamily="34" charset="0"/>
+                <a:ea typeface="Segoe UI" pitchFamily="34" charset="-122"/>
+                <a:cs typeface="Segoe UI" pitchFamily="34" charset="-120"/>
+              </a:rPr>
+              <a:t>CONFIRMED  </a:t>
+            </a:r>
+            <a:pPr indent="0" marL="0">
+              <a:lnSpc>
+                <a:spcPct val="112000"/>
+              </a:lnSpc>
+              <a:buNone/>
+            </a:pPr>
+            <a:r>
+              <a:rPr lang="en-US" sz="1250" dirty="0">
+                <a:solidFill>
+                  <a:srgbClr val="1A1A1A"/>
+                </a:solidFill>
+                <a:latin typeface="Segoe UI" pitchFamily="34" charset="0"/>
+                <a:ea typeface="Segoe UI" pitchFamily="34" charset="-122"/>
+                <a:cs typeface="Segoe UI" pitchFamily="34" charset="-120"/>
+              </a:rPr>
+              <a:t>Reusability: reuse comes from versioned Bicep modules, azure.yaml, a standard hosted-agent wrapper, independently owned MCP contracts, common evaluation datasets, and reusable GitHub workflows.</a:t>
+            </a:r>
+            <a:endParaRPr lang="en-US" sz="1150" dirty="0"/>
+          </a:p>
+          <a:p>
+            <a:pPr marL="228600" indent="-228600">
+              <a:lnSpc>
+                <a:spcPct val="112000"/>
+              </a:lnSpc>
+              <a:buSzPct val="100000"/>
+              <a:buChar char="●"/>
+            </a:pPr>
+            <a:r>
+              <a:rPr lang="en-US" sz="1150" b="1" dirty="0">
+                <a:solidFill>
+                  <a:srgbClr val="D13438"/>
+                </a:solidFill>
+                <a:latin typeface="Segoe UI" pitchFamily="34" charset="0"/>
+                <a:ea typeface="Segoe UI" pitchFamily="34" charset="-122"/>
+                <a:cs typeface="Segoe UI" pitchFamily="34" charset="-120"/>
+              </a:rPr>
+              <a:t>REQUIRES VALIDATION  </a:t>
+            </a:r>
+            <a:pPr indent="0" marL="0">
+              <a:lnSpc>
+                <a:spcPct val="112000"/>
+              </a:lnSpc>
+              <a:buNone/>
+            </a:pPr>
+            <a:r>
+              <a:rPr lang="en-US" sz="1250" dirty="0">
+                <a:solidFill>
+                  <a:srgbClr val="1A1A1A"/>
+                </a:solidFill>
+                <a:latin typeface="Segoe UI" pitchFamily="34" charset="0"/>
+                <a:ea typeface="Segoe UI" pitchFamily="34" charset="-122"/>
+                <a:cs typeface="Segoe UI" pitchFamily="34" charset="-120"/>
+              </a:rPr>
+              <a:t>Owners and decision date for the PoC plan: not specified anywhere in the research document — open item for the presenting team.</a:t>
+            </a:r>
+            <a:endParaRPr lang="en-US" sz="1150" dirty="0"/>
           </a:p>
         </p:txBody>
       </p:sp>
       <p:sp>
         <p:nvSpPr>
-          <p:cNvPr id="9" name="Shape 6"/>
+          <p:cNvPr id="8" name="Shape 5"/>
           <p:cNvSpPr/>
           <p:nvPr/>
         </p:nvSpPr>
@@ -25236,7 +27963,7 @@
       </p:sp>
       <p:sp>
         <p:nvSpPr>
-          <p:cNvPr id="10" name="Text 7"/>
+          <p:cNvPr id="9" name="Text 6"/>
           <p:cNvSpPr/>
           <p:nvPr/>
         </p:nvSpPr>
@@ -25267,7 +27994,7 @@
                 <a:ea typeface="Segoe UI" pitchFamily="34" charset="-122"/>
                 <a:cs typeface="Segoe UI" pitchFamily="34" charset="-120"/>
               </a:rPr>
-              <a:t>Air Canada — Foundry Hosted Agents Decision</a:t>
+              <a:t>Air Canada — Foundry Hosted Agents Decision · Appendix</a:t>
             </a:r>
             <a:endParaRPr lang="en-US" sz="900" dirty="0"/>
           </a:p>
@@ -25275,7 +28002,7 @@
       </p:sp>
       <p:sp>
         <p:nvSpPr>
-          <p:cNvPr id="11" name="Text 8"/>
+          <p:cNvPr id="10" name="Text 7"/>
           <p:cNvSpPr/>
           <p:nvPr/>
         </p:nvSpPr>
@@ -25306,7 +28033,7 @@
                 <a:ea typeface="Segoe UI" pitchFamily="34" charset="-122"/>
                 <a:cs typeface="Segoe UI" pitchFamily="34" charset="-120"/>
               </a:rPr>
-              <a:t>3 / 26</a:t>
+              <a:t>31 / 31</a:t>
             </a:r>
             <a:endParaRPr lang="en-US" sz="900" dirty="0"/>
           </a:p>
@@ -25326,7 +28053,7 @@
     <p:bg>
       <p:bgPr>
         <a:solidFill>
-          <a:srgbClr val="FAFBFC"/>
+          <a:srgbClr val="FFFFFF"/>
         </a:solidFill>
       </p:bgPr>
     </p:bg>
@@ -25346,34 +28073,14 @@
       </p:grpSpPr>
       <p:sp>
         <p:nvSpPr>
-          <p:cNvPr id="2" name="Shape 0"/>
+          <p:cNvPr id="2" name="Text 0"/>
           <p:cNvSpPr/>
           <p:nvPr/>
         </p:nvSpPr>
         <p:spPr>
           <a:xfrm>
-            <a:off x="0" y="0"/>
-            <a:ext cx="12188952" cy="82296"/>
-          </a:xfrm>
-          <a:prstGeom prst="rect">
-            <a:avLst/>
-          </a:prstGeom>
-          <a:solidFill>
-            <a:srgbClr val="0078D4"/>
-          </a:solidFill>
-          <a:ln/>
-        </p:spPr>
-      </p:sp>
-      <p:sp>
-        <p:nvSpPr>
-          <p:cNvPr id="3" name="Text 1"/>
-          <p:cNvSpPr/>
-          <p:nvPr/>
-        </p:nvSpPr>
-        <p:spPr>
-          <a:xfrm>
-            <a:off x="457200" y="292608"/>
-            <a:ext cx="11247120" cy="274320"/>
+            <a:off x="411480" y="146304"/>
+            <a:ext cx="11338560" cy="502920"/>
           </a:xfrm>
           <a:prstGeom prst="rect">
             <a:avLst/>
@@ -25389,30 +28096,54 @@
               <a:buNone/>
             </a:pPr>
             <a:r>
-              <a:rPr lang="en-US" sz="1100" b="1" spc="100" kern="0" dirty="0">
-                <a:solidFill>
-                  <a:srgbClr val="0078D4"/>
-                </a:solidFill>
-                <a:latin typeface="Segoe UI" pitchFamily="34" charset="0"/>
-                <a:ea typeface="Segoe UI" pitchFamily="34" charset="-122"/>
-                <a:cs typeface="Segoe UI" pitchFamily="34" charset="-120"/>
-              </a:rPr>
-              <a:t>CORE SLIDE 3 OF 12</a:t>
-            </a:r>
-            <a:endParaRPr lang="en-US" sz="1100" dirty="0"/>
+              <a:rPr lang="en-US" sz="2400" b="1" dirty="0">
+                <a:solidFill>
+                  <a:srgbClr val="146C54"/>
+                </a:solidFill>
+                <a:latin typeface="Segoe UI" pitchFamily="34" charset="0"/>
+                <a:ea typeface="Segoe UI" pitchFamily="34" charset="-122"/>
+                <a:cs typeface="Segoe UI" pitchFamily="34" charset="-120"/>
+              </a:rPr>
+              <a:t>Tool Execution Proven; Telemetry Is Synthetic</a:t>
+            </a:r>
+            <a:endParaRPr lang="en-US" sz="2400" dirty="0"/>
           </a:p>
         </p:txBody>
       </p:sp>
-      <p:sp>
-        <p:nvSpPr>
-          <p:cNvPr id="4" name="Text 2"/>
+      <p:pic>
+        <p:nvPicPr>
+          <p:cNvPr id="3" name="Image 0" descr="Tool Execution Proven; Telemetry Is Synthetic">    </p:cNvPr>
+          <p:cNvPicPr>
+            <a:picLocks noChangeAspect="1"/>
+          </p:cNvPicPr>
+          <p:nvPr/>
+        </p:nvPicPr>
+        <p:blipFill>
+          <a:blip r:embed="rId1"/>
+          <a:stretch>
+            <a:fillRect/>
+          </a:stretch>
+        </p:blipFill>
+        <p:spPr>
+          <a:xfrm>
+            <a:off x="2068830" y="777240"/>
+            <a:ext cx="8051292" cy="5367528"/>
+          </a:xfrm>
+          <a:prstGeom prst="rect">
+            <a:avLst/>
+          </a:prstGeom>
+        </p:spPr>
+      </p:pic>
+      <p:sp>
+        <p:nvSpPr>
+          <p:cNvPr id="4" name="Text 1"/>
           <p:cNvSpPr/>
           <p:nvPr/>
         </p:nvSpPr>
         <p:spPr>
           <a:xfrm>
-            <a:off x="457200" y="548640"/>
-            <a:ext cx="11247120" cy="548640"/>
+            <a:off x="411480" y="6245352"/>
+            <a:ext cx="11338560" cy="256032"/>
           </a:xfrm>
           <a:prstGeom prst="rect">
             <a:avLst/>
@@ -25428,30 +28159,32 @@
               <a:buNone/>
             </a:pPr>
             <a:r>
-              <a:rPr lang="en-US" sz="2600" b="1" dirty="0">
-                <a:solidFill>
-                  <a:srgbClr val="001B3D"/>
-                </a:solidFill>
-                <a:latin typeface="Segoe UI" pitchFamily="34" charset="0"/>
-                <a:ea typeface="Segoe UI" pitchFamily="34" charset="-122"/>
-                <a:cs typeface="Segoe UI" pitchFamily="34" charset="-120"/>
-              </a:rPr>
-              <a:t>Product Landscape — Five Operating Models</a:t>
-            </a:r>
-            <a:endParaRPr lang="en-US" sz="2600" dirty="0"/>
+              <a:rPr lang="en-US" sz="1000" dirty="0">
+                <a:solidFill>
+                  <a:srgbClr val="53635E"/>
+                </a:solidFill>
+                <a:latin typeface="Segoe UI" pitchFamily="34" charset="0"/>
+                <a:ea typeface="Segoe UI" pitchFamily="34" charset="-122"/>
+                <a:cs typeface="Segoe UI" pitchFamily="34" charset="-120"/>
+              </a:rPr>
+              <a:t>Artifact rendering, not a portal screenshot. Synthetic fixtures. Sources and SHA-256 hashes retained.</a:t>
+            </a:r>
+            <a:endParaRPr lang="en-US" sz="1000" dirty="0"/>
           </a:p>
         </p:txBody>
       </p:sp>
       <p:sp>
         <p:nvSpPr>
-          <p:cNvPr id="5" name="Text 3"/>
+          <p:cNvPr id="5" name="Text 2">
+            <a:hlinkClick r:id="rId2" tooltip=""/>
+          </p:cNvPr>
           <p:cNvSpPr/>
           <p:nvPr/>
         </p:nvSpPr>
         <p:spPr>
           <a:xfrm>
-            <a:off x="457200" y="1078992"/>
-            <a:ext cx="11247120" cy="365760"/>
+            <a:off x="411480" y="6528816"/>
+            <a:ext cx="10515600" cy="201168"/>
           </a:xfrm>
           <a:prstGeom prst="rect">
             <a:avLst/>
@@ -25467,389 +28200,22 @@
               <a:buNone/>
             </a:pPr>
             <a:r>
-              <a:rPr lang="en-US" sz="1300" i="1" dirty="0">
-                <a:solidFill>
-                  <a:srgbClr val="484848"/>
-                </a:solidFill>
-                <a:latin typeface="Segoe UI" pitchFamily="34" charset="0"/>
-                <a:ea typeface="Segoe UI" pitchFamily="34" charset="-122"/>
-                <a:cs typeface="Segoe UI" pitchFamily="34" charset="-120"/>
-              </a:rPr>
-              <a:t>Separate five materially different operating models without conflating open-source LangGraph and paid LangSmith topologies.</a:t>
-            </a:r>
-            <a:endParaRPr lang="en-US" sz="1300" dirty="0"/>
-          </a:p>
-        </p:txBody>
-      </p:sp>
-      <p:sp>
-        <p:nvSpPr>
-          <p:cNvPr id="6" name="Shape 4"/>
-          <p:cNvSpPr/>
-          <p:nvPr/>
-        </p:nvSpPr>
-        <p:spPr>
-          <a:xfrm>
-            <a:off x="457200" y="1481328"/>
-            <a:ext cx="11247120" cy="10973"/>
-          </a:xfrm>
-          <a:prstGeom prst="rect">
-            <a:avLst/>
-          </a:prstGeom>
-          <a:solidFill>
-            <a:srgbClr val="E1E5E8"/>
-          </a:solidFill>
-          <a:ln/>
-        </p:spPr>
-      </p:sp>
-      <p:sp>
-        <p:nvSpPr>
-          <p:cNvPr id="7" name="Text 5"/>
-          <p:cNvSpPr/>
-          <p:nvPr/>
-        </p:nvSpPr>
-        <p:spPr>
-          <a:xfrm>
-            <a:off x="502920" y="1691640"/>
-            <a:ext cx="11155680" cy="4709160"/>
-          </a:xfrm>
-          <a:prstGeom prst="rect">
-            <a:avLst/>
-          </a:prstGeom>
-          <a:noFill/>
-          <a:ln/>
-        </p:spPr>
-        <p:txBody>
-          <a:bodyPr wrap="square" rtlCol="0" anchor="t"/>
-          <a:lstStyle/>
-          <a:p>
-            <a:pPr marL="228600" indent="-228600">
-              <a:lnSpc>
-                <a:spcPct val="112000"/>
-              </a:lnSpc>
-              <a:buSzPct val="100000"/>
-              <a:buChar char="●"/>
-            </a:pPr>
-            <a:r>
-              <a:rPr lang="en-US" sz="1000" b="1" dirty="0">
-                <a:solidFill>
-                  <a:srgbClr val="107C10"/>
-                </a:solidFill>
-                <a:latin typeface="Segoe UI" pitchFamily="34" charset="0"/>
-                <a:ea typeface="Segoe UI" pitchFamily="34" charset="-122"/>
-                <a:cs typeface="Segoe UI" pitchFamily="34" charset="-120"/>
-              </a:rPr>
-              <a:t>CONFIRMED  </a:t>
-            </a:r>
-            <a:pPr indent="0" marL="0">
-              <a:lnSpc>
-                <a:spcPct val="112000"/>
-              </a:lnSpc>
-              <a:buNone/>
-            </a:pPr>
-            <a:r>
-              <a:rPr lang="en-US" sz="1200" dirty="0">
-                <a:solidFill>
-                  <a:srgbClr val="1A1A1A"/>
-                </a:solidFill>
-                <a:latin typeface="Segoe UI" pitchFamily="34" charset="0"/>
-                <a:ea typeface="Segoe UI" pitchFamily="34" charset="-122"/>
-                <a:cs typeface="Segoe UI" pitchFamily="34" charset="-120"/>
-              </a:rPr>
-              <a:t>Model 1 — OSS LangGraph on customer-managed Azure compute: Air Canada owns runtime, queueing, scaling, persistence, and recovery.
-</a:t>
-            </a:r>
-            <a:endParaRPr lang="en-US" sz="1000" dirty="0"/>
-          </a:p>
-          <a:p>
-            <a:pPr marL="228600" indent="-228600">
-              <a:lnSpc>
-                <a:spcPct val="112000"/>
-              </a:lnSpc>
-              <a:buSzPct val="100000"/>
-              <a:buChar char="●"/>
-            </a:pPr>
-            <a:r>
-              <a:rPr lang="en-US" sz="1000" b="1" dirty="0">
-                <a:solidFill>
-                  <a:srgbClr val="107C10"/>
-                </a:solidFill>
-                <a:latin typeface="Segoe UI" pitchFamily="34" charset="0"/>
-                <a:ea typeface="Segoe UI" pitchFamily="34" charset="-122"/>
-                <a:cs typeface="Segoe UI" pitchFamily="34" charset="-120"/>
-              </a:rPr>
-              <a:t>CONFIRMED  </a:t>
-            </a:r>
-            <a:pPr indent="0" marL="0">
-              <a:lnSpc>
-                <a:spcPct val="112000"/>
-              </a:lnSpc>
-              <a:buNone/>
-            </a:pPr>
-            <a:r>
-              <a:rPr lang="en-US" sz="1200" dirty="0">
-                <a:solidFill>
-                  <a:srgbClr val="1A1A1A"/>
-                </a:solidFill>
-                <a:latin typeface="Segoe UI" pitchFamily="34" charset="0"/>
-                <a:ea typeface="Segoe UI" pitchFamily="34" charset="-122"/>
-                <a:cs typeface="Segoe UI" pitchFamily="34" charset="-120"/>
-              </a:rPr>
-              <a:t>Model 2 — LangSmith Deployment Cloud: LangChain operates Agent Server; separate SaaS billing and control plane.
-</a:t>
-            </a:r>
-            <a:endParaRPr lang="en-US" sz="1000" dirty="0"/>
-          </a:p>
-          <a:p>
-            <a:pPr marL="228600" indent="-228600">
-              <a:lnSpc>
-                <a:spcPct val="112000"/>
-              </a:lnSpc>
-              <a:buSzPct val="100000"/>
-              <a:buChar char="●"/>
-            </a:pPr>
-            <a:r>
-              <a:rPr lang="en-US" sz="1000" b="1" dirty="0">
-                <a:solidFill>
-                  <a:srgbClr val="D13438"/>
-                </a:solidFill>
-                <a:latin typeface="Segoe UI" pitchFamily="34" charset="0"/>
-                <a:ea typeface="Segoe UI" pitchFamily="34" charset="-122"/>
-                <a:cs typeface="Segoe UI" pitchFamily="34" charset="-120"/>
-              </a:rPr>
-              <a:t>REQUIRES VALIDATION  </a:t>
-            </a:r>
-            <a:pPr indent="0" marL="0">
-              <a:lnSpc>
-                <a:spcPct val="112000"/>
-              </a:lnSpc>
-              <a:buNone/>
-            </a:pPr>
-            <a:r>
-              <a:rPr lang="en-US" sz="1200" dirty="0">
-                <a:solidFill>
-                  <a:srgbClr val="1A1A1A"/>
-                </a:solidFill>
-                <a:latin typeface="Segoe UI" pitchFamily="34" charset="0"/>
-                <a:ea typeface="Segoe UI" pitchFamily="34" charset="-122"/>
-                <a:cs typeface="Segoe UI" pitchFamily="34" charset="-120"/>
-              </a:rPr>
-              <a:t>Model 3 — LangSmith self-hosted Enterprise on Azure: Enterprise license plus customer-operated stack; Azure BYOC is only "planned for 2H 2026."
-</a:t>
-            </a:r>
-            <a:endParaRPr lang="en-US" sz="1000" dirty="0"/>
-          </a:p>
-          <a:p>
-            <a:pPr marL="228600" indent="-228600">
-              <a:lnSpc>
-                <a:spcPct val="112000"/>
-              </a:lnSpc>
-              <a:buSzPct val="100000"/>
-              <a:buChar char="●"/>
-            </a:pPr>
-            <a:r>
-              <a:rPr lang="en-US" sz="1000" b="1" dirty="0">
-                <a:solidFill>
-                  <a:srgbClr val="107C10"/>
-                </a:solidFill>
-                <a:latin typeface="Segoe UI" pitchFamily="34" charset="0"/>
-                <a:ea typeface="Segoe UI" pitchFamily="34" charset="-122"/>
-                <a:cs typeface="Segoe UI" pitchFamily="34" charset="-120"/>
-              </a:rPr>
-              <a:t>CONFIRMED  </a:t>
-            </a:r>
-            <a:pPr indent="0" marL="0">
-              <a:lnSpc>
-                <a:spcPct val="112000"/>
-              </a:lnSpc>
-              <a:buNone/>
-            </a:pPr>
-            <a:r>
-              <a:rPr lang="en-US" sz="1200" dirty="0">
-                <a:solidFill>
-                  <a:srgbClr val="1A1A1A"/>
-                </a:solidFill>
-                <a:latin typeface="Segoe UI" pitchFamily="34" charset="0"/>
-                <a:ea typeface="Segoe UI" pitchFamily="34" charset="-122"/>
-                <a:cs typeface="Segoe UI" pitchFamily="34" charset="-120"/>
-              </a:rPr>
-              <a:t>Model 4 — Foundry Hosted Agent baseline: Foundry operates session compute; Air Canada owns graph code; no Cosmos DB, no Agent 365.
-</a:t>
-            </a:r>
-            <a:endParaRPr lang="en-US" sz="1000" dirty="0"/>
-          </a:p>
-          <a:p>
-            <a:pPr marL="228600" indent="-228600">
-              <a:lnSpc>
-                <a:spcPct val="112000"/>
-              </a:lnSpc>
-              <a:buSzPct val="100000"/>
-              <a:buChar char="●"/>
-            </a:pPr>
-            <a:r>
-              <a:rPr lang="en-US" sz="1000" b="1" dirty="0">
-                <a:solidFill>
-                  <a:srgbClr val="D13438"/>
-                </a:solidFill>
-                <a:latin typeface="Segoe UI" pitchFamily="34" charset="0"/>
-                <a:ea typeface="Segoe UI" pitchFamily="34" charset="-122"/>
-                <a:cs typeface="Segoe UI" pitchFamily="34" charset="-120"/>
-              </a:rPr>
-              <a:t>REQUIRES VALIDATION  </a:t>
-            </a:r>
-            <a:pPr indent="0" marL="0">
-              <a:lnSpc>
-                <a:spcPct val="112000"/>
-              </a:lnSpc>
-              <a:buNone/>
-            </a:pPr>
-            <a:r>
-              <a:rPr lang="en-US" sz="1200" dirty="0">
-                <a:solidFill>
-                  <a:srgbClr val="1A1A1A"/>
-                </a:solidFill>
-                <a:latin typeface="Segoe UI" pitchFamily="34" charset="0"/>
-                <a:ea typeface="Segoe UI" pitchFamily="34" charset="-122"/>
-                <a:cs typeface="Segoe UI" pitchFamily="34" charset="-120"/>
-              </a:rPr>
-              <a:t>Model 4 limits (capacity, SLA) are not yet quantified.
-</a:t>
-            </a:r>
-            <a:endParaRPr lang="en-US" sz="1000" dirty="0"/>
-          </a:p>
-          <a:p>
-            <a:pPr marL="228600" indent="-228600">
-              <a:lnSpc>
-                <a:spcPct val="112000"/>
-              </a:lnSpc>
-              <a:buSzPct val="100000"/>
-              <a:buChar char="●"/>
-            </a:pPr>
-            <a:r>
-              <a:rPr lang="en-US" sz="1000" b="1" dirty="0">
-                <a:solidFill>
-                  <a:srgbClr val="107C10"/>
-                </a:solidFill>
-                <a:latin typeface="Segoe UI" pitchFamily="34" charset="0"/>
-                <a:ea typeface="Segoe UI" pitchFamily="34" charset="-122"/>
-                <a:cs typeface="Segoe UI" pitchFamily="34" charset="-120"/>
-              </a:rPr>
-              <a:t>CONFIRMED  </a:t>
-            </a:r>
-            <a:pPr indent="0" marL="0">
-              <a:lnSpc>
-                <a:spcPct val="112000"/>
-              </a:lnSpc>
-              <a:buNone/>
-            </a:pPr>
-            <a:r>
-              <a:rPr lang="en-US" sz="1200" dirty="0">
-                <a:solidFill>
-                  <a:srgbClr val="1A1A1A"/>
-                </a:solidFill>
-                <a:latin typeface="Segoe UI" pitchFamily="34" charset="0"/>
-                <a:ea typeface="Segoe UI" pitchFamily="34" charset="-122"/>
-                <a:cs typeface="Segoe UI" pitchFamily="34" charset="-120"/>
-              </a:rPr>
-              <a:t>Model 5 — Phased Foundry target: baseline plus evidence-gated optional extensions (Cosmos DB, Agent 365, continuous evaluation, A2A); each extension individually requires validation.
-</a:t>
-            </a:r>
-            <a:endParaRPr lang="en-US" sz="1000" dirty="0"/>
-          </a:p>
-          <a:p>
-            <a:pPr marL="228600" indent="-228600">
-              <a:lnSpc>
-                <a:spcPct val="112000"/>
-              </a:lnSpc>
-              <a:buSzPct val="100000"/>
-              <a:buChar char="●"/>
-            </a:pPr>
-            <a:r>
-              <a:rPr lang="en-US" sz="1000" b="1" dirty="0">
-                <a:solidFill>
-                  <a:srgbClr val="107C10"/>
-                </a:solidFill>
-                <a:latin typeface="Segoe UI" pitchFamily="34" charset="0"/>
-                <a:ea typeface="Segoe UI" pitchFamily="34" charset="-122"/>
-                <a:cs typeface="Segoe UI" pitchFamily="34" charset="-120"/>
-              </a:rPr>
-              <a:t>CONFIRMED  </a:t>
-            </a:r>
-            <a:pPr indent="0" marL="0">
-              <a:lnSpc>
-                <a:spcPct val="112000"/>
-              </a:lnSpc>
-              <a:buNone/>
-            </a:pPr>
-            <a:r>
-              <a:rPr lang="en-US" sz="1200" dirty="0">
-                <a:solidFill>
-                  <a:srgbClr val="1A1A1A"/>
-                </a:solidFill>
-                <a:latin typeface="Segoe UI" pitchFamily="34" charset="0"/>
-                <a:ea typeface="Segoe UI" pitchFamily="34" charset="-122"/>
-                <a:cs typeface="Segoe UI" pitchFamily="34" charset="-120"/>
-              </a:rPr>
-              <a:t>Full dimension-by-dimension comparison lives in Appendix A.
-</a:t>
-            </a:r>
-            <a:endParaRPr lang="en-US" sz="1000" dirty="0"/>
-          </a:p>
-        </p:txBody>
-      </p:sp>
-      <p:sp>
-        <p:nvSpPr>
-          <p:cNvPr id="9" name="Shape 6"/>
-          <p:cNvSpPr/>
-          <p:nvPr/>
-        </p:nvSpPr>
-        <p:spPr>
-          <a:xfrm>
-            <a:off x="0" y="6784848"/>
-            <a:ext cx="12188952" cy="27432"/>
-          </a:xfrm>
-          <a:prstGeom prst="rect">
-            <a:avLst/>
-          </a:prstGeom>
-          <a:solidFill>
-            <a:srgbClr val="E1E5E8"/>
-          </a:solidFill>
-          <a:ln/>
-        </p:spPr>
-      </p:sp>
-      <p:sp>
-        <p:nvSpPr>
-          <p:cNvPr id="10" name="Text 7"/>
-          <p:cNvSpPr/>
-          <p:nvPr/>
-        </p:nvSpPr>
-        <p:spPr>
-          <a:xfrm>
-            <a:off x="457200" y="6537960"/>
-            <a:ext cx="8229600" cy="256032"/>
-          </a:xfrm>
-          <a:prstGeom prst="rect">
-            <a:avLst/>
-          </a:prstGeom>
-          <a:noFill/>
-          <a:ln/>
-        </p:spPr>
-        <p:txBody>
-          <a:bodyPr wrap="square" rtlCol="0" anchor="ctr"/>
-          <a:lstStyle/>
-          <a:p>
-            <a:pPr indent="0" marL="0">
-              <a:buNone/>
-            </a:pPr>
-            <a:r>
-              <a:rPr lang="en-US" sz="900" dirty="0">
-                <a:solidFill>
-                  <a:srgbClr val="767676"/>
-                </a:solidFill>
-                <a:latin typeface="Segoe UI" pitchFamily="34" charset="0"/>
-                <a:ea typeface="Segoe UI" pitchFamily="34" charset="-122"/>
-                <a:cs typeface="Segoe UI" pitchFamily="34" charset="-120"/>
-              </a:rPr>
-              <a:t>Air Canada — Foundry Hosted Agents Decision</a:t>
+              <a:rPr lang="en-US" sz="900" u="sng" dirty="0">
+                <a:solidFill>
+                  <a:srgbClr val="075C9B"/>
+                </a:solidFill>
+                <a:latin typeface="Segoe UI" pitchFamily="34" charset="0"/>
+                <a:ea typeface="Segoe UI" pitchFamily="34" charset="-122"/>
+                <a:cs typeface="Segoe UI" pitchFamily="34" charset="-120"/>
+                <a:hlinkClick r:id="rId2" invalidUrl="" action="" tgtFrame="" tooltip="" history="1" highlightClick="0" endSnd="0">
+                  <a:extLst>
+                    <a:ext uri="{A12FA001-AC4F-418D-AE19-62706E023703}">
+                      <ahyp:hlinkClr xmlns:ahyp="http://schemas.microsoft.com/office/drawing/2018/hyperlinkcolor" val="tx"/>
+                    </a:ext>
+                  </a:extLst>
+                </a:hlinkClick>
+              </a:rPr>
+              <a:t>GitHub Actions 34178081808 | f3da486 | 2026-09-08 UTC</a:t>
             </a:r>
             <a:endParaRPr lang="en-US" sz="900" dirty="0"/>
           </a:p>
@@ -25857,7 +28223,7 @@
       </p:sp>
       <p:sp>
         <p:nvSpPr>
-          <p:cNvPr id="11" name="Text 8"/>
+          <p:cNvPr id="7" name="Text 3"/>
           <p:cNvSpPr/>
           <p:nvPr/>
         </p:nvSpPr>
@@ -25888,7 +28254,7 @@
                 <a:ea typeface="Segoe UI" pitchFamily="34" charset="-122"/>
                 <a:cs typeface="Segoe UI" pitchFamily="34" charset="-120"/>
               </a:rPr>
-              <a:t>4 / 26</a:t>
+              <a:t>4 / 31</a:t>
             </a:r>
             <a:endParaRPr lang="en-US" sz="900" dirty="0"/>
           </a:p>
@@ -25908,7 +28274,7 @@
     <p:bg>
       <p:bgPr>
         <a:solidFill>
-          <a:srgbClr val="FAFBFC"/>
+          <a:srgbClr val="FFFFFF"/>
         </a:solidFill>
       </p:bgPr>
     </p:bg>
@@ -25928,34 +28294,14 @@
       </p:grpSpPr>
       <p:sp>
         <p:nvSpPr>
-          <p:cNvPr id="2" name="Shape 0"/>
+          <p:cNvPr id="2" name="Text 0"/>
           <p:cNvSpPr/>
           <p:nvPr/>
         </p:nvSpPr>
         <p:spPr>
           <a:xfrm>
-            <a:off x="0" y="0"/>
-            <a:ext cx="12188952" cy="82296"/>
-          </a:xfrm>
-          <a:prstGeom prst="rect">
-            <a:avLst/>
-          </a:prstGeom>
-          <a:solidFill>
-            <a:srgbClr val="0078D4"/>
-          </a:solidFill>
-          <a:ln/>
-        </p:spPr>
-      </p:sp>
-      <p:sp>
-        <p:nvSpPr>
-          <p:cNvPr id="3" name="Text 1"/>
-          <p:cNvSpPr/>
-          <p:nvPr/>
-        </p:nvSpPr>
-        <p:spPr>
-          <a:xfrm>
-            <a:off x="457200" y="292608"/>
-            <a:ext cx="11247120" cy="274320"/>
+            <a:off x="411480" y="146304"/>
+            <a:ext cx="11338560" cy="502920"/>
           </a:xfrm>
           <a:prstGeom prst="rect">
             <a:avLst/>
@@ -25971,30 +28317,54 @@
               <a:buNone/>
             </a:pPr>
             <a:r>
-              <a:rPr lang="en-US" sz="1100" b="1" spc="100" kern="0" dirty="0">
-                <a:solidFill>
-                  <a:srgbClr val="0078D4"/>
-                </a:solidFill>
-                <a:latin typeface="Segoe UI" pitchFamily="34" charset="0"/>
-                <a:ea typeface="Segoe UI" pitchFamily="34" charset="-122"/>
-                <a:cs typeface="Segoe UI" pitchFamily="34" charset="-120"/>
-              </a:rPr>
-              <a:t>CORE SLIDE 4 OF 12</a:t>
-            </a:r>
-            <a:endParaRPr lang="en-US" sz="1100" dirty="0"/>
+              <a:rPr lang="en-US" sz="2400" b="1" dirty="0">
+                <a:solidFill>
+                  <a:srgbClr val="146C54"/>
+                </a:solidFill>
+                <a:latin typeface="Segoe UI" pitchFamily="34" charset="0"/>
+                <a:ea typeface="Segoe UI" pitchFamily="34" charset="-122"/>
+                <a:cs typeface="Segoe UI" pitchFamily="34" charset="-120"/>
+              </a:rPr>
+              <a:t>Production 34: Active, Smoke Test Passed</a:t>
+            </a:r>
+            <a:endParaRPr lang="en-US" sz="2400" dirty="0"/>
           </a:p>
         </p:txBody>
       </p:sp>
-      <p:sp>
-        <p:nvSpPr>
-          <p:cNvPr id="4" name="Text 2"/>
+      <p:pic>
+        <p:nvPicPr>
+          <p:cNvPr id="3" name="Image 0" descr="Production 34: Active, Smoke Test Passed">    </p:cNvPr>
+          <p:cNvPicPr>
+            <a:picLocks noChangeAspect="1"/>
+          </p:cNvPicPr>
+          <p:nvPr/>
+        </p:nvPicPr>
+        <p:blipFill>
+          <a:blip r:embed="rId1"/>
+          <a:stretch>
+            <a:fillRect/>
+          </a:stretch>
+        </p:blipFill>
+        <p:spPr>
+          <a:xfrm>
+            <a:off x="2068830" y="777240"/>
+            <a:ext cx="8051292" cy="5367528"/>
+          </a:xfrm>
+          <a:prstGeom prst="rect">
+            <a:avLst/>
+          </a:prstGeom>
+        </p:spPr>
+      </p:pic>
+      <p:sp>
+        <p:nvSpPr>
+          <p:cNvPr id="4" name="Text 1"/>
           <p:cNvSpPr/>
           <p:nvPr/>
         </p:nvSpPr>
         <p:spPr>
           <a:xfrm>
-            <a:off x="457200" y="548640"/>
-            <a:ext cx="11247120" cy="548640"/>
+            <a:off x="411480" y="6245352"/>
+            <a:ext cx="11338560" cy="256032"/>
           </a:xfrm>
           <a:prstGeom prst="rect">
             <a:avLst/>
@@ -26010,30 +28380,32 @@
               <a:buNone/>
             </a:pPr>
             <a:r>
-              <a:rPr lang="en-US" sz="2600" b="1" dirty="0">
-                <a:solidFill>
-                  <a:srgbClr val="001B3D"/>
-                </a:solidFill>
-                <a:latin typeface="Segoe UI" pitchFamily="34" charset="0"/>
-                <a:ea typeface="Segoe UI" pitchFamily="34" charset="-122"/>
-                <a:cs typeface="Segoe UI" pitchFamily="34" charset="-120"/>
-              </a:rPr>
-              <a:t>Recommendation</a:t>
-            </a:r>
-            <a:endParaRPr lang="en-US" sz="2600" dirty="0"/>
+              <a:rPr lang="en-US" sz="1000" dirty="0">
+                <a:solidFill>
+                  <a:srgbClr val="53635E"/>
+                </a:solidFill>
+                <a:latin typeface="Segoe UI" pitchFamily="34" charset="0"/>
+                <a:ea typeface="Segoe UI" pitchFamily="34" charset="-122"/>
+                <a:cs typeface="Segoe UI" pitchFamily="34" charset="-120"/>
+              </a:rPr>
+              <a:t>Artifact rendering, not a portal screenshot. Synthetic fixtures. Sources and SHA-256 hashes retained.</a:t>
+            </a:r>
+            <a:endParaRPr lang="en-US" sz="1000" dirty="0"/>
           </a:p>
         </p:txBody>
       </p:sp>
       <p:sp>
         <p:nvSpPr>
-          <p:cNvPr id="5" name="Text 3"/>
+          <p:cNvPr id="5" name="Text 2">
+            <a:hlinkClick r:id="rId2" tooltip=""/>
+          </p:cNvPr>
           <p:cNvSpPr/>
           <p:nvPr/>
         </p:nvSpPr>
         <p:spPr>
           <a:xfrm>
-            <a:off x="457200" y="1078992"/>
-            <a:ext cx="11247120" cy="365760"/>
+            <a:off x="411480" y="6528816"/>
+            <a:ext cx="10515600" cy="201168"/>
           </a:xfrm>
           <a:prstGeom prst="rect">
             <a:avLst/>
@@ -26049,233 +28421,22 @@
               <a:buNone/>
             </a:pPr>
             <a:r>
-              <a:rPr lang="en-US" sz="1300" i="1" dirty="0">
-                <a:solidFill>
-                  <a:srgbClr val="484848"/>
-                </a:solidFill>
-                <a:latin typeface="Segoe UI" pitchFamily="34" charset="0"/>
-                <a:ea typeface="Segoe UI" pitchFamily="34" charset="-122"/>
-                <a:cs typeface="Segoe UI" pitchFamily="34" charset="-120"/>
-              </a:rPr>
-              <a:t>Run a phased Foundry PoC with explicit go/no-go gates; separate the stable baseline from optional extensions.</a:t>
-            </a:r>
-            <a:endParaRPr lang="en-US" sz="1300" dirty="0"/>
-          </a:p>
-        </p:txBody>
-      </p:sp>
-      <p:sp>
-        <p:nvSpPr>
-          <p:cNvPr id="6" name="Shape 4"/>
-          <p:cNvSpPr/>
-          <p:nvPr/>
-        </p:nvSpPr>
-        <p:spPr>
-          <a:xfrm>
-            <a:off x="457200" y="1481328"/>
-            <a:ext cx="11247120" cy="10973"/>
-          </a:xfrm>
-          <a:prstGeom prst="rect">
-            <a:avLst/>
-          </a:prstGeom>
-          <a:solidFill>
-            <a:srgbClr val="E1E5E8"/>
-          </a:solidFill>
-          <a:ln/>
-        </p:spPr>
-      </p:sp>
-      <p:sp>
-        <p:nvSpPr>
-          <p:cNvPr id="7" name="Text 5"/>
-          <p:cNvSpPr/>
-          <p:nvPr/>
-        </p:nvSpPr>
-        <p:spPr>
-          <a:xfrm>
-            <a:off x="502920" y="1691640"/>
-            <a:ext cx="11155680" cy="4709160"/>
-          </a:xfrm>
-          <a:prstGeom prst="rect">
-            <a:avLst/>
-          </a:prstGeom>
-          <a:noFill/>
-          <a:ln/>
-        </p:spPr>
-        <p:txBody>
-          <a:bodyPr wrap="square" rtlCol="0" anchor="t"/>
-          <a:lstStyle/>
-          <a:p>
-            <a:pPr marL="228600" indent="-228600">
-              <a:lnSpc>
-                <a:spcPct val="112000"/>
-              </a:lnSpc>
-              <a:buSzPct val="100000"/>
-              <a:buChar char="●"/>
-            </a:pPr>
-            <a:r>
-              <a:rPr lang="en-US" sz="1000" b="1" dirty="0">
-                <a:solidFill>
-                  <a:srgbClr val="107C10"/>
-                </a:solidFill>
-                <a:latin typeface="Segoe UI" pitchFamily="34" charset="0"/>
-                <a:ea typeface="Segoe UI" pitchFamily="34" charset="-122"/>
-                <a:cs typeface="Segoe UI" pitchFamily="34" charset="-120"/>
-              </a:rPr>
-              <a:t>CONFIRMED  </a:t>
-            </a:r>
-            <a:pPr indent="0" marL="0">
-              <a:lnSpc>
-                <a:spcPct val="112000"/>
-              </a:lnSpc>
-              <a:buNone/>
-            </a:pPr>
-            <a:r>
-              <a:rPr lang="en-US" sz="1200" dirty="0">
-                <a:solidFill>
-                  <a:srgbClr val="1A1A1A"/>
-                </a:solidFill>
-                <a:latin typeface="Segoe UI" pitchFamily="34" charset="0"/>
-                <a:ea typeface="Segoe UI" pitchFamily="34" charset="-122"/>
-                <a:cs typeface="Segoe UI" pitchFamily="34" charset="-120"/>
-              </a:rPr>
-              <a:t>Recommended baseline: one hosted deployment with a genuine LangGraph supervisor + specialist-agent graph, Responses SSE, external MCP via Foundry connections/Toolbox, Application Insights, and offline evaluations.
-</a:t>
-            </a:r>
-            <a:endParaRPr lang="en-US" sz="1000" dirty="0"/>
-          </a:p>
-          <a:p>
-            <a:pPr marL="228600" indent="-228600">
-              <a:lnSpc>
-                <a:spcPct val="112000"/>
-              </a:lnSpc>
-              <a:buSzPct val="100000"/>
-              <a:buChar char="●"/>
-            </a:pPr>
-            <a:r>
-              <a:rPr lang="en-US" sz="1000" b="1" dirty="0">
-                <a:solidFill>
-                  <a:srgbClr val="107C10"/>
-                </a:solidFill>
-                <a:latin typeface="Segoe UI" pitchFamily="34" charset="0"/>
-                <a:ea typeface="Segoe UI" pitchFamily="34" charset="-122"/>
-                <a:cs typeface="Segoe UI" pitchFamily="34" charset="-120"/>
-              </a:rPr>
-              <a:t>CONFIRMED  </a:t>
-            </a:r>
-            <a:pPr indent="0" marL="0">
-              <a:lnSpc>
-                <a:spcPct val="112000"/>
-              </a:lnSpc>
-              <a:buNone/>
-            </a:pPr>
-            <a:r>
-              <a:rPr lang="en-US" sz="1200" dirty="0">
-                <a:solidFill>
-                  <a:srgbClr val="1A1A1A"/>
-                </a:solidFill>
-                <a:latin typeface="Segoe UI" pitchFamily="34" charset="0"/>
-                <a:ea typeface="Segoe UI" pitchFamily="34" charset="-122"/>
-                <a:cs typeface="Segoe UI" pitchFamily="34" charset="-120"/>
-              </a:rPr>
-              <a:t>Cosmos DB, Agent 365, continuous evaluation, and a second A2A-hosted agent are separate, individually gated experiments — not baseline dependencies.
-</a:t>
-            </a:r>
-            <a:endParaRPr lang="en-US" sz="1000" dirty="0"/>
-          </a:p>
-          <a:p>
-            <a:pPr marL="228600" indent="-228600">
-              <a:lnSpc>
-                <a:spcPct val="112000"/>
-              </a:lnSpc>
-              <a:buSzPct val="100000"/>
-              <a:buChar char="●"/>
-            </a:pPr>
-            <a:r>
-              <a:rPr lang="en-US" sz="1000" b="1" dirty="0">
-                <a:solidFill>
-                  <a:srgbClr val="107C10"/>
-                </a:solidFill>
-                <a:latin typeface="Segoe UI" pitchFamily="34" charset="0"/>
-                <a:ea typeface="Segoe UI" pitchFamily="34" charset="-122"/>
-                <a:cs typeface="Segoe UI" pitchFamily="34" charset="-120"/>
-              </a:rPr>
-              <a:t>CONFIRMED  </a:t>
-            </a:r>
-            <a:pPr indent="0" marL="0">
-              <a:lnSpc>
-                <a:spcPct val="112000"/>
-              </a:lnSpc>
-              <a:buNone/>
-            </a:pPr>
-            <a:r>
-              <a:rPr lang="en-US" sz="1200" dirty="0">
-                <a:solidFill>
-                  <a:srgbClr val="1A1A1A"/>
-                </a:solidFill>
-                <a:latin typeface="Segoe UI" pitchFamily="34" charset="0"/>
-                <a:ea typeface="Segoe UI" pitchFamily="34" charset="-122"/>
-                <a:cs typeface="Segoe UI" pitchFamily="34" charset="-120"/>
-              </a:rPr>
-              <a:t>Why not the other four models: OSS LangGraph = highest engineering burden; LangSmith Cloud = separate SaaS/billing dependency; LangSmith Enterprise = licensing plus highest ops burden; Microsoft Agent Framework not selected because Air Canada has an existing LangGraph investment.
-</a:t>
-            </a:r>
-            <a:endParaRPr lang="en-US" sz="1000" dirty="0"/>
-          </a:p>
-        </p:txBody>
-      </p:sp>
-      <p:sp>
-        <p:nvSpPr>
-          <p:cNvPr id="9" name="Shape 6"/>
-          <p:cNvSpPr/>
-          <p:nvPr/>
-        </p:nvSpPr>
-        <p:spPr>
-          <a:xfrm>
-            <a:off x="0" y="6784848"/>
-            <a:ext cx="12188952" cy="27432"/>
-          </a:xfrm>
-          <a:prstGeom prst="rect">
-            <a:avLst/>
-          </a:prstGeom>
-          <a:solidFill>
-            <a:srgbClr val="E1E5E8"/>
-          </a:solidFill>
-          <a:ln/>
-        </p:spPr>
-      </p:sp>
-      <p:sp>
-        <p:nvSpPr>
-          <p:cNvPr id="10" name="Text 7"/>
-          <p:cNvSpPr/>
-          <p:nvPr/>
-        </p:nvSpPr>
-        <p:spPr>
-          <a:xfrm>
-            <a:off x="457200" y="6537960"/>
-            <a:ext cx="8229600" cy="256032"/>
-          </a:xfrm>
-          <a:prstGeom prst="rect">
-            <a:avLst/>
-          </a:prstGeom>
-          <a:noFill/>
-          <a:ln/>
-        </p:spPr>
-        <p:txBody>
-          <a:bodyPr wrap="square" rtlCol="0" anchor="ctr"/>
-          <a:lstStyle/>
-          <a:p>
-            <a:pPr indent="0" marL="0">
-              <a:buNone/>
-            </a:pPr>
-            <a:r>
-              <a:rPr lang="en-US" sz="900" dirty="0">
-                <a:solidFill>
-                  <a:srgbClr val="767676"/>
-                </a:solidFill>
-                <a:latin typeface="Segoe UI" pitchFamily="34" charset="0"/>
-                <a:ea typeface="Segoe UI" pitchFamily="34" charset="-122"/>
-                <a:cs typeface="Segoe UI" pitchFamily="34" charset="-120"/>
-              </a:rPr>
-              <a:t>Air Canada — Foundry Hosted Agents Decision</a:t>
+              <a:rPr lang="en-US" sz="900" u="sng" dirty="0">
+                <a:solidFill>
+                  <a:srgbClr val="075C9B"/>
+                </a:solidFill>
+                <a:latin typeface="Segoe UI" pitchFamily="34" charset="0"/>
+                <a:ea typeface="Segoe UI" pitchFamily="34" charset="-122"/>
+                <a:cs typeface="Segoe UI" pitchFamily="34" charset="-120"/>
+                <a:hlinkClick r:id="rId2" invalidUrl="" action="" tgtFrame="" tooltip="" history="1" highlightClick="0" endSnd="0">
+                  <a:extLst>
+                    <a:ext uri="{A12FA001-AC4F-418D-AE19-62706E023703}">
+                      <ahyp:hlinkClr xmlns:ahyp="http://schemas.microsoft.com/office/drawing/2018/hyperlinkcolor" val="tx"/>
+                    </a:ext>
+                  </a:extLst>
+                </a:hlinkClick>
+              </a:rPr>
+              <a:t>GitHub Actions 34178081808 | f3da486 | 2026-09-08 UTC</a:t>
             </a:r>
             <a:endParaRPr lang="en-US" sz="900" dirty="0"/>
           </a:p>
@@ -26283,7 +28444,7 @@
       </p:sp>
       <p:sp>
         <p:nvSpPr>
-          <p:cNvPr id="11" name="Text 8"/>
+          <p:cNvPr id="7" name="Text 3"/>
           <p:cNvSpPr/>
           <p:nvPr/>
         </p:nvSpPr>
@@ -26314,7 +28475,7 @@
                 <a:ea typeface="Segoe UI" pitchFamily="34" charset="-122"/>
                 <a:cs typeface="Segoe UI" pitchFamily="34" charset="-120"/>
               </a:rPr>
-              <a:t>5 / 26</a:t>
+              <a:t>5 / 31</a:t>
             </a:r>
             <a:endParaRPr lang="en-US" sz="900" dirty="0"/>
           </a:p>
@@ -26405,7 +28566,7 @@
                 <a:ea typeface="Segoe UI" pitchFamily="34" charset="-122"/>
                 <a:cs typeface="Segoe UI" pitchFamily="34" charset="-120"/>
               </a:rPr>
-              <a:t>CORE SLIDE 5 OF 12</a:t>
+              <a:t>CORE SLIDE 1 OF 12</a:t>
             </a:r>
             <a:endParaRPr lang="en-US" sz="1100" dirty="0"/>
           </a:p>
@@ -26444,7 +28605,7 @@
                 <a:ea typeface="Segoe UI" pitchFamily="34" charset="-122"/>
                 <a:cs typeface="Segoe UI" pitchFamily="34" charset="-120"/>
               </a:rPr>
-              <a:t>Runtime Architecture — Multi-Agent</a:t>
+              <a:t>Decision Required</a:t>
             </a:r>
             <a:endParaRPr lang="en-US" sz="2600" dirty="0"/>
           </a:p>
@@ -26483,7 +28644,7 @@
                 <a:ea typeface="Segoe UI" pitchFamily="34" charset="-122"/>
                 <a:cs typeface="Segoe UI" pitchFamily="34" charset="-120"/>
               </a:rPr>
-              <a:t>Show genuine multi-agent behavior in one deployment; A2A shown only as a dashed future boundary.</a:t>
+              <a:t>Frame the single decision Air Canada must make: select a reusable hosting blueprint for LangGraph agents.</a:t>
             </a:r>
             <a:endParaRPr lang="en-US" sz="1300" dirty="0"/>
           </a:p>
@@ -26563,8 +28724,7 @@
                 <a:ea typeface="Segoe UI" pitchFamily="34" charset="-122"/>
                 <a:cs typeface="Segoe UI" pitchFamily="34" charset="-120"/>
               </a:rPr>
-              <a:t>Graph composition: Supervisor → Evidence Investigator + Risk Analyst → Report Composer, all inside one hosted LangGraph deployment.
-</a:t>
+              <a:t>Decision framing: adopt, validate, or defer a hosting blueprint for future LangGraph agents.</a:t>
             </a:r>
             <a:endParaRPr lang="en-US" sz="1000" dirty="0"/>
           </a:p>
@@ -26602,8 +28762,7 @@
                 <a:ea typeface="Segoe UI" pitchFamily="34" charset="-122"/>
                 <a:cs typeface="Segoe UI" pitchFamily="34" charset="-120"/>
               </a:rPr>
-              <a:t>Each role has separate prompts, tool permissions, state contracts, and evaluation criteria despite sharing one deployment.
-</a:t>
+              <a:t>Foundry Hosted Agents is the leading PoC candidate — not yet an unconditional production selection.</a:t>
             </a:r>
             <a:endParaRPr lang="en-US" sz="1000" dirty="0"/>
           </a:p>
@@ -26618,13 +28777,13 @@
             <a:r>
               <a:rPr lang="en-US" sz="1000" b="1" dirty="0">
                 <a:solidFill>
-                  <a:srgbClr val="0078D4"/>
-                </a:solidFill>
-                <a:latin typeface="Segoe UI" pitchFamily="34" charset="0"/>
-                <a:ea typeface="Segoe UI" pitchFamily="34" charset="-122"/>
-                <a:cs typeface="Segoe UI" pitchFamily="34" charset="-120"/>
-              </a:rPr>
-              <a:t>PREVIEW  </a:t>
+                  <a:srgbClr val="107C10"/>
+                </a:solidFill>
+                <a:latin typeface="Segoe UI" pitchFamily="34" charset="0"/>
+                <a:ea typeface="Segoe UI" pitchFamily="34" charset="-122"/>
+                <a:cs typeface="Segoe UI" pitchFamily="34" charset="-120"/>
+              </a:rPr>
+              <a:t>CONFIRMED  </a:t>
             </a:r>
             <a:pPr indent="0" marL="0">
               <a:lnSpc>
@@ -26641,47 +28800,7 @@
                 <a:ea typeface="Segoe UI" pitchFamily="34" charset="-122"/>
                 <a:cs typeface="Segoe UI" pitchFamily="34" charset="-120"/>
               </a:rPr>
-              <a:t>Cross-deployment A2A delegation to a second hosted agent is a preview experiment, justified only by independent ownership/release/isolation/scaling needs — not a baseline requirement.
-</a:t>
-            </a:r>
-            <a:endParaRPr lang="en-US" sz="1000" dirty="0"/>
-          </a:p>
-          <a:p>
-            <a:pPr marL="228600" indent="-228600">
-              <a:lnSpc>
-                <a:spcPct val="112000"/>
-              </a:lnSpc>
-              <a:buSzPct val="100000"/>
-              <a:buChar char="●"/>
-            </a:pPr>
-            <a:r>
-              <a:rPr lang="en-US" sz="1000" b="1" dirty="0">
-                <a:solidFill>
-                  <a:srgbClr val="D13438"/>
-                </a:solidFill>
-                <a:latin typeface="Segoe UI" pitchFamily="34" charset="0"/>
-                <a:ea typeface="Segoe UI" pitchFamily="34" charset="-122"/>
-                <a:cs typeface="Segoe UI" pitchFamily="34" charset="-120"/>
-              </a:rPr>
-              <a:t>REQUIRES VALIDATION  </a:t>
-            </a:r>
-            <a:pPr indent="0" marL="0">
-              <a:lnSpc>
-                <a:spcPct val="112000"/>
-              </a:lnSpc>
-              <a:buNone/>
-            </a:pPr>
-            <a:r>
-              <a:rPr lang="en-US" sz="1200" dirty="0">
-                <a:solidFill>
-                  <a:srgbClr val="1A1A1A"/>
-                </a:solidFill>
-                <a:latin typeface="Segoe UI" pitchFamily="34" charset="0"/>
-                <a:ea typeface="Segoe UI" pitchFamily="34" charset="-122"/>
-                <a:cs typeface="Segoe UI" pitchFamily="34" charset="-120"/>
-              </a:rPr>
-              <a:t>No documented hard limit on graph node count or depth; the practical constraint is per-session sandbox CPU/memory, stated inconsistently across two Microsoft doc pages (0.5-2 vCPU fixed vs. 0.25-4.0 vCPU continuous).
-</a:t>
+              <a:t>The complete release passed: 8 captures, 21/21 judge checks, production v34 smoke. WI-11 is resolved; pilot security, capacity, cost, and recovery gates remain.</a:t>
             </a:r>
             <a:endParaRPr lang="en-US" sz="1000" dirty="0"/>
           </a:p>
@@ -26779,7 +28898,7 @@
                 <a:ea typeface="Segoe UI" pitchFamily="34" charset="-122"/>
                 <a:cs typeface="Segoe UI" pitchFamily="34" charset="-120"/>
               </a:rPr>
-              <a:t>6 / 26</a:t>
+              <a:t>6 / 31</a:t>
             </a:r>
             <a:endParaRPr lang="en-US" sz="900" dirty="0"/>
           </a:p>
@@ -26870,7 +28989,7 @@
                 <a:ea typeface="Segoe UI" pitchFamily="34" charset="-122"/>
                 <a:cs typeface="Segoe UI" pitchFamily="34" charset="-120"/>
               </a:rPr>
-              <a:t>CORE SLIDE 6 OF 12</a:t>
+              <a:t>CORE SLIDE 2 OF 12</a:t>
             </a:r>
             <a:endParaRPr lang="en-US" sz="1100" dirty="0"/>
           </a:p>
@@ -26909,7 +29028,7 @@
                 <a:ea typeface="Segoe UI" pitchFamily="34" charset="-122"/>
                 <a:cs typeface="Segoe UI" pitchFamily="34" charset="-120"/>
               </a:rPr>
-              <a:t>Tools and MCP</a:t>
+              <a:t>Air Canada's Requirements</a:t>
             </a:r>
             <a:endParaRPr lang="en-US" sz="2600" dirty="0"/>
           </a:p>
@@ -26948,7 +29067,7 @@
                 <a:ea typeface="Segoe UI" pitchFamily="34" charset="-122"/>
                 <a:cs typeface="Segoe UI" pitchFamily="34" charset="-120"/>
               </a:rPr>
-              <a:t>Separate implementation, hosting, registration, and consumption into four distinct layers.</a:t>
+              <a:t>Show the ten enterprise capabilities the PoC must prove.</a:t>
             </a:r>
             <a:endParaRPr lang="en-US" sz="1300" dirty="0"/>
           </a:p>
@@ -27028,8 +29147,7 @@
                 <a:ea typeface="Segoe UI" pitchFamily="34" charset="-122"/>
                 <a:cs typeface="Segoe UI" pitchFamily="34" charset="-120"/>
               </a:rPr>
-              <a:t>Layer 1 — Implementation: custom MCP server code (Defender tools, Anomaly tools).
-</a:t>
+              <a:t>Ten capabilities to prove: scaling, MCP tools, multi-agent behavior, evaluations, CI/CD, streaming, state, governance, cost, and production readiness.</a:t>
             </a:r>
             <a:endParaRPr lang="en-US" sz="1000" dirty="0"/>
           </a:p>
@@ -27067,203 +29185,7 @@
                 <a:ea typeface="Segoe UI" pitchFamily="34" charset="-122"/>
                 <a:cs typeface="Segoe UI" pitchFamily="34" charset="-120"/>
               </a:rPr>
-              <a:t>Layer 2 — Hosting: independent Azure runtime (Container Apps, Functions, or App Service); owns its own auth, networking, versioning, health checks, and throttling.
-</a:t>
-            </a:r>
-            <a:endParaRPr lang="en-US" sz="1000" dirty="0"/>
-          </a:p>
-          <a:p>
-            <a:pPr marL="228600" indent="-228600">
-              <a:lnSpc>
-                <a:spcPct val="112000"/>
-              </a:lnSpc>
-              <a:buSzPct val="100000"/>
-              <a:buChar char="●"/>
-            </a:pPr>
-            <a:r>
-              <a:rPr lang="en-US" sz="1000" b="1" dirty="0">
-                <a:solidFill>
-                  <a:srgbClr val="107C10"/>
-                </a:solidFill>
-                <a:latin typeface="Segoe UI" pitchFamily="34" charset="0"/>
-                <a:ea typeface="Segoe UI" pitchFamily="34" charset="-122"/>
-                <a:cs typeface="Segoe UI" pitchFamily="34" charset="-120"/>
-              </a:rPr>
-              <a:t>CONFIRMED  </a:t>
-            </a:r>
-            <a:pPr indent="0" marL="0">
-              <a:lnSpc>
-                <a:spcPct val="112000"/>
-              </a:lnSpc>
-              <a:buNone/>
-            </a:pPr>
-            <a:r>
-              <a:rPr lang="en-US" sz="1200" dirty="0">
-                <a:solidFill>
-                  <a:srgbClr val="1A1A1A"/>
-                </a:solidFill>
-                <a:latin typeface="Segoe UI" pitchFamily="34" charset="0"/>
-                <a:ea typeface="Segoe UI" pitchFamily="34" charset="-122"/>
-                <a:cs typeface="Segoe UI" pitchFamily="34" charset="-120"/>
-              </a:rPr>
-              <a:t>Layer 3 — Registration: Foundry connections define endpoint and credential policy per MCP server.
-</a:t>
-            </a:r>
-            <a:endParaRPr lang="en-US" sz="1000" dirty="0"/>
-          </a:p>
-          <a:p>
-            <a:pPr marL="228600" indent="-228600">
-              <a:lnSpc>
-                <a:spcPct val="112000"/>
-              </a:lnSpc>
-              <a:buSzPct val="100000"/>
-              <a:buChar char="●"/>
-            </a:pPr>
-            <a:r>
-              <a:rPr lang="en-US" sz="1000" b="1" dirty="0">
-                <a:solidFill>
-                  <a:srgbClr val="D13438"/>
-                </a:solidFill>
-                <a:latin typeface="Segoe UI" pitchFamily="34" charset="0"/>
-                <a:ea typeface="Segoe UI" pitchFamily="34" charset="-122"/>
-                <a:cs typeface="Segoe UI" pitchFamily="34" charset="-120"/>
-              </a:rPr>
-              <a:t>REQUIRES VALIDATION  </a:t>
-            </a:r>
-            <a:pPr indent="0" marL="0">
-              <a:lnSpc>
-                <a:spcPct val="112000"/>
-              </a:lnSpc>
-              <a:buNone/>
-            </a:pPr>
-            <a:r>
-              <a:rPr lang="en-US" sz="1200" dirty="0">
-                <a:solidFill>
-                  <a:srgbClr val="1A1A1A"/>
-                </a:solidFill>
-                <a:latin typeface="Segoe UI" pitchFamily="34" charset="0"/>
-                <a:ea typeface="Segoe UI" pitchFamily="34" charset="-122"/>
-                <a:cs typeface="Segoe UI" pitchFamily="34" charset="-120"/>
-              </a:rPr>
-              <a:t>Layer 3 private-path reachability is untested.
-</a:t>
-            </a:r>
-            <a:endParaRPr lang="en-US" sz="1000" dirty="0"/>
-          </a:p>
-          <a:p>
-            <a:pPr marL="228600" indent="-228600">
-              <a:lnSpc>
-                <a:spcPct val="112000"/>
-              </a:lnSpc>
-              <a:buSzPct val="100000"/>
-              <a:buChar char="●"/>
-            </a:pPr>
-            <a:r>
-              <a:rPr lang="en-US" sz="1000" b="1" dirty="0">
-                <a:solidFill>
-                  <a:srgbClr val="107C10"/>
-                </a:solidFill>
-                <a:latin typeface="Segoe UI" pitchFamily="34" charset="0"/>
-                <a:ea typeface="Segoe UI" pitchFamily="34" charset="-122"/>
-                <a:cs typeface="Segoe UI" pitchFamily="34" charset="-120"/>
-              </a:rPr>
-              <a:t>CONFIRMED  </a:t>
-            </a:r>
-            <a:pPr indent="0" marL="0">
-              <a:lnSpc>
-                <a:spcPct val="112000"/>
-              </a:lnSpc>
-              <a:buNone/>
-            </a:pPr>
-            <a:r>
-              <a:rPr lang="en-US" sz="1200" dirty="0">
-                <a:solidFill>
-                  <a:srgbClr val="1A1A1A"/>
-                </a:solidFill>
-                <a:latin typeface="Segoe UI" pitchFamily="34" charset="0"/>
-                <a:ea typeface="Segoe UI" pitchFamily="34" charset="-122"/>
-                <a:cs typeface="Segoe UI" pitchFamily="34" charset="-120"/>
-              </a:rPr>
-              <a:t>Layer 4 — Consumption: Foundry Toolbox aggregates registered tools for reuse; LangGraph consumes via supported client libraries.
-</a:t>
-            </a:r>
-            <a:endParaRPr lang="en-US" sz="1000" dirty="0"/>
-          </a:p>
-          <a:p>
-            <a:pPr marL="228600" indent="-228600">
-              <a:lnSpc>
-                <a:spcPct val="112000"/>
-              </a:lnSpc>
-              <a:buSzPct val="100000"/>
-              <a:buChar char="●"/>
-            </a:pPr>
-            <a:r>
-              <a:rPr lang="en-US" sz="1000" b="1" dirty="0">
-                <a:solidFill>
-                  <a:srgbClr val="D13438"/>
-                </a:solidFill>
-                <a:latin typeface="Segoe UI" pitchFamily="34" charset="0"/>
-                <a:ea typeface="Segoe UI" pitchFamily="34" charset="-122"/>
-                <a:cs typeface="Segoe UI" pitchFamily="34" charset="-120"/>
-              </a:rPr>
-              <a:t>REQUIRES VALIDATION  </a:t>
-            </a:r>
-            <a:pPr indent="0" marL="0">
-              <a:lnSpc>
-                <a:spcPct val="112000"/>
-              </a:lnSpc>
-              <a:buNone/>
-            </a:pPr>
-            <a:r>
-              <a:rPr lang="en-US" sz="1200" dirty="0">
-                <a:solidFill>
-                  <a:srgbClr val="1A1A1A"/>
-                </a:solidFill>
-                <a:latin typeface="Segoe UI" pitchFamily="34" charset="0"/>
-                <a:ea typeface="Segoe UI" pitchFamily="34" charset="-122"/>
-                <a:cs typeface="Segoe UI" pitchFamily="34" charset="-120"/>
-              </a:rPr>
-              <a:t>Layer 4 private connectivity requires validation.
-</a:t>
-            </a:r>
-            <a:endParaRPr lang="en-US" sz="1000" dirty="0"/>
-          </a:p>
-          <a:p>
-            <a:pPr marL="228600" indent="-228600">
-              <a:lnSpc>
-                <a:spcPct val="112000"/>
-              </a:lnSpc>
-              <a:buSzPct val="100000"/>
-              <a:buChar char="●"/>
-            </a:pPr>
-            <a:r>
-              <a:rPr lang="en-US" sz="1000" b="1" dirty="0">
-                <a:solidFill>
-                  <a:srgbClr val="107C10"/>
-                </a:solidFill>
-                <a:latin typeface="Segoe UI" pitchFamily="34" charset="0"/>
-                <a:ea typeface="Segoe UI" pitchFamily="34" charset="-122"/>
-                <a:cs typeface="Segoe UI" pitchFamily="34" charset="-120"/>
-              </a:rPr>
-              <a:t>CONFIRMED  </a:t>
-            </a:r>
-            <a:pPr indent="0" marL="0">
-              <a:lnSpc>
-                <a:spcPct val="112000"/>
-              </a:lnSpc>
-              <a:buNone/>
-            </a:pPr>
-            <a:r>
-              <a:rPr lang="en-US" sz="1200" dirty="0">
-                <a:solidFill>
-                  <a:srgbClr val="1A1A1A"/>
-                </a:solidFill>
-                <a:latin typeface="Segoe UI" pitchFamily="34" charset="0"/>
-                <a:ea typeface="Segoe UI" pitchFamily="34" charset="-122"/>
-                <a:cs typeface="Segoe UI" pitchFamily="34" charset="-120"/>
-              </a:rPr>
-              <a:t>Toolbox is the registration/aggregation layer, not the hosting runtime for custom MCP server code — a documented distinction to avoid at architecture review.
-</a:t>
+              <a:t>These map 1:1 to the Production Decision Gates categories used later in the deck.</a:t>
             </a:r>
             <a:endParaRPr lang="en-US" sz="1000" dirty="0"/>
           </a:p>
@@ -27361,7 +29283,7 @@
                 <a:ea typeface="Segoe UI" pitchFamily="34" charset="-122"/>
                 <a:cs typeface="Segoe UI" pitchFamily="34" charset="-120"/>
               </a:rPr>
-              <a:t>7 / 26</a:t>
+              <a:t>7 / 31</a:t>
             </a:r>
             <a:endParaRPr lang="en-US" sz="900" dirty="0"/>
           </a:p>
@@ -27452,7 +29374,7 @@
                 <a:ea typeface="Segoe UI" pitchFamily="34" charset="-122"/>
                 <a:cs typeface="Segoe UI" pitchFamily="34" charset="-120"/>
               </a:rPr>
-              <a:t>CORE SLIDE 7 OF 12</a:t>
+              <a:t>CORE SLIDE 3 OF 12</a:t>
             </a:r>
             <a:endParaRPr lang="en-US" sz="1100" dirty="0"/>
           </a:p>
@@ -27491,7 +29413,7 @@
                 <a:ea typeface="Segoe UI" pitchFamily="34" charset="-122"/>
                 <a:cs typeface="Segoe UI" pitchFamily="34" charset="-120"/>
               </a:rPr>
-              <a:t>State and History</a:t>
+              <a:t>Product Landscape — Five Operating Models</a:t>
             </a:r>
             <a:endParaRPr lang="en-US" sz="2600" dirty="0"/>
           </a:p>
@@ -27530,7 +29452,7 @@
                 <a:ea typeface="Segoe UI" pitchFamily="34" charset="-122"/>
                 <a:cs typeface="Segoe UI" pitchFamily="34" charset="-120"/>
               </a:rPr>
-              <a:t>Choose one runtime source of truth; compare Responses history, application-owned Cosmos checkpoints, and Standard Agent Setup capability hosts.</a:t>
+              <a:t>Separate five materially different operating models without conflating open-source LangGraph and paid LangSmith topologies.</a:t>
             </a:r>
             <a:endParaRPr lang="en-US" sz="1300" dirty="0"/>
           </a:p>
@@ -27610,8 +29532,7 @@
                 <a:ea typeface="Segoe UI" pitchFamily="34" charset="-122"/>
                 <a:cs typeface="Segoe UI" pitchFamily="34" charset="-120"/>
               </a:rPr>
-              <a:t>Option 1 — Foundry Responses history: platform-managed conversation history; sufficient for basic multi-turn interaction; no Cosmos DB required.
-</a:t>
+              <a:t>Model 1 — OSS LangGraph on customer-managed Azure compute: Air Canada owns runtime, queueing, scaling, persistence, and recovery.</a:t>
             </a:r>
             <a:endParaRPr lang="en-US" sz="1000" dirty="0"/>
           </a:p>
@@ -27649,8 +29570,7 @@
                 <a:ea typeface="Segoe UI" pitchFamily="34" charset="-122"/>
                 <a:cs typeface="Segoe UI" pitchFamily="34" charset="-120"/>
               </a:rPr>
-              <a:t>Option 2 package (langchain-azure-cosmosdb, CosmosDBSaver) is co-maintained by LangChain and Microsoft.
-</a:t>
+              <a:t>Model 2 — LangSmith Deployment Cloud: LangChain operates Agent Server; separate SaaS billing and control plane.</a:t>
             </a:r>
             <a:endParaRPr lang="en-US" sz="1000" dirty="0"/>
           </a:p>
@@ -27665,13 +29585,13 @@
             <a:r>
               <a:rPr lang="en-US" sz="1000" b="1" dirty="0">
                 <a:solidFill>
-                  <a:srgbClr val="5C2D91"/>
-                </a:solidFill>
-                <a:latin typeface="Segoe UI" pitchFamily="34" charset="0"/>
-                <a:ea typeface="Segoe UI" pitchFamily="34" charset="-122"/>
-                <a:cs typeface="Segoe UI" pitchFamily="34" charset="-120"/>
-              </a:rPr>
-              <a:t>INFERRED  </a:t>
+                  <a:srgbClr val="D13438"/>
+                </a:solidFill>
+                <a:latin typeface="Segoe UI" pitchFamily="34" charset="0"/>
+                <a:ea typeface="Segoe UI" pitchFamily="34" charset="-122"/>
+                <a:cs typeface="Segoe UI" pitchFamily="34" charset="-120"/>
+              </a:rPr>
+              <a:t>REQUIRES VALIDATION  </a:t>
             </a:r>
             <a:pPr indent="0" marL="0">
               <a:lnSpc>
@@ -27688,8 +29608,7 @@
                 <a:ea typeface="Segoe UI" pitchFamily="34" charset="-122"/>
                 <a:cs typeface="Segoe UI" pitchFamily="34" charset="-120"/>
               </a:rPr>
-              <a:t>Option 2 becomes authoritative graph state only when durable checkpoints, human-in-the-loop pause/resume, time travel, or app-controlled state are required — Hosted Agent pairing is untested.
-</a:t>
+              <a:t>Model 3 — LangSmith self-hosted Enterprise on Azure: Enterprise license plus customer-operated stack; Azure BYOC is only "planned for 2H 2026."</a:t>
             </a:r>
             <a:endParaRPr lang="en-US" sz="1000" dirty="0"/>
           </a:p>
@@ -27727,8 +29646,7 @@
                 <a:ea typeface="Segoe UI" pitchFamily="34" charset="-122"/>
                 <a:cs typeface="Segoe UI" pitchFamily="34" charset="-120"/>
               </a:rPr>
-              <a:t>Option 3 — Standard Agent Setup via capabilityHosts (BYO Cosmos DB / Storage / AI Search): needed only for data-residency/compliance, a separate Bicep tier from Basic Agent Setup.
-</a:t>
+              <a:t>Model 4 — Foundry Hosted Agent baseline: Foundry operates session compute; Air Canada owns graph code; no Cosmos DB, no Agent 365.</a:t>
             </a:r>
             <a:endParaRPr lang="en-US" sz="1000" dirty="0"/>
           </a:p>
@@ -27766,8 +29684,7 @@
                 <a:ea typeface="Segoe UI" pitchFamily="34" charset="-122"/>
                 <a:cs typeface="Segoe UI" pitchFamily="34" charset="-120"/>
               </a:rPr>
-              <a:t>No user-scoped conversation-list API was found in the researched documentation — an evidence gap, not proof of absence.
-</a:t>
+              <a:t>Model 4 limits (capacity, SLA) are not yet quantified.</a:t>
             </a:r>
             <a:endParaRPr lang="en-US" sz="1000" dirty="0"/>
           </a:p>
@@ -27805,8 +29722,45 @@
                 <a:ea typeface="Segoe UI" pitchFamily="34" charset="-122"/>
                 <a:cs typeface="Segoe UI" pitchFamily="34" charset="-120"/>
               </a:rPr>
-              <a:t>A sidebar can store metadata/identifiers without duplicating message bodies; duplicate-content compliance requirements need explicit retention/deletion/legal-hold design.
-</a:t>
+              <a:t>Model 5 — Phased Foundry target: baseline plus evidence-gated optional extensions (Cosmos DB, Agent 365, continuous evaluation, A2A); each extension individually requires validation.</a:t>
+            </a:r>
+            <a:endParaRPr lang="en-US" sz="1000" dirty="0"/>
+          </a:p>
+          <a:p>
+            <a:pPr marL="228600" indent="-228600">
+              <a:lnSpc>
+                <a:spcPct val="112000"/>
+              </a:lnSpc>
+              <a:buSzPct val="100000"/>
+              <a:buChar char="●"/>
+            </a:pPr>
+            <a:r>
+              <a:rPr lang="en-US" sz="1000" b="1" dirty="0">
+                <a:solidFill>
+                  <a:srgbClr val="107C10"/>
+                </a:solidFill>
+                <a:latin typeface="Segoe UI" pitchFamily="34" charset="0"/>
+                <a:ea typeface="Segoe UI" pitchFamily="34" charset="-122"/>
+                <a:cs typeface="Segoe UI" pitchFamily="34" charset="-120"/>
+              </a:rPr>
+              <a:t>CONFIRMED  </a:t>
+            </a:r>
+            <a:pPr indent="0" marL="0">
+              <a:lnSpc>
+                <a:spcPct val="112000"/>
+              </a:lnSpc>
+              <a:buNone/>
+            </a:pPr>
+            <a:r>
+              <a:rPr lang="en-US" sz="1200" dirty="0">
+                <a:solidFill>
+                  <a:srgbClr val="1A1A1A"/>
+                </a:solidFill>
+                <a:latin typeface="Segoe UI" pitchFamily="34" charset="0"/>
+                <a:ea typeface="Segoe UI" pitchFamily="34" charset="-122"/>
+                <a:cs typeface="Segoe UI" pitchFamily="34" charset="-120"/>
+              </a:rPr>
+              <a:t>Full dimension-by-dimension comparison lives in Appendix A.</a:t>
             </a:r>
             <a:endParaRPr lang="en-US" sz="1000" dirty="0"/>
           </a:p>
@@ -27904,7 +29858,7 @@
                 <a:ea typeface="Segoe UI" pitchFamily="34" charset="-122"/>
                 <a:cs typeface="Segoe UI" pitchFamily="34" charset="-120"/>
               </a:rPr>
-              <a:t>8 / 26</a:t>
+              <a:t>8 / 31</a:t>
             </a:r>
             <a:endParaRPr lang="en-US" sz="900" dirty="0"/>
           </a:p>
@@ -27995,7 +29949,7 @@
                 <a:ea typeface="Segoe UI" pitchFamily="34" charset="-122"/>
                 <a:cs typeface="Segoe UI" pitchFamily="34" charset="-120"/>
               </a:rPr>
-              <a:t>CORE SLIDE 8 OF 12</a:t>
+              <a:t>CORE SLIDE 4 OF 12</a:t>
             </a:r>
             <a:endParaRPr lang="en-US" sz="1100" dirty="0"/>
           </a:p>
@@ -28034,7 +29988,7 @@
                 <a:ea typeface="Segoe UI" pitchFamily="34" charset="-122"/>
                 <a:cs typeface="Segoe UI" pitchFamily="34" charset="-120"/>
               </a:rPr>
-              <a:t>Scaling and Cost</a:t>
+              <a:t>Recommendation</a:t>
             </a:r>
             <a:endParaRPr lang="en-US" sz="2600" dirty="0"/>
           </a:p>
@@ -28073,7 +30027,7 @@
                 <a:ea typeface="Segoe UI" pitchFamily="34" charset="-122"/>
                 <a:cs typeface="Segoe UI" pitchFamily="34" charset="-120"/>
               </a:rPr>
-              <a:t>Show that the scaling model is understood, but capacity and price are not yet quantified — unknowns stay visible.</a:t>
+              <a:t>Run a phased Foundry PoC with explicit go/no-go gates; separate the stable baseline from optional extensions.</a:t>
             </a:r>
             <a:endParaRPr lang="en-US" sz="1300" dirty="0"/>
           </a:p>
@@ -28153,8 +30107,7 @@
                 <a:ea typeface="Segoe UI" pitchFamily="34" charset="-122"/>
                 <a:cs typeface="Segoe UI" pitchFamily="34" charset="-120"/>
               </a:rPr>
-              <a:t>Scaling model: per-session isolation (each session is its own VM-isolated sandbox), not per-replica; idle timeout 5-60 min (default 15) triggers scale-to-zero with automatic state restore.
-</a:t>
+              <a:t>Recommended baseline: one hosted deployment with a genuine LangGraph supervisor + specialist-agent graph, Responses SSE, external MCP via Foundry connections/Toolbox, Application Insights, and offline evaluations.</a:t>
             </a:r>
             <a:endParaRPr lang="en-US" sz="1000" dirty="0"/>
           </a:p>
@@ -28192,8 +30145,7 @@
                 <a:ea typeface="Segoe UI" pitchFamily="34" charset="-122"/>
                 <a:cs typeface="Segoe UI" pitchFamily="34" charset="-120"/>
               </a:rPr>
-              <a:t>Billing model: vCPU-hour + GiB-hour of active session compute only — closest to Azure Container Apps consumption plan, not AKS always-on or App Service continuous billing.
-</a:t>
+              <a:t>Cosmos DB, Agent 365, continuous evaluation, and a second A2A-hosted agent are separate, individually gated experiments — not baseline dependencies.</a:t>
             </a:r>
             <a:endParaRPr lang="en-US" sz="1000" dirty="0"/>
           </a:p>
@@ -28208,13 +30160,13 @@
             <a:r>
               <a:rPr lang="en-US" sz="1000" b="1" dirty="0">
                 <a:solidFill>
-                  <a:srgbClr val="D13438"/>
-                </a:solidFill>
-                <a:latin typeface="Segoe UI" pitchFamily="34" charset="0"/>
-                <a:ea typeface="Segoe UI" pitchFamily="34" charset="-122"/>
-                <a:cs typeface="Segoe UI" pitchFamily="34" charset="-120"/>
-              </a:rPr>
-              <a:t>REQUIRES VALIDATION  </a:t>
+                  <a:srgbClr val="107C10"/>
+                </a:solidFill>
+                <a:latin typeface="Segoe UI" pitchFamily="34" charset="0"/>
+                <a:ea typeface="Segoe UI" pitchFamily="34" charset="-122"/>
+                <a:cs typeface="Segoe UI" pitchFamily="34" charset="-120"/>
+              </a:rPr>
+              <a:t>CONFIRMED  </a:t>
             </a:r>
             <a:pPr indent="0" marL="0">
               <a:lnSpc>
@@ -28231,86 +30183,7 @@
                 <a:ea typeface="Segoe UI" pitchFamily="34" charset="-122"/>
                 <a:cs typeface="Segoe UI" pitchFamily="34" charset="-120"/>
               </a:rPr>
-              <a:t>Unknown / TBD: exact $/vCPU-hr and $/GiB-hr rates (public pricing page showed "N/A"); maximum concurrent sessions; requests-per-second ceiling; same-thread turn concurrency; cold-start latency distribution.
-</a:t>
-            </a:r>
-            <a:endParaRPr lang="en-US" sz="1000" dirty="0"/>
-          </a:p>
-          <a:p>
-            <a:pPr marL="228600" indent="-228600">
-              <a:lnSpc>
-                <a:spcPct val="112000"/>
-              </a:lnSpc>
-              <a:buSzPct val="100000"/>
-              <a:buChar char="●"/>
-            </a:pPr>
-            <a:r>
-              <a:rPr lang="en-US" sz="1000" b="1" dirty="0">
-                <a:solidFill>
-                  <a:srgbClr val="107C10"/>
-                </a:solidFill>
-                <a:latin typeface="Segoe UI" pitchFamily="34" charset="0"/>
-                <a:ea typeface="Segoe UI" pitchFamily="34" charset="-122"/>
-                <a:cs typeface="Segoe UI" pitchFamily="34" charset="-120"/>
-              </a:rPr>
-              <a:t>CONFIRMED  </a:t>
-            </a:r>
-            <a:pPr indent="0" marL="0">
-              <a:lnSpc>
-                <a:spcPct val="112000"/>
-              </a:lnSpc>
-              <a:buNone/>
-            </a:pPr>
-            <a:r>
-              <a:rPr lang="en-US" sz="1200" dirty="0">
-                <a:solidFill>
-                  <a:srgbClr val="1A1A1A"/>
-                </a:solidFill>
-                <a:latin typeface="Segoe UI" pitchFamily="34" charset="0"/>
-                <a:ea typeface="Segoe UI" pitchFamily="34" charset="-122"/>
-                <a:cs typeface="Segoe UI" pitchFamily="34" charset="-120"/>
-              </a:rPr>
-              <a:t>Known cost drivers (formulas, not totals): model tokens, active session vCPU/memory, idle window, MCP hosting, telemetry, evaluation tokens, optional Cosmos DB and Agent 365 licensing, operations labor — amounts require validation.
-</a:t>
-            </a:r>
-            <a:endParaRPr lang="en-US" sz="1000" dirty="0"/>
-          </a:p>
-          <a:p>
-            <a:pPr marL="228600" indent="-228600">
-              <a:lnSpc>
-                <a:spcPct val="112000"/>
-              </a:lnSpc>
-              <a:buSzPct val="100000"/>
-              <a:buChar char="●"/>
-            </a:pPr>
-            <a:r>
-              <a:rPr lang="en-US" sz="1000" b="1" dirty="0">
-                <a:solidFill>
-                  <a:srgbClr val="107C10"/>
-                </a:solidFill>
-                <a:latin typeface="Segoe UI" pitchFamily="34" charset="0"/>
-                <a:ea typeface="Segoe UI" pitchFamily="34" charset="-122"/>
-                <a:cs typeface="Segoe UI" pitchFamily="34" charset="-120"/>
-              </a:rPr>
-              <a:t>CONFIRMED  </a:t>
-            </a:r>
-            <a:pPr indent="0" marL="0">
-              <a:lnSpc>
-                <a:spcPct val="112000"/>
-              </a:lnSpc>
-              <a:buNone/>
-            </a:pPr>
-            <a:r>
-              <a:rPr lang="en-US" sz="1200" dirty="0">
-                <a:solidFill>
-                  <a:srgbClr val="1A1A1A"/>
-                </a:solidFill>
-                <a:latin typeface="Segoe UI" pitchFamily="34" charset="0"/>
-                <a:ea typeface="Segoe UI" pitchFamily="34" charset="-122"/>
-                <a:cs typeface="Segoe UI" pitchFamily="34" charset="-120"/>
-              </a:rPr>
-              <a:t>Full load-test matrix in Appendix E.
-</a:t>
+              <a:t>Why not the other four models: OSS LangGraph = highest engineering burden; LangSmith Cloud = separate SaaS/billing dependency; LangSmith Enterprise = licensing plus highest ops burden; Microsoft Agent Framework not selected because Air Canada has an existing LangGraph investment.</a:t>
             </a:r>
             <a:endParaRPr lang="en-US" sz="1000" dirty="0"/>
           </a:p>
@@ -28408,7 +30281,7 @@
                 <a:ea typeface="Segoe UI" pitchFamily="34" charset="-122"/>
                 <a:cs typeface="Segoe UI" pitchFamily="34" charset="-120"/>
               </a:rPr>
-              <a:t>9 / 26</a:t>
+              <a:t>9 / 31</a:t>
             </a:r>
             <a:endParaRPr lang="en-US" sz="900" dirty="0"/>
           </a:p>
